--- a/docs/Ciencia_Ciudadana_Ambiental_Saladillo_v2.pptx
+++ b/docs/Ciencia_Ciudadana_Ambiental_Saladillo_v2.pptx
@@ -8554,671 +8554,1277 @@
 </file>
 
 <file path=ppt/slides/slide14.xml><?xml version="1.0" encoding="utf-8"?>
-<p:sld xmlns:a="http://schemas.openxmlformats.org/drawingml/2006/main" xmlns:r="http://schemas.openxmlformats.org/officeDocument/2006/relationships" xmlns:mc="http://schemas.openxmlformats.org/markup-compatibility/2006" xmlns:mv="urn:schemas-microsoft-com:mac:vml" xmlns:p="http://schemas.openxmlformats.org/presentationml/2006/main" xmlns:c="http://schemas.openxmlformats.org/drawingml/2006/chart" xmlns:dgm="http://schemas.openxmlformats.org/drawingml/2006/diagram" xmlns:o="urn:schemas-microsoft-com:office:office" xmlns:v="urn:schemas-microsoft-com:vml" xmlns:pvml="urn:schemas-microsoft-com:office:powerpoint" xmlns:com="http://schemas.openxmlformats.org/drawingml/2006/compatibility" xmlns:p14="http://schemas.microsoft.com/office/powerpoint/2010/main" xmlns:p15="http://schemas.microsoft.com/office/powerpoint/2012/main" xmlns:ahyp="http://schemas.microsoft.com/office/drawing/2018/hyperlinkcolor">
+<p:sld xmlns:a="http://schemas.openxmlformats.org/drawingml/2006/main" xmlns:p="http://schemas.openxmlformats.org/presentationml/2006/main" xmlns:r="http://schemas.openxmlformats.org/officeDocument/2006/relationships">
   <p:cSld>
     <p:bg>
       <p:bgPr>
         <a:solidFill>
-          <a:srgbClr val="2E2822"/>
+          <a:srgbClr val="FAF7F2"/>
         </a:solidFill>
+        <a:effectLst/>
       </p:bgPr>
     </p:bg>
     <p:spTree>
       <p:nvGrpSpPr>
-        <p:cNvPr id="290" name="Shape 290"/>
+        <p:cNvPr id="1" name=""/>
         <p:cNvGrpSpPr/>
         <p:nvPr/>
       </p:nvGrpSpPr>
-      <p:grpSpPr>
-        <a:xfrm>
-          <a:off x="0" y="0"/>
-          <a:ext cx="0" cy="0"/>
-          <a:chOff x="0" y="0"/>
-          <a:chExt cx="0" cy="0"/>
-        </a:xfrm>
-      </p:grpSpPr>
-      <p:sp>
-        <p:nvSpPr>
-          <p:cNvPr id="291" name="Google Shape;291;p16"/>
+      <p:grpSpPr/>
+      <p:sp>
+        <p:nvSpPr>
+          <p:cNvPr id="2" name="Oval 1"/>
           <p:cNvSpPr/>
           <p:nvPr/>
         </p:nvSpPr>
         <p:spPr>
           <a:xfrm>
-            <a:off x="822960" y="640080"/>
-            <a:ext cx="640080" cy="640080"/>
+            <a:off x="548640" y="502920"/>
+            <a:ext cx="566928" cy="566928"/>
           </a:xfrm>
           <a:prstGeom prst="ellipse">
             <a:avLst/>
           </a:prstGeom>
           <a:solidFill>
-            <a:srgbClr val="B84800"/>
+            <a:srgbClr val="9B3D00"/>
           </a:solidFill>
           <a:ln>
             <a:noFill/>
           </a:ln>
-        </p:spPr>
-        <p:txBody>
-          <a:bodyPr anchorCtr="0" anchor="ctr" bIns="91425" lIns="91425" spcFirstLastPara="1" rIns="91425" wrap="square" tIns="91425">
-            <a:noAutofit/>
-          </a:bodyPr>
-          <a:lstStyle/>
-          <a:p>
-            <a:pPr indent="0" lvl="0" marL="0" rtl="0" algn="l">
-              <a:spcBef>
-                <a:spcPts val="0"/>
-              </a:spcBef>
-              <a:spcAft>
-                <a:spcPts val="0"/>
-              </a:spcAft>
-              <a:buNone/>
-            </a:pPr>
-            <a:r>
-              <a:rPr/>
-              <a:t/>
-            </a:r>
-            <a:endParaRPr/>
+          <a:effectLst/>
+        </p:spPr>
+        <p:style>
+          <a:lnRef idx="1">
+            <a:schemeClr val="accent1"/>
+          </a:lnRef>
+          <a:fillRef idx="3">
+            <a:schemeClr val="accent1"/>
+          </a:fillRef>
+          <a:effectRef idx="2">
+            <a:schemeClr val="accent1"/>
+          </a:effectRef>
+          <a:fontRef idx="minor">
+            <a:schemeClr val="lt1"/>
+          </a:fontRef>
+        </p:style>
+        <p:txBody>
+          <a:bodyPr rtlCol="0" anchor="ctr"/>
+          <a:lstStyle/>
+          <a:p>
+            <a:pPr algn="ctr"/>
           </a:p>
         </p:txBody>
       </p:sp>
       <p:pic>
         <p:nvPicPr>
-          <p:cNvPr descr="/home/claude/pptx_build/icons/cierre.png" id="292" name="Google Shape;292;p16"/>
-          <p:cNvPicPr preferRelativeResize="0"/>
+          <p:cNvPr id="3" name="Picture 2" descr="image.png"/>
+          <p:cNvPicPr>
+            <a:picLocks noChangeAspect="1"/>
+          </p:cNvPicPr>
           <p:nvPr/>
         </p:nvPicPr>
-        <p:blipFill rotWithShape="1">
-          <a:blip r:embed="rId3">
-            <a:alphaModFix/>
-          </a:blip>
-          <a:srcRect b="0" l="0" r="0" t="0"/>
-          <a:stretch/>
+        <p:blipFill>
+          <a:blip r:embed="rId2"/>
+          <a:stretch>
+            <a:fillRect/>
+          </a:stretch>
         </p:blipFill>
         <p:spPr>
           <a:xfrm>
-            <a:off x="960120" y="777240"/>
-            <a:ext cx="365760" cy="365760"/>
-          </a:xfrm>
-          <a:prstGeom prst="rect">
-            <a:avLst/>
-          </a:prstGeom>
-          <a:noFill/>
-          <a:ln>
-            <a:noFill/>
-          </a:ln>
+            <a:off x="685800" y="640080"/>
+            <a:ext cx="292608" cy="292608"/>
+          </a:xfrm>
+          <a:prstGeom prst="rect">
+            <a:avLst/>
+          </a:prstGeom>
         </p:spPr>
       </p:pic>
       <p:sp>
         <p:nvSpPr>
-          <p:cNvPr id="293" name="Google Shape;293;p16"/>
-          <p:cNvSpPr txBox="1"/>
-          <p:nvPr/>
-        </p:nvSpPr>
-        <p:spPr>
-          <a:xfrm>
-            <a:off x="822960" y="1508760"/>
-            <a:ext cx="9601200" cy="822960"/>
-          </a:xfrm>
-          <a:prstGeom prst="rect">
-            <a:avLst/>
-          </a:prstGeom>
-          <a:noFill/>
-          <a:ln>
-            <a:noFill/>
-          </a:ln>
-        </p:spPr>
-        <p:txBody>
-          <a:bodyPr anchorCtr="0" anchor="ctr" bIns="0" lIns="0" spcFirstLastPara="1" rIns="0" wrap="square" tIns="0">
-            <a:noAutofit/>
-          </a:bodyPr>
-          <a:lstStyle/>
-          <a:p>
-            <a:pPr indent="0" lvl="0" marL="0" marR="0" rtl="0" algn="l">
-              <a:spcBef>
-                <a:spcPts val="0"/>
-              </a:spcBef>
-              <a:spcAft>
-                <a:spcPts val="0"/>
-              </a:spcAft>
-              <a:buClr>
-                <a:srgbClr val="FFFFFF"/>
-              </a:buClr>
-              <a:buSzPts val="3000"/>
-              <a:buFont typeface="Calibri"/>
-              <a:buNone/>
-            </a:pPr>
-            <a:r>
-              <a:rPr b="1" i="0" lang="en-US" sz="3000" u="none" cap="none" strike="noStrike">
-                <a:solidFill>
-                  <a:srgbClr val="FFFFFF"/>
-                </a:solidFill>
-                <a:latin typeface="Calibri"/>
-                <a:ea typeface="Calibri"/>
-                <a:cs typeface="Calibri"/>
-                <a:sym typeface="Calibri"/>
-              </a:rPr>
-              <a:t>Lo que proponemos a la comunidad educativa</a:t>
-            </a:r>
-            <a:endParaRPr b="0" i="0" sz="3000" u="none" cap="none" strike="noStrike">
-              <a:solidFill>
-                <a:schemeClr val="dk1"/>
-              </a:solidFill>
-              <a:latin typeface="Calibri"/>
-              <a:ea typeface="Calibri"/>
-              <a:cs typeface="Calibri"/>
-              <a:sym typeface="Calibri"/>
-            </a:endParaRPr>
-          </a:p>
-        </p:txBody>
-      </p:sp>
-      <p:sp>
-        <p:nvSpPr>
-          <p:cNvPr id="294" name="Google Shape;294;p16"/>
-          <p:cNvSpPr txBox="1"/>
-          <p:nvPr/>
-        </p:nvSpPr>
-        <p:spPr>
-          <a:xfrm>
-            <a:off x="822960" y="2514600"/>
-            <a:ext cx="9784080" cy="2011680"/>
-          </a:xfrm>
-          <a:prstGeom prst="rect">
-            <a:avLst/>
-          </a:prstGeom>
-          <a:noFill/>
-          <a:ln>
-            <a:noFill/>
-          </a:ln>
-        </p:spPr>
-        <p:txBody>
-          <a:bodyPr anchorCtr="0" anchor="ctr" bIns="0" lIns="0" spcFirstLastPara="1" rIns="0" wrap="square" tIns="0">
-            <a:noAutofit/>
-          </a:bodyPr>
-          <a:lstStyle/>
-          <a:p>
-            <a:pPr indent="-228600" lvl="0" marL="228600" marR="0" rtl="0" algn="l">
-              <a:lnSpc>
-                <a:spcPct val="125000"/>
-              </a:lnSpc>
-              <a:spcBef>
-                <a:spcPts val="0"/>
-              </a:spcBef>
-              <a:spcAft>
-                <a:spcPts val="0"/>
-              </a:spcAft>
-              <a:buClr>
-                <a:srgbClr val="E8DFD6"/>
-              </a:buClr>
-              <a:buSzPts val="1700"/>
-              <a:buFont typeface="Calibri"/>
-              <a:buChar char="•"/>
-            </a:pPr>
-            <a:r>
-              <a:rPr b="0" i="0" lang="en-US" sz="1800" u="none" cap="none" strike="noStrike">
-                <a:solidFill>
-                  <a:srgbClr val="E8DFD6"/>
-                </a:solidFill>
-                <a:latin typeface="Calibri"/>
-                <a:ea typeface="Calibri"/>
-                <a:cs typeface="Calibri"/>
-                <a:sym typeface="Calibri"/>
-              </a:rPr>
-              <a:t>Acompañar y difundir el proyecto entre las escuelas del distrito.</a:t>
-            </a:r>
-            <a:endParaRPr b="0" i="0" sz="1700" u="none" cap="none" strike="noStrike">
-              <a:solidFill>
-                <a:schemeClr val="dk1"/>
-              </a:solidFill>
-              <a:latin typeface="Calibri"/>
-              <a:ea typeface="Calibri"/>
-              <a:cs typeface="Calibri"/>
-              <a:sym typeface="Calibri"/>
-            </a:endParaRPr>
-          </a:p>
-          <a:p>
-            <a:pPr indent="-228600" lvl="0" marL="228600" marR="0" rtl="0" algn="l">
-              <a:lnSpc>
-                <a:spcPct val="125000"/>
-              </a:lnSpc>
-              <a:spcBef>
-                <a:spcPts val="1400"/>
-              </a:spcBef>
-              <a:spcAft>
-                <a:spcPts val="0"/>
-              </a:spcAft>
-              <a:buClr>
-                <a:srgbClr val="E8DFD6"/>
-              </a:buClr>
-              <a:buSzPts val="1700"/>
-              <a:buFont typeface="Calibri"/>
-              <a:buChar char="•"/>
-            </a:pPr>
-            <a:r>
-              <a:rPr b="0" i="0" lang="en-US" sz="1800" u="none" cap="none" strike="noStrike">
-                <a:solidFill>
-                  <a:srgbClr val="E8DFD6"/>
-                </a:solidFill>
-                <a:latin typeface="Calibri"/>
-                <a:ea typeface="Calibri"/>
-                <a:cs typeface="Calibri"/>
-                <a:sym typeface="Calibri"/>
-              </a:rPr>
-              <a:t>Articular con la implementación de la EAI: contenidos y capacitación docente, en conjunto con el equipo de educación.</a:t>
-            </a:r>
-            <a:endParaRPr b="0" i="0" sz="1700" u="none" cap="none" strike="noStrike">
-              <a:solidFill>
-                <a:schemeClr val="dk1"/>
-              </a:solidFill>
-              <a:latin typeface="Calibri"/>
-              <a:ea typeface="Calibri"/>
-              <a:cs typeface="Calibri"/>
-              <a:sym typeface="Calibri"/>
-            </a:endParaRPr>
-          </a:p>
-          <a:p>
-            <a:pPr indent="-228600" lvl="0" marL="228600" marR="0" rtl="0" algn="l">
-              <a:lnSpc>
-                <a:spcPct val="125000"/>
-              </a:lnSpc>
-              <a:spcBef>
-                <a:spcPts val="1400"/>
-              </a:spcBef>
-              <a:spcAft>
-                <a:spcPts val="0"/>
-              </a:spcAft>
-              <a:buClr>
-                <a:srgbClr val="E8DFD6"/>
-              </a:buClr>
-              <a:buSzPts val="1700"/>
-              <a:buFont typeface="Calibri"/>
-              <a:buChar char="•"/>
-            </a:pPr>
-            <a:r>
-              <a:rPr b="0" i="0" lang="en-US" sz="1800" u="none" cap="none" strike="noStrike">
-                <a:solidFill>
-                  <a:srgbClr val="E8DFD6"/>
-                </a:solidFill>
-                <a:latin typeface="Calibri"/>
-                <a:ea typeface="Calibri"/>
-                <a:cs typeface="Calibri"/>
-                <a:sym typeface="Calibri"/>
-              </a:rPr>
-              <a:t>Sumar nuevas escuelas como sedes de sensores y usar el portal como recurso de aula.</a:t>
-            </a:r>
-            <a:endParaRPr b="0" i="0" sz="1700" u="none" cap="none" strike="noStrike">
-              <a:solidFill>
-                <a:schemeClr val="dk1"/>
-              </a:solidFill>
-              <a:latin typeface="Calibri"/>
-              <a:ea typeface="Calibri"/>
-              <a:cs typeface="Calibri"/>
-              <a:sym typeface="Calibri"/>
-            </a:endParaRPr>
-          </a:p>
-        </p:txBody>
-      </p:sp>
-      <p:cxnSp>
-        <p:nvCxnSpPr>
-          <p:cNvPr id="295" name="Google Shape;295;p16"/>
-          <p:cNvCxnSpPr/>
-          <p:nvPr/>
-        </p:nvCxnSpPr>
-        <p:spPr>
-          <a:xfrm>
-            <a:off x="822960" y="5029200"/>
-            <a:ext cx="9784080" cy="0"/>
-          </a:xfrm>
-          <a:prstGeom prst="straightConnector1">
-            <a:avLst/>
-          </a:prstGeom>
-          <a:noFill/>
-          <a:ln cap="flat" cmpd="sng" w="12700">
-            <a:solidFill>
-              <a:srgbClr val="534A3D"/>
-            </a:solidFill>
-            <a:prstDash val="solid"/>
-            <a:round/>
-            <a:headEnd len="sm" w="sm" type="none"/>
-            <a:tailEnd len="sm" w="sm" type="none"/>
-          </a:ln>
-        </p:spPr>
-      </p:cxnSp>
-      <p:pic>
-        <p:nvPicPr>
-          <p:cNvPr descr="/home/claude/pptx_build/icons/email.png" id="296" name="Google Shape;296;p16"/>
-          <p:cNvPicPr preferRelativeResize="0"/>
-          <p:nvPr/>
-        </p:nvPicPr>
-        <p:blipFill rotWithShape="1">
-          <a:blip r:embed="rId4">
-            <a:alphaModFix/>
-          </a:blip>
-          <a:srcRect b="0" l="0" r="0" t="0"/>
-          <a:stretch/>
-        </p:blipFill>
-        <p:spPr>
-          <a:xfrm>
-            <a:off x="822960" y="5349240"/>
-            <a:ext cx="274320" cy="274320"/>
-          </a:xfrm>
-          <a:prstGeom prst="rect">
-            <a:avLst/>
-          </a:prstGeom>
-          <a:noFill/>
-          <a:ln>
-            <a:noFill/>
-          </a:ln>
-        </p:spPr>
-      </p:pic>
-      <p:sp>
-        <p:nvSpPr>
-          <p:cNvPr id="297" name="Google Shape;297;p16"/>
-          <p:cNvSpPr txBox="1"/>
-          <p:nvPr/>
-        </p:nvSpPr>
-        <p:spPr>
-          <a:xfrm>
-            <a:off x="1207008" y="5330952"/>
-            <a:ext cx="3200400" cy="320040"/>
-          </a:xfrm>
-          <a:prstGeom prst="rect">
-            <a:avLst/>
-          </a:prstGeom>
-          <a:noFill/>
-          <a:ln>
-            <a:noFill/>
-          </a:ln>
-        </p:spPr>
-        <p:txBody>
-          <a:bodyPr anchorCtr="0" anchor="ctr" bIns="0" lIns="0" spcFirstLastPara="1" rIns="0" wrap="square" tIns="0">
-            <a:noAutofit/>
-          </a:bodyPr>
-          <a:lstStyle/>
-          <a:p>
-            <a:pPr indent="0" lvl="0" marL="0" marR="0" rtl="0" algn="l">
-              <a:spcBef>
-                <a:spcPts val="0"/>
-              </a:spcBef>
-              <a:spcAft>
-                <a:spcPts val="0"/>
-              </a:spcAft>
-              <a:buClr>
-                <a:srgbClr val="FFFFFF"/>
-              </a:buClr>
-              <a:buSzPts val="1250"/>
-              <a:buFont typeface="JetBrains Mono"/>
-              <a:buNone/>
-            </a:pPr>
-            <a:r>
-              <a:rPr b="0" i="0" lang="en-US" sz="1400" u="none" cap="none" strike="noStrike">
-                <a:solidFill>
-                  <a:srgbClr val="FFFFFF"/>
-                </a:solidFill>
-                <a:latin typeface="JetBrains Mono"/>
-                <a:ea typeface="JetBrains Mono"/>
-                <a:cs typeface="JetBrains Mono"/>
-                <a:sym typeface="JetBrains Mono"/>
-              </a:rPr>
-              <a:t>lucianolamaita@gmail.com</a:t>
-            </a:r>
-            <a:endParaRPr b="0" i="0" sz="1250" u="none" cap="none" strike="noStrike">
-              <a:solidFill>
-                <a:schemeClr val="dk1"/>
-              </a:solidFill>
-              <a:latin typeface="Calibri"/>
-              <a:ea typeface="Calibri"/>
-              <a:cs typeface="Calibri"/>
-              <a:sym typeface="Calibri"/>
-            </a:endParaRPr>
-          </a:p>
-        </p:txBody>
-      </p:sp>
-      <p:pic>
-        <p:nvPicPr>
-          <p:cNvPr descr="/home/claude/pptx_build/icons/globe.png" id="298" name="Google Shape;298;p16"/>
-          <p:cNvPicPr preferRelativeResize="0"/>
-          <p:nvPr/>
-        </p:nvPicPr>
-        <p:blipFill rotWithShape="1">
-          <a:blip r:embed="rId5">
-            <a:alphaModFix/>
-          </a:blip>
-          <a:srcRect b="0" l="0" r="0" t="0"/>
-          <a:stretch/>
-        </p:blipFill>
-        <p:spPr>
-          <a:xfrm>
-            <a:off x="4480560" y="5349240"/>
-            <a:ext cx="274320" cy="274320"/>
-          </a:xfrm>
-          <a:prstGeom prst="rect">
-            <a:avLst/>
-          </a:prstGeom>
-          <a:noFill/>
-          <a:ln>
-            <a:noFill/>
-          </a:ln>
-        </p:spPr>
-      </p:pic>
-      <p:sp>
-        <p:nvSpPr>
-          <p:cNvPr id="299" name="Google Shape;299;p16"/>
-          <p:cNvSpPr txBox="1"/>
-          <p:nvPr/>
-        </p:nvSpPr>
-        <p:spPr>
-          <a:xfrm>
-            <a:off x="4864608" y="5330952"/>
-            <a:ext cx="2011680" cy="320040"/>
-          </a:xfrm>
-          <a:prstGeom prst="rect">
-            <a:avLst/>
-          </a:prstGeom>
-          <a:noFill/>
-          <a:ln>
-            <a:noFill/>
-          </a:ln>
-        </p:spPr>
-        <p:txBody>
-          <a:bodyPr anchorCtr="0" anchor="ctr" bIns="0" lIns="0" spcFirstLastPara="1" rIns="0" wrap="square" tIns="0">
-            <a:noAutofit/>
-          </a:bodyPr>
-          <a:lstStyle/>
-          <a:p>
-            <a:pPr indent="0" lvl="0" marL="0" marR="0" rtl="0" algn="l">
-              <a:spcBef>
-                <a:spcPts val="0"/>
-              </a:spcBef>
-              <a:spcAft>
-                <a:spcPts val="0"/>
-              </a:spcAft>
-              <a:buClr>
-                <a:srgbClr val="FFFFFF"/>
-              </a:buClr>
-              <a:buSzPts val="1250"/>
-              <a:buFont typeface="JetBrains Mono"/>
-              <a:buNone/>
-            </a:pPr>
-            <a:r>
-              <a:rPr b="0" i="0" lang="en-US" sz="1400" u="none" cap="none" strike="noStrike">
-                <a:solidFill>
-                  <a:srgbClr val="FFFFFF"/>
-                </a:solidFill>
-                <a:latin typeface="JetBrains Mono"/>
-                <a:ea typeface="JetBrains Mono"/>
-                <a:cs typeface="JetBrains Mono"/>
-                <a:sym typeface="JetBrains Mono"/>
-              </a:rPr>
-              <a:t>profe.lemeit.ar</a:t>
-            </a:r>
-            <a:endParaRPr b="0" i="0" sz="1250" u="none" cap="none" strike="noStrike">
-              <a:solidFill>
-                <a:schemeClr val="dk1"/>
-              </a:solidFill>
-              <a:latin typeface="Calibri"/>
-              <a:ea typeface="Calibri"/>
-              <a:cs typeface="Calibri"/>
-              <a:sym typeface="Calibri"/>
-            </a:endParaRPr>
-          </a:p>
-        </p:txBody>
-      </p:sp>
-      <p:pic>
-        <p:nvPicPr>
-          <p:cNvPr descr="/home/claude/pptx_build/icons/portal.png" id="300" name="Google Shape;300;p16"/>
-          <p:cNvPicPr preferRelativeResize="0"/>
-          <p:nvPr/>
-        </p:nvPicPr>
-        <p:blipFill rotWithShape="1">
-          <a:blip r:embed="rId6">
-            <a:alphaModFix/>
-          </a:blip>
-          <a:srcRect b="0" l="0" r="0" t="0"/>
-          <a:stretch/>
-        </p:blipFill>
-        <p:spPr>
-          <a:xfrm>
-            <a:off x="6858000" y="5349240"/>
-            <a:ext cx="274320" cy="274320"/>
-          </a:xfrm>
-          <a:prstGeom prst="rect">
-            <a:avLst/>
-          </a:prstGeom>
-          <a:noFill/>
-          <a:ln>
-            <a:noFill/>
-          </a:ln>
-        </p:spPr>
-      </p:pic>
-      <p:sp>
-        <p:nvSpPr>
-          <p:cNvPr id="301" name="Google Shape;301;p16"/>
-          <p:cNvSpPr txBox="1"/>
-          <p:nvPr/>
-        </p:nvSpPr>
-        <p:spPr>
-          <a:xfrm>
-            <a:off x="7242048" y="5330952"/>
-            <a:ext cx="2011680" cy="320040"/>
-          </a:xfrm>
-          <a:prstGeom prst="rect">
-            <a:avLst/>
-          </a:prstGeom>
-          <a:noFill/>
-          <a:ln>
-            <a:noFill/>
-          </a:ln>
-        </p:spPr>
-        <p:txBody>
-          <a:bodyPr anchorCtr="0" anchor="ctr" bIns="0" lIns="0" spcFirstLastPara="1" rIns="0" wrap="square" tIns="0">
-            <a:noAutofit/>
-          </a:bodyPr>
-          <a:lstStyle/>
-          <a:p>
-            <a:pPr indent="0" lvl="0" marL="0" marR="0" rtl="0" algn="l">
-              <a:spcBef>
-                <a:spcPts val="0"/>
-              </a:spcBef>
-              <a:spcAft>
-                <a:spcPts val="0"/>
-              </a:spcAft>
-              <a:buClr>
-                <a:srgbClr val="FFFFFF"/>
-              </a:buClr>
-              <a:buSzPts val="1250"/>
-              <a:buFont typeface="JetBrains Mono"/>
-              <a:buNone/>
-            </a:pPr>
-            <a:r>
-              <a:rPr b="0" i="0" lang="en-US" sz="1400" u="none" cap="none" strike="noStrike">
-                <a:solidFill>
-                  <a:srgbClr val="FFFFFF"/>
-                </a:solidFill>
-                <a:latin typeface="JetBrains Mono"/>
-                <a:ea typeface="JetBrains Mono"/>
-                <a:cs typeface="JetBrains Mono"/>
-                <a:sym typeface="JetBrains Mono"/>
-              </a:rPr>
-              <a:t>aq.lemeit.ar</a:t>
-            </a:r>
-            <a:endParaRPr b="0" i="0" sz="1250" u="none" cap="none" strike="noStrike">
-              <a:solidFill>
-                <a:schemeClr val="dk1"/>
-              </a:solidFill>
-              <a:latin typeface="Calibri"/>
-              <a:ea typeface="Calibri"/>
-              <a:cs typeface="Calibri"/>
-              <a:sym typeface="Calibri"/>
-            </a:endParaRPr>
-          </a:p>
-        </p:txBody>
-      </p:sp>
-      <p:sp>
-        <p:nvSpPr>
-          <p:cNvPr id="302" name="Google Shape;302;p16"/>
-          <p:cNvSpPr txBox="1"/>
-          <p:nvPr/>
-        </p:nvSpPr>
-        <p:spPr>
-          <a:xfrm>
-            <a:off x="822960" y="5989320"/>
-            <a:ext cx="4572000" cy="457200"/>
-          </a:xfrm>
-          <a:prstGeom prst="rect">
-            <a:avLst/>
-          </a:prstGeom>
-          <a:noFill/>
-          <a:ln>
-            <a:noFill/>
-          </a:ln>
-        </p:spPr>
-        <p:txBody>
-          <a:bodyPr anchorCtr="0" anchor="ctr" bIns="0" lIns="0" spcFirstLastPara="1" rIns="0" wrap="square" tIns="0">
-            <a:noAutofit/>
-          </a:bodyPr>
-          <a:lstStyle/>
-          <a:p>
-            <a:pPr indent="0" lvl="0" marL="0" marR="0" rtl="0" algn="l">
-              <a:spcBef>
-                <a:spcPts val="0"/>
-              </a:spcBef>
-              <a:spcAft>
-                <a:spcPts val="0"/>
-              </a:spcAft>
-              <a:buClr>
-                <a:srgbClr val="C9BEB2"/>
-              </a:buClr>
-              <a:buSzPts val="1800"/>
-              <a:buFont typeface="Calibri"/>
-              <a:buNone/>
-            </a:pPr>
-            <a:r>
-              <a:rPr b="0" i="1" lang="en-US" sz="1900" u="none" cap="none" strike="noStrike">
-                <a:solidFill>
-                  <a:srgbClr val="C9BEB2"/>
-                </a:solidFill>
-                <a:latin typeface="Calibri"/>
-                <a:ea typeface="Calibri"/>
-                <a:cs typeface="Calibri"/>
-                <a:sym typeface="Calibri"/>
-              </a:rPr>
-              <a:t>Gracias.</a:t>
-            </a:r>
-            <a:endParaRPr b="0" i="0" sz="1800" u="none" cap="none" strike="noStrike">
-              <a:solidFill>
-                <a:schemeClr val="dk1"/>
-              </a:solidFill>
-              <a:latin typeface="Calibri"/>
-              <a:ea typeface="Calibri"/>
-              <a:cs typeface="Calibri"/>
-              <a:sym typeface="Calibri"/>
-            </a:endParaRPr>
-          </a:p>
-        </p:txBody>
-      </p:sp>
-      <p:sp>
-        <p:nvSpPr>
-          <p:cNvPr id="303" name="Google Shape;303;p16"/>
+          <p:cNvPr id="4" name="TextBox 3"/>
+          <p:cNvSpPr txBox="1"/>
+          <p:nvPr/>
+        </p:nvSpPr>
+        <p:spPr>
+          <a:xfrm>
+            <a:off x="1325880" y="457200"/>
+            <a:ext cx="10241280" cy="822960"/>
+          </a:xfrm>
+          <a:prstGeom prst="rect">
+            <a:avLst/>
+          </a:prstGeom>
+          <a:noFill/>
+        </p:spPr>
+        <p:txBody>
+          <a:bodyPr wrap="square" anchor="ctr">
+            <a:spAutoFit/>
+          </a:bodyPr>
+          <a:lstStyle/>
+          <a:p>
+            <a:r>
+              <a:rPr sz="2600" b="1">
+                <a:solidFill>
+                  <a:srgbClr val="2A1D12"/>
+                </a:solidFill>
+                <a:latin typeface="Calibri"/>
+              </a:rPr>
+              <a:t>Próxima etapa: 5 escuelas confirmadas</a:t>
+            </a:r>
+          </a:p>
+        </p:txBody>
+      </p:sp>
+      <p:sp>
+        <p:nvSpPr>
+          <p:cNvPr id="5" name="TextBox 4"/>
+          <p:cNvSpPr txBox="1"/>
+          <p:nvPr/>
+        </p:nvSpPr>
+        <p:spPr>
+          <a:xfrm>
+            <a:off x="914400" y="1417320"/>
+            <a:ext cx="10363200" cy="320040"/>
+          </a:xfrm>
+          <a:prstGeom prst="rect">
+            <a:avLst/>
+          </a:prstGeom>
+          <a:noFill/>
+        </p:spPr>
+        <p:txBody>
+          <a:bodyPr wrap="square">
+            <a:spAutoFit/>
+          </a:bodyPr>
+          <a:lstStyle/>
+          <a:p>
+            <a:pPr algn="l"/>
+            <a:r>
+              <a:rPr sz="1500" b="0">
+                <a:solidFill>
+                  <a:srgbClr val="8A7A6A"/>
+                </a:solidFill>
+                <a:latin typeface="Calibri"/>
+              </a:rPr>
+              <a:t>Saladillo (3) y el partido de 25 de Mayo (2) — primera expansión de la red fuera de Saladillo.</a:t>
+            </a:r>
+          </a:p>
+        </p:txBody>
+      </p:sp>
+      <p:sp>
+        <p:nvSpPr>
+          <p:cNvPr id="6" name="TextBox 5"/>
+          <p:cNvSpPr txBox="1"/>
+          <p:nvPr/>
+        </p:nvSpPr>
+        <p:spPr>
+          <a:xfrm>
+            <a:off x="914400" y="2011680"/>
+            <a:ext cx="4800600" cy="320040"/>
+          </a:xfrm>
+          <a:prstGeom prst="rect">
+            <a:avLst/>
+          </a:prstGeom>
+          <a:noFill/>
+        </p:spPr>
+        <p:txBody>
+          <a:bodyPr wrap="square">
+            <a:spAutoFit/>
+          </a:bodyPr>
+          <a:lstStyle/>
+          <a:p>
+            <a:pPr algn="l"/>
+            <a:r>
+              <a:rPr sz="1250" b="1">
+                <a:solidFill>
+                  <a:srgbClr val="9B3D00"/>
+                </a:solidFill>
+                <a:latin typeface="Calibri"/>
+              </a:rPr>
+              <a:t>INSTITUCIÓN</a:t>
+            </a:r>
+          </a:p>
+        </p:txBody>
+      </p:sp>
+      <p:sp>
+        <p:nvSpPr>
+          <p:cNvPr id="7" name="TextBox 6"/>
+          <p:cNvSpPr txBox="1"/>
+          <p:nvPr/>
+        </p:nvSpPr>
+        <p:spPr>
+          <a:xfrm>
+            <a:off x="5715000" y="2011680"/>
+            <a:ext cx="1600200" cy="320040"/>
+          </a:xfrm>
+          <a:prstGeom prst="rect">
+            <a:avLst/>
+          </a:prstGeom>
+          <a:noFill/>
+        </p:spPr>
+        <p:txBody>
+          <a:bodyPr wrap="square">
+            <a:spAutoFit/>
+          </a:bodyPr>
+          <a:lstStyle/>
+          <a:p>
+            <a:pPr algn="l"/>
+            <a:r>
+              <a:rPr sz="1250" b="1">
+                <a:solidFill>
+                  <a:srgbClr val="9B3D00"/>
+                </a:solidFill>
+                <a:latin typeface="Calibri"/>
+              </a:rPr>
+              <a:t>DISTRITO</a:t>
+            </a:r>
+          </a:p>
+        </p:txBody>
+      </p:sp>
+      <p:sp>
+        <p:nvSpPr>
+          <p:cNvPr id="8" name="TextBox 7"/>
+          <p:cNvSpPr txBox="1"/>
+          <p:nvPr/>
+        </p:nvSpPr>
+        <p:spPr>
+          <a:xfrm>
+            <a:off x="7315200" y="2011680"/>
+            <a:ext cx="1280160" cy="320040"/>
+          </a:xfrm>
+          <a:prstGeom prst="rect">
+            <a:avLst/>
+          </a:prstGeom>
+          <a:noFill/>
+        </p:spPr>
+        <p:txBody>
+          <a:bodyPr wrap="square">
+            <a:spAutoFit/>
+          </a:bodyPr>
+          <a:lstStyle/>
+          <a:p>
+            <a:pPr algn="l"/>
+            <a:r>
+              <a:rPr sz="1250" b="1">
+                <a:solidFill>
+                  <a:srgbClr val="9B3D00"/>
+                </a:solidFill>
+                <a:latin typeface="Calibri"/>
+              </a:rPr>
+              <a:t>ZONA</a:t>
+            </a:r>
+          </a:p>
+        </p:txBody>
+      </p:sp>
+      <p:sp>
+        <p:nvSpPr>
+          <p:cNvPr id="9" name="TextBox 8"/>
+          <p:cNvSpPr txBox="1"/>
+          <p:nvPr/>
+        </p:nvSpPr>
+        <p:spPr>
+          <a:xfrm>
+            <a:off x="8595360" y="2011680"/>
+            <a:ext cx="2865120" cy="320040"/>
+          </a:xfrm>
+          <a:prstGeom prst="rect">
+            <a:avLst/>
+          </a:prstGeom>
+          <a:noFill/>
+        </p:spPr>
+        <p:txBody>
+          <a:bodyPr wrap="square">
+            <a:spAutoFit/>
+          </a:bodyPr>
+          <a:lstStyle/>
+          <a:p>
+            <a:pPr algn="l"/>
+            <a:r>
+              <a:rPr sz="1250" b="1">
+                <a:solidFill>
+                  <a:srgbClr val="9B3D00"/>
+                </a:solidFill>
+                <a:latin typeface="Calibri"/>
+              </a:rPr>
+              <a:t>DIRECCIÓN</a:t>
+            </a:r>
+          </a:p>
+        </p:txBody>
+      </p:sp>
+      <p:sp>
+        <p:nvSpPr>
+          <p:cNvPr id="10" name="Rounded Rectangle 9"/>
+          <p:cNvSpPr/>
+          <p:nvPr/>
+        </p:nvSpPr>
+        <p:spPr>
+          <a:xfrm>
+            <a:off x="914400" y="2423160"/>
+            <a:ext cx="10546080" cy="640080"/>
+          </a:xfrm>
+          <a:prstGeom prst="roundRect">
+            <a:avLst>
+              <a:gd name="adj" fmla="val 4500"/>
+            </a:avLst>
+          </a:prstGeom>
+          <a:solidFill>
+            <a:srgbClr val="F0EBE2"/>
+          </a:solidFill>
+          <a:ln>
+            <a:noFill/>
+          </a:ln>
+          <a:effectLst>
+            <a:outerShdw blurRad="127000" dist="38100" dir="5400000" algn="bl" rotWithShape="0">
+              <a:srgbClr val="2A1D12">
+                <a:alpha val="18039"/>
+              </a:srgbClr>
+            </a:outerShdw>
+          </a:effectLst>
+        </p:spPr>
+        <p:style>
+          <a:lnRef idx="1">
+            <a:schemeClr val="accent1"/>
+          </a:lnRef>
+          <a:fillRef idx="3">
+            <a:schemeClr val="accent1"/>
+          </a:fillRef>
+          <a:effectRef idx="2">
+            <a:schemeClr val="accent1"/>
+          </a:effectRef>
+          <a:fontRef idx="minor">
+            <a:schemeClr val="lt1"/>
+          </a:fontRef>
+        </p:style>
+        <p:txBody>
+          <a:bodyPr rtlCol="0" anchor="ctr"/>
+          <a:lstStyle/>
+          <a:p>
+            <a:pPr algn="ctr"/>
+          </a:p>
+        </p:txBody>
+      </p:sp>
+      <p:sp>
+        <p:nvSpPr>
+          <p:cNvPr id="11" name="TextBox 10"/>
+          <p:cNvSpPr txBox="1"/>
+          <p:nvPr/>
+        </p:nvSpPr>
+        <p:spPr>
+          <a:xfrm>
+            <a:off x="1051560" y="2423160"/>
+            <a:ext cx="4617720" cy="640080"/>
+          </a:xfrm>
+          <a:prstGeom prst="rect">
+            <a:avLst/>
+          </a:prstGeom>
+          <a:noFill/>
+        </p:spPr>
+        <p:txBody>
+          <a:bodyPr wrap="square" anchor="ctr">
+            <a:spAutoFit/>
+          </a:bodyPr>
+          <a:lstStyle/>
+          <a:p>
+            <a:r>
+              <a:rPr sz="1400" b="1">
+                <a:solidFill>
+                  <a:srgbClr val="2A1D12"/>
+                </a:solidFill>
+                <a:latin typeface="Calibri"/>
+              </a:rPr>
+              <a:t>EES N°2 "Manuel Pardal"</a:t>
+            </a:r>
+          </a:p>
+        </p:txBody>
+      </p:sp>
+      <p:sp>
+        <p:nvSpPr>
+          <p:cNvPr id="12" name="TextBox 11"/>
+          <p:cNvSpPr txBox="1"/>
+          <p:nvPr/>
+        </p:nvSpPr>
+        <p:spPr>
+          <a:xfrm>
+            <a:off x="5852160" y="2423160"/>
+            <a:ext cx="1417320" cy="640080"/>
+          </a:xfrm>
+          <a:prstGeom prst="rect">
+            <a:avLst/>
+          </a:prstGeom>
+          <a:noFill/>
+        </p:spPr>
+        <p:txBody>
+          <a:bodyPr wrap="square" anchor="ctr">
+            <a:spAutoFit/>
+          </a:bodyPr>
+          <a:lstStyle/>
+          <a:p>
+            <a:r>
+              <a:rPr sz="1400" b="0">
+                <a:solidFill>
+                  <a:srgbClr val="2A1D12"/>
+                </a:solidFill>
+                <a:latin typeface="Calibri"/>
+              </a:rPr>
+              <a:t>Saladillo</a:t>
+            </a:r>
+          </a:p>
+        </p:txBody>
+      </p:sp>
+      <p:sp>
+        <p:nvSpPr>
+          <p:cNvPr id="13" name="TextBox 12"/>
+          <p:cNvSpPr txBox="1"/>
+          <p:nvPr/>
+        </p:nvSpPr>
+        <p:spPr>
+          <a:xfrm>
+            <a:off x="7452360" y="2423160"/>
+            <a:ext cx="1097280" cy="640080"/>
+          </a:xfrm>
+          <a:prstGeom prst="rect">
+            <a:avLst/>
+          </a:prstGeom>
+          <a:noFill/>
+        </p:spPr>
+        <p:txBody>
+          <a:bodyPr wrap="square" anchor="ctr">
+            <a:spAutoFit/>
+          </a:bodyPr>
+          <a:lstStyle/>
+          <a:p>
+            <a:r>
+              <a:rPr sz="1400" b="1">
+                <a:solidFill>
+                  <a:srgbClr val="9B3D00"/>
+                </a:solidFill>
+                <a:latin typeface="Calibri"/>
+              </a:rPr>
+              <a:t>Urbana</a:t>
+            </a:r>
+          </a:p>
+        </p:txBody>
+      </p:sp>
+      <p:sp>
+        <p:nvSpPr>
+          <p:cNvPr id="14" name="TextBox 13"/>
+          <p:cNvSpPr txBox="1"/>
+          <p:nvPr/>
+        </p:nvSpPr>
+        <p:spPr>
+          <a:xfrm>
+            <a:off x="8732520" y="2423160"/>
+            <a:ext cx="2682240" cy="640080"/>
+          </a:xfrm>
+          <a:prstGeom prst="rect">
+            <a:avLst/>
+          </a:prstGeom>
+          <a:noFill/>
+        </p:spPr>
+        <p:txBody>
+          <a:bodyPr wrap="square" anchor="ctr">
+            <a:spAutoFit/>
+          </a:bodyPr>
+          <a:lstStyle/>
+          <a:p>
+            <a:r>
+              <a:rPr sz="1400" b="0">
+                <a:solidFill>
+                  <a:srgbClr val="8A7A6A"/>
+                </a:solidFill>
+                <a:latin typeface="Calibri"/>
+              </a:rPr>
+              <a:t>Calle Pereyra 3046</a:t>
+            </a:r>
+          </a:p>
+        </p:txBody>
+      </p:sp>
+      <p:sp>
+        <p:nvSpPr>
+          <p:cNvPr id="15" name="Rounded Rectangle 14"/>
+          <p:cNvSpPr/>
+          <p:nvPr/>
+        </p:nvSpPr>
+        <p:spPr>
+          <a:xfrm>
+            <a:off x="914400" y="3154680"/>
+            <a:ext cx="10546080" cy="640080"/>
+          </a:xfrm>
+          <a:prstGeom prst="roundRect">
+            <a:avLst>
+              <a:gd name="adj" fmla="val 4500"/>
+            </a:avLst>
+          </a:prstGeom>
+          <a:solidFill>
+            <a:srgbClr val="F0EBE2"/>
+          </a:solidFill>
+          <a:ln>
+            <a:noFill/>
+          </a:ln>
+          <a:effectLst>
+            <a:outerShdw blurRad="127000" dist="38100" dir="5400000" algn="bl" rotWithShape="0">
+              <a:srgbClr val="2A1D12">
+                <a:alpha val="18039"/>
+              </a:srgbClr>
+            </a:outerShdw>
+          </a:effectLst>
+        </p:spPr>
+        <p:style>
+          <a:lnRef idx="1">
+            <a:schemeClr val="accent1"/>
+          </a:lnRef>
+          <a:fillRef idx="3">
+            <a:schemeClr val="accent1"/>
+          </a:fillRef>
+          <a:effectRef idx="2">
+            <a:schemeClr val="accent1"/>
+          </a:effectRef>
+          <a:fontRef idx="minor">
+            <a:schemeClr val="lt1"/>
+          </a:fontRef>
+        </p:style>
+        <p:txBody>
+          <a:bodyPr rtlCol="0" anchor="ctr"/>
+          <a:lstStyle/>
+          <a:p>
+            <a:pPr algn="ctr"/>
+          </a:p>
+        </p:txBody>
+      </p:sp>
+      <p:sp>
+        <p:nvSpPr>
+          <p:cNvPr id="16" name="TextBox 15"/>
+          <p:cNvSpPr txBox="1"/>
+          <p:nvPr/>
+        </p:nvSpPr>
+        <p:spPr>
+          <a:xfrm>
+            <a:off x="1051560" y="3154680"/>
+            <a:ext cx="4617720" cy="640080"/>
+          </a:xfrm>
+          <a:prstGeom prst="rect">
+            <a:avLst/>
+          </a:prstGeom>
+          <a:noFill/>
+        </p:spPr>
+        <p:txBody>
+          <a:bodyPr wrap="square" anchor="ctr">
+            <a:spAutoFit/>
+          </a:bodyPr>
+          <a:lstStyle/>
+          <a:p>
+            <a:r>
+              <a:rPr sz="1400" b="1">
+                <a:solidFill>
+                  <a:srgbClr val="2A1D12"/>
+                </a:solidFill>
+                <a:latin typeface="Calibri"/>
+              </a:rPr>
+              <a:t>Instituto Niño Jesús</a:t>
+            </a:r>
+          </a:p>
+        </p:txBody>
+      </p:sp>
+      <p:sp>
+        <p:nvSpPr>
+          <p:cNvPr id="17" name="TextBox 16"/>
+          <p:cNvSpPr txBox="1"/>
+          <p:nvPr/>
+        </p:nvSpPr>
+        <p:spPr>
+          <a:xfrm>
+            <a:off x="5852160" y="3154680"/>
+            <a:ext cx="1417320" cy="640080"/>
+          </a:xfrm>
+          <a:prstGeom prst="rect">
+            <a:avLst/>
+          </a:prstGeom>
+          <a:noFill/>
+        </p:spPr>
+        <p:txBody>
+          <a:bodyPr wrap="square" anchor="ctr">
+            <a:spAutoFit/>
+          </a:bodyPr>
+          <a:lstStyle/>
+          <a:p>
+            <a:r>
+              <a:rPr sz="1400" b="0">
+                <a:solidFill>
+                  <a:srgbClr val="2A1D12"/>
+                </a:solidFill>
+                <a:latin typeface="Calibri"/>
+              </a:rPr>
+              <a:t>Saladillo</a:t>
+            </a:r>
+          </a:p>
+        </p:txBody>
+      </p:sp>
+      <p:sp>
+        <p:nvSpPr>
+          <p:cNvPr id="18" name="TextBox 17"/>
+          <p:cNvSpPr txBox="1"/>
+          <p:nvPr/>
+        </p:nvSpPr>
+        <p:spPr>
+          <a:xfrm>
+            <a:off x="7452360" y="3154680"/>
+            <a:ext cx="1097280" cy="640080"/>
+          </a:xfrm>
+          <a:prstGeom prst="rect">
+            <a:avLst/>
+          </a:prstGeom>
+          <a:noFill/>
+        </p:spPr>
+        <p:txBody>
+          <a:bodyPr wrap="square" anchor="ctr">
+            <a:spAutoFit/>
+          </a:bodyPr>
+          <a:lstStyle/>
+          <a:p>
+            <a:r>
+              <a:rPr sz="1400" b="1">
+                <a:solidFill>
+                  <a:srgbClr val="9B3D00"/>
+                </a:solidFill>
+                <a:latin typeface="Calibri"/>
+              </a:rPr>
+              <a:t>Urbana</a:t>
+            </a:r>
+          </a:p>
+        </p:txBody>
+      </p:sp>
+      <p:sp>
+        <p:nvSpPr>
+          <p:cNvPr id="19" name="TextBox 18"/>
+          <p:cNvSpPr txBox="1"/>
+          <p:nvPr/>
+        </p:nvSpPr>
+        <p:spPr>
+          <a:xfrm>
+            <a:off x="8732520" y="3154680"/>
+            <a:ext cx="2682240" cy="640080"/>
+          </a:xfrm>
+          <a:prstGeom prst="rect">
+            <a:avLst/>
+          </a:prstGeom>
+          <a:noFill/>
+        </p:spPr>
+        <p:txBody>
+          <a:bodyPr wrap="square" anchor="ctr">
+            <a:spAutoFit/>
+          </a:bodyPr>
+          <a:lstStyle/>
+          <a:p>
+            <a:r>
+              <a:rPr sz="1400" b="0">
+                <a:solidFill>
+                  <a:srgbClr val="8A7A6A"/>
+                </a:solidFill>
+                <a:latin typeface="Calibri"/>
+              </a:rPr>
+              <a:t>Av. Belgrano 2999</a:t>
+            </a:r>
+          </a:p>
+        </p:txBody>
+      </p:sp>
+      <p:sp>
+        <p:nvSpPr>
+          <p:cNvPr id="20" name="Rounded Rectangle 19"/>
+          <p:cNvSpPr/>
+          <p:nvPr/>
+        </p:nvSpPr>
+        <p:spPr>
+          <a:xfrm>
+            <a:off x="914400" y="3886200"/>
+            <a:ext cx="10546080" cy="640080"/>
+          </a:xfrm>
+          <a:prstGeom prst="roundRect">
+            <a:avLst>
+              <a:gd name="adj" fmla="val 4500"/>
+            </a:avLst>
+          </a:prstGeom>
+          <a:solidFill>
+            <a:srgbClr val="F0EBE2"/>
+          </a:solidFill>
+          <a:ln>
+            <a:noFill/>
+          </a:ln>
+          <a:effectLst>
+            <a:outerShdw blurRad="127000" dist="38100" dir="5400000" algn="bl" rotWithShape="0">
+              <a:srgbClr val="2A1D12">
+                <a:alpha val="18039"/>
+              </a:srgbClr>
+            </a:outerShdw>
+          </a:effectLst>
+        </p:spPr>
+        <p:style>
+          <a:lnRef idx="1">
+            <a:schemeClr val="accent1"/>
+          </a:lnRef>
+          <a:fillRef idx="3">
+            <a:schemeClr val="accent1"/>
+          </a:fillRef>
+          <a:effectRef idx="2">
+            <a:schemeClr val="accent1"/>
+          </a:effectRef>
+          <a:fontRef idx="minor">
+            <a:schemeClr val="lt1"/>
+          </a:fontRef>
+        </p:style>
+        <p:txBody>
+          <a:bodyPr rtlCol="0" anchor="ctr"/>
+          <a:lstStyle/>
+          <a:p>
+            <a:pPr algn="ctr"/>
+          </a:p>
+        </p:txBody>
+      </p:sp>
+      <p:sp>
+        <p:nvSpPr>
+          <p:cNvPr id="21" name="TextBox 20"/>
+          <p:cNvSpPr txBox="1"/>
+          <p:nvPr/>
+        </p:nvSpPr>
+        <p:spPr>
+          <a:xfrm>
+            <a:off x="1051560" y="3886200"/>
+            <a:ext cx="4617720" cy="640080"/>
+          </a:xfrm>
+          <a:prstGeom prst="rect">
+            <a:avLst/>
+          </a:prstGeom>
+          <a:noFill/>
+        </p:spPr>
+        <p:txBody>
+          <a:bodyPr wrap="square" anchor="ctr">
+            <a:spAutoFit/>
+          </a:bodyPr>
+          <a:lstStyle/>
+          <a:p>
+            <a:r>
+              <a:rPr sz="1400" b="1">
+                <a:solidFill>
+                  <a:srgbClr val="2A1D12"/>
+                </a:solidFill>
+                <a:latin typeface="Calibri"/>
+              </a:rPr>
+              <a:t>Colegio Secundario Madre Teresa</a:t>
+            </a:r>
+          </a:p>
+        </p:txBody>
+      </p:sp>
+      <p:sp>
+        <p:nvSpPr>
+          <p:cNvPr id="22" name="TextBox 21"/>
+          <p:cNvSpPr txBox="1"/>
+          <p:nvPr/>
+        </p:nvSpPr>
+        <p:spPr>
+          <a:xfrm>
+            <a:off x="5852160" y="3886200"/>
+            <a:ext cx="1417320" cy="640080"/>
+          </a:xfrm>
+          <a:prstGeom prst="rect">
+            <a:avLst/>
+          </a:prstGeom>
+          <a:noFill/>
+        </p:spPr>
+        <p:txBody>
+          <a:bodyPr wrap="square" anchor="ctr">
+            <a:spAutoFit/>
+          </a:bodyPr>
+          <a:lstStyle/>
+          <a:p>
+            <a:r>
+              <a:rPr sz="1400" b="0">
+                <a:solidFill>
+                  <a:srgbClr val="2A1D12"/>
+                </a:solidFill>
+                <a:latin typeface="Calibri"/>
+              </a:rPr>
+              <a:t>Saladillo</a:t>
+            </a:r>
+          </a:p>
+        </p:txBody>
+      </p:sp>
+      <p:sp>
+        <p:nvSpPr>
+          <p:cNvPr id="23" name="TextBox 22"/>
+          <p:cNvSpPr txBox="1"/>
+          <p:nvPr/>
+        </p:nvSpPr>
+        <p:spPr>
+          <a:xfrm>
+            <a:off x="7452360" y="3886200"/>
+            <a:ext cx="1097280" cy="640080"/>
+          </a:xfrm>
+          <a:prstGeom prst="rect">
+            <a:avLst/>
+          </a:prstGeom>
+          <a:noFill/>
+        </p:spPr>
+        <p:txBody>
+          <a:bodyPr wrap="square" anchor="ctr">
+            <a:spAutoFit/>
+          </a:bodyPr>
+          <a:lstStyle/>
+          <a:p>
+            <a:r>
+              <a:rPr sz="1400" b="1">
+                <a:solidFill>
+                  <a:srgbClr val="D9691F"/>
+                </a:solidFill>
+                <a:latin typeface="Calibri"/>
+              </a:rPr>
+              <a:t>Rural</a:t>
+            </a:r>
+          </a:p>
+        </p:txBody>
+      </p:sp>
+      <p:sp>
+        <p:nvSpPr>
+          <p:cNvPr id="24" name="TextBox 23"/>
+          <p:cNvSpPr txBox="1"/>
+          <p:nvPr/>
+        </p:nvSpPr>
+        <p:spPr>
+          <a:xfrm>
+            <a:off x="8732520" y="3886200"/>
+            <a:ext cx="2682240" cy="640080"/>
+          </a:xfrm>
+          <a:prstGeom prst="rect">
+            <a:avLst/>
+          </a:prstGeom>
+          <a:noFill/>
+        </p:spPr>
+        <p:txBody>
+          <a:bodyPr wrap="square" anchor="ctr">
+            <a:spAutoFit/>
+          </a:bodyPr>
+          <a:lstStyle/>
+          <a:p>
+            <a:r>
+              <a:rPr sz="1400" b="0">
+                <a:solidFill>
+                  <a:srgbClr val="8A7A6A"/>
+                </a:solidFill>
+                <a:latin typeface="Calibri"/>
+              </a:rPr>
+              <a:t>Calle Jauretche e Yrigoyen</a:t>
+            </a:r>
+          </a:p>
+        </p:txBody>
+      </p:sp>
+      <p:sp>
+        <p:nvSpPr>
+          <p:cNvPr id="25" name="Rounded Rectangle 24"/>
+          <p:cNvSpPr/>
+          <p:nvPr/>
+        </p:nvSpPr>
+        <p:spPr>
+          <a:xfrm>
+            <a:off x="914400" y="4617720"/>
+            <a:ext cx="10546080" cy="640080"/>
+          </a:xfrm>
+          <a:prstGeom prst="roundRect">
+            <a:avLst>
+              <a:gd name="adj" fmla="val 4500"/>
+            </a:avLst>
+          </a:prstGeom>
+          <a:solidFill>
+            <a:srgbClr val="F0EBE2"/>
+          </a:solidFill>
+          <a:ln>
+            <a:noFill/>
+          </a:ln>
+          <a:effectLst>
+            <a:outerShdw blurRad="127000" dist="38100" dir="5400000" algn="bl" rotWithShape="0">
+              <a:srgbClr val="2A1D12">
+                <a:alpha val="18039"/>
+              </a:srgbClr>
+            </a:outerShdw>
+          </a:effectLst>
+        </p:spPr>
+        <p:style>
+          <a:lnRef idx="1">
+            <a:schemeClr val="accent1"/>
+          </a:lnRef>
+          <a:fillRef idx="3">
+            <a:schemeClr val="accent1"/>
+          </a:fillRef>
+          <a:effectRef idx="2">
+            <a:schemeClr val="accent1"/>
+          </a:effectRef>
+          <a:fontRef idx="minor">
+            <a:schemeClr val="lt1"/>
+          </a:fontRef>
+        </p:style>
+        <p:txBody>
+          <a:bodyPr rtlCol="0" anchor="ctr"/>
+          <a:lstStyle/>
+          <a:p>
+            <a:pPr algn="ctr"/>
+          </a:p>
+        </p:txBody>
+      </p:sp>
+      <p:sp>
+        <p:nvSpPr>
+          <p:cNvPr id="26" name="TextBox 25"/>
+          <p:cNvSpPr txBox="1"/>
+          <p:nvPr/>
+        </p:nvSpPr>
+        <p:spPr>
+          <a:xfrm>
+            <a:off x="1051560" y="4617720"/>
+            <a:ext cx="4617720" cy="640080"/>
+          </a:xfrm>
+          <a:prstGeom prst="rect">
+            <a:avLst/>
+          </a:prstGeom>
+          <a:noFill/>
+        </p:spPr>
+        <p:txBody>
+          <a:bodyPr wrap="square" anchor="ctr">
+            <a:spAutoFit/>
+          </a:bodyPr>
+          <a:lstStyle/>
+          <a:p>
+            <a:r>
+              <a:rPr sz="1400" b="1">
+                <a:solidFill>
+                  <a:srgbClr val="2A1D12"/>
+                </a:solidFill>
+                <a:latin typeface="Calibri"/>
+              </a:rPr>
+              <a:t>Esc. de Educación Artística N°1 "Lola Mora"</a:t>
+            </a:r>
+          </a:p>
+        </p:txBody>
+      </p:sp>
+      <p:sp>
+        <p:nvSpPr>
+          <p:cNvPr id="27" name="TextBox 26"/>
+          <p:cNvSpPr txBox="1"/>
+          <p:nvPr/>
+        </p:nvSpPr>
+        <p:spPr>
+          <a:xfrm>
+            <a:off x="5852160" y="4617720"/>
+            <a:ext cx="1417320" cy="640080"/>
+          </a:xfrm>
+          <a:prstGeom prst="rect">
+            <a:avLst/>
+          </a:prstGeom>
+          <a:noFill/>
+        </p:spPr>
+        <p:txBody>
+          <a:bodyPr wrap="square" anchor="ctr">
+            <a:spAutoFit/>
+          </a:bodyPr>
+          <a:lstStyle/>
+          <a:p>
+            <a:r>
+              <a:rPr sz="1400" b="0">
+                <a:solidFill>
+                  <a:srgbClr val="2A1D12"/>
+                </a:solidFill>
+                <a:latin typeface="Calibri"/>
+              </a:rPr>
+              <a:t>25 de Mayo</a:t>
+            </a:r>
+          </a:p>
+        </p:txBody>
+      </p:sp>
+      <p:sp>
+        <p:nvSpPr>
+          <p:cNvPr id="28" name="TextBox 27"/>
+          <p:cNvSpPr txBox="1"/>
+          <p:nvPr/>
+        </p:nvSpPr>
+        <p:spPr>
+          <a:xfrm>
+            <a:off x="7452360" y="4617720"/>
+            <a:ext cx="1097280" cy="640080"/>
+          </a:xfrm>
+          <a:prstGeom prst="rect">
+            <a:avLst/>
+          </a:prstGeom>
+          <a:noFill/>
+        </p:spPr>
+        <p:txBody>
+          <a:bodyPr wrap="square" anchor="ctr">
+            <a:spAutoFit/>
+          </a:bodyPr>
+          <a:lstStyle/>
+          <a:p>
+            <a:r>
+              <a:rPr sz="1400" b="1">
+                <a:solidFill>
+                  <a:srgbClr val="9B3D00"/>
+                </a:solidFill>
+                <a:latin typeface="Calibri"/>
+              </a:rPr>
+              <a:t>Urbana</a:t>
+            </a:r>
+          </a:p>
+        </p:txBody>
+      </p:sp>
+      <p:sp>
+        <p:nvSpPr>
+          <p:cNvPr id="29" name="TextBox 28"/>
+          <p:cNvSpPr txBox="1"/>
+          <p:nvPr/>
+        </p:nvSpPr>
+        <p:spPr>
+          <a:xfrm>
+            <a:off x="8732520" y="4617720"/>
+            <a:ext cx="2682240" cy="640080"/>
+          </a:xfrm>
+          <a:prstGeom prst="rect">
+            <a:avLst/>
+          </a:prstGeom>
+          <a:noFill/>
+        </p:spPr>
+        <p:txBody>
+          <a:bodyPr wrap="square" anchor="ctr">
+            <a:spAutoFit/>
+          </a:bodyPr>
+          <a:lstStyle/>
+          <a:p>
+            <a:r>
+              <a:rPr sz="1400" b="0">
+                <a:solidFill>
+                  <a:srgbClr val="8A7A6A"/>
+                </a:solidFill>
+                <a:latin typeface="Calibri"/>
+              </a:rPr>
+              <a:t>Calle 7 entre 23 y 24</a:t>
+            </a:r>
+          </a:p>
+        </p:txBody>
+      </p:sp>
+      <p:sp>
+        <p:nvSpPr>
+          <p:cNvPr id="30" name="Rounded Rectangle 29"/>
+          <p:cNvSpPr/>
+          <p:nvPr/>
+        </p:nvSpPr>
+        <p:spPr>
+          <a:xfrm>
+            <a:off x="914400" y="5349240"/>
+            <a:ext cx="10546080" cy="640080"/>
+          </a:xfrm>
+          <a:prstGeom prst="roundRect">
+            <a:avLst>
+              <a:gd name="adj" fmla="val 4500"/>
+            </a:avLst>
+          </a:prstGeom>
+          <a:solidFill>
+            <a:srgbClr val="F0EBE2"/>
+          </a:solidFill>
+          <a:ln>
+            <a:noFill/>
+          </a:ln>
+          <a:effectLst>
+            <a:outerShdw blurRad="127000" dist="38100" dir="5400000" algn="bl" rotWithShape="0">
+              <a:srgbClr val="2A1D12">
+                <a:alpha val="18039"/>
+              </a:srgbClr>
+            </a:outerShdw>
+          </a:effectLst>
+        </p:spPr>
+        <p:style>
+          <a:lnRef idx="1">
+            <a:schemeClr val="accent1"/>
+          </a:lnRef>
+          <a:fillRef idx="3">
+            <a:schemeClr val="accent1"/>
+          </a:fillRef>
+          <a:effectRef idx="2">
+            <a:schemeClr val="accent1"/>
+          </a:effectRef>
+          <a:fontRef idx="minor">
+            <a:schemeClr val="lt1"/>
+          </a:fontRef>
+        </p:style>
+        <p:txBody>
+          <a:bodyPr rtlCol="0" anchor="ctr"/>
+          <a:lstStyle/>
+          <a:p>
+            <a:pPr algn="ctr"/>
+          </a:p>
+        </p:txBody>
+      </p:sp>
+      <p:sp>
+        <p:nvSpPr>
+          <p:cNvPr id="31" name="TextBox 30"/>
+          <p:cNvSpPr txBox="1"/>
+          <p:nvPr/>
+        </p:nvSpPr>
+        <p:spPr>
+          <a:xfrm>
+            <a:off x="1051560" y="5349240"/>
+            <a:ext cx="4617720" cy="640080"/>
+          </a:xfrm>
+          <a:prstGeom prst="rect">
+            <a:avLst/>
+          </a:prstGeom>
+          <a:noFill/>
+        </p:spPr>
+        <p:txBody>
+          <a:bodyPr wrap="square" anchor="ctr">
+            <a:spAutoFit/>
+          </a:bodyPr>
+          <a:lstStyle/>
+          <a:p>
+            <a:r>
+              <a:rPr sz="1400" b="1">
+                <a:solidFill>
+                  <a:srgbClr val="2A1D12"/>
+                </a:solidFill>
+                <a:latin typeface="Calibri"/>
+              </a:rPr>
+              <a:t>Esc. Agraria C.M. Casares (EAS Del Valle)</a:t>
+            </a:r>
+          </a:p>
+        </p:txBody>
+      </p:sp>
+      <p:sp>
+        <p:nvSpPr>
+          <p:cNvPr id="32" name="TextBox 31"/>
+          <p:cNvSpPr txBox="1"/>
+          <p:nvPr/>
+        </p:nvSpPr>
+        <p:spPr>
+          <a:xfrm>
+            <a:off x="5852160" y="5349240"/>
+            <a:ext cx="1417320" cy="640080"/>
+          </a:xfrm>
+          <a:prstGeom prst="rect">
+            <a:avLst/>
+          </a:prstGeom>
+          <a:noFill/>
+        </p:spPr>
+        <p:txBody>
+          <a:bodyPr wrap="square" anchor="ctr">
+            <a:spAutoFit/>
+          </a:bodyPr>
+          <a:lstStyle/>
+          <a:p>
+            <a:r>
+              <a:rPr sz="1400" b="0">
+                <a:solidFill>
+                  <a:srgbClr val="2A1D12"/>
+                </a:solidFill>
+                <a:latin typeface="Calibri"/>
+              </a:rPr>
+              <a:t>25 de Mayo</a:t>
+            </a:r>
+          </a:p>
+        </p:txBody>
+      </p:sp>
+      <p:sp>
+        <p:nvSpPr>
+          <p:cNvPr id="33" name="TextBox 32"/>
+          <p:cNvSpPr txBox="1"/>
+          <p:nvPr/>
+        </p:nvSpPr>
+        <p:spPr>
+          <a:xfrm>
+            <a:off x="7452360" y="5349240"/>
+            <a:ext cx="1097280" cy="640080"/>
+          </a:xfrm>
+          <a:prstGeom prst="rect">
+            <a:avLst/>
+          </a:prstGeom>
+          <a:noFill/>
+        </p:spPr>
+        <p:txBody>
+          <a:bodyPr wrap="square" anchor="ctr">
+            <a:spAutoFit/>
+          </a:bodyPr>
+          <a:lstStyle/>
+          <a:p>
+            <a:r>
+              <a:rPr sz="1400" b="1">
+                <a:solidFill>
+                  <a:srgbClr val="D9691F"/>
+                </a:solidFill>
+                <a:latin typeface="Calibri"/>
+              </a:rPr>
+              <a:t>Rural</a:t>
+            </a:r>
+          </a:p>
+        </p:txBody>
+      </p:sp>
+      <p:sp>
+        <p:nvSpPr>
+          <p:cNvPr id="34" name="TextBox 33"/>
+          <p:cNvSpPr txBox="1"/>
+          <p:nvPr/>
+        </p:nvSpPr>
+        <p:spPr>
+          <a:xfrm>
+            <a:off x="8732520" y="5349240"/>
+            <a:ext cx="2682240" cy="640080"/>
+          </a:xfrm>
+          <a:prstGeom prst="rect">
+            <a:avLst/>
+          </a:prstGeom>
+          <a:noFill/>
+        </p:spPr>
+        <p:txBody>
+          <a:bodyPr wrap="square" anchor="ctr">
+            <a:spAutoFit/>
+          </a:bodyPr>
+          <a:lstStyle/>
+          <a:p>
+            <a:r>
+              <a:rPr sz="1400" b="0">
+                <a:solidFill>
+                  <a:srgbClr val="8A7A6A"/>
+                </a:solidFill>
+                <a:latin typeface="Calibri"/>
+              </a:rPr>
+              <a:t>Zona rural, Del Valle</a:t>
+            </a:r>
+          </a:p>
+        </p:txBody>
+      </p:sp>
+      <p:sp>
+        <p:nvSpPr>
+          <p:cNvPr id="35" name="TextBox 34"/>
+          <p:cNvSpPr txBox="1"/>
+          <p:nvPr/>
+        </p:nvSpPr>
+        <p:spPr>
+          <a:xfrm>
+            <a:off x="548640" y="6400800"/>
+            <a:ext cx="4572000" cy="274320"/>
+          </a:xfrm>
+          <a:prstGeom prst="rect">
+            <a:avLst/>
+          </a:prstGeom>
+          <a:noFill/>
+        </p:spPr>
+        <p:txBody>
+          <a:bodyPr wrap="none">
+            <a:spAutoFit/>
+          </a:bodyPr>
+          <a:lstStyle/>
+          <a:p>
+            <a:r>
+              <a:rPr sz="1250">
+                <a:solidFill>
+                  <a:srgbClr val="8A7A6A"/>
+                </a:solidFill>
+                <a:latin typeface="Calibri"/>
+              </a:rPr>
+              <a:t>Ciencia Ciudadana Ambiental · Saladillo</a:t>
+            </a:r>
+          </a:p>
+        </p:txBody>
+      </p:sp>
+      <p:sp>
+        <p:nvSpPr>
+          <p:cNvPr id="36" name="TextBox 35"/>
           <p:cNvSpPr txBox="1"/>
           <p:nvPr/>
         </p:nvSpPr>
@@ -9231,114 +9837,23 @@
             <a:avLst/>
           </a:prstGeom>
           <a:noFill/>
-          <a:ln>
-            <a:noFill/>
-          </a:ln>
-        </p:spPr>
-        <p:txBody>
-          <a:bodyPr anchorCtr="0" anchor="ctr" bIns="0" lIns="0" spcFirstLastPara="1" rIns="0" wrap="square" tIns="0">
-            <a:noAutofit/>
-          </a:bodyPr>
-          <a:lstStyle/>
-          <a:p>
-            <a:pPr indent="0" lvl="0" marL="0" marR="0" rtl="0" algn="r">
-              <a:spcBef>
-                <a:spcPts val="0"/>
-              </a:spcBef>
-              <a:spcAft>
-                <a:spcPts val="0"/>
-              </a:spcAft>
-              <a:buClr>
-                <a:srgbClr val="C9BEB2"/>
-              </a:buClr>
-              <a:buSzPts val="1000"/>
-              <a:buFont typeface="Calibri"/>
-              <a:buNone/>
-            </a:pPr>
-            <a:r>
-              <a:rPr lang="en-US" sz="1250">
-                <a:solidFill>
-                  <a:srgbClr val="C9BEB2"/>
-                </a:solidFill>
-                <a:latin typeface="Calibri"/>
-                <a:ea typeface="Calibri"/>
-                <a:cs typeface="Calibri"/>
-                <a:sym typeface="Calibri"/>
-              </a:rPr>
-              <a:t>19</a:t>
-            </a:r>
-            <a:endParaRPr b="0" i="0" sz="1000" u="none" cap="none" strike="noStrike">
-              <a:solidFill>
-                <a:schemeClr val="dk1"/>
-              </a:solidFill>
-              <a:latin typeface="Calibri"/>
-              <a:ea typeface="Calibri"/>
-              <a:cs typeface="Calibri"/>
-              <a:sym typeface="Calibri"/>
-            </a:endParaRPr>
-          </a:p>
-        </p:txBody>
-      </p:sp>
-      <p:sp>
-        <p:nvSpPr>
-          <p:cNvPr id="304" name="Google Shape;304;p16"/>
-          <p:cNvSpPr txBox="1"/>
-          <p:nvPr/>
-        </p:nvSpPr>
-        <p:spPr>
-          <a:xfrm>
-            <a:off x="548640" y="6400800"/>
-            <a:ext cx="4572000" cy="274320"/>
-          </a:xfrm>
-          <a:prstGeom prst="rect">
-            <a:avLst/>
-          </a:prstGeom>
-          <a:noFill/>
-          <a:ln>
-            <a:noFill/>
-          </a:ln>
-        </p:spPr>
-        <p:txBody>
-          <a:bodyPr anchorCtr="0" anchor="ctr" bIns="0" lIns="0" spcFirstLastPara="1" rIns="0" wrap="square" tIns="0">
-            <a:noAutofit/>
-          </a:bodyPr>
-          <a:lstStyle/>
-          <a:p>
-            <a:pPr indent="0" lvl="0" marL="0" marR="0" rtl="0" algn="l">
-              <a:spcBef>
-                <a:spcPts val="0"/>
-              </a:spcBef>
-              <a:spcAft>
-                <a:spcPts val="0"/>
-              </a:spcAft>
-              <a:buClr>
-                <a:srgbClr val="C9BEB2"/>
-              </a:buClr>
-              <a:buSzPts val="1000"/>
-              <a:buFont typeface="Calibri"/>
-              <a:buNone/>
-            </a:pPr>
-            <a:r>
-              <a:rPr b="0" i="0" lang="en-US" sz="1250" u="none" cap="none" strike="noStrike">
-                <a:solidFill>
-                  <a:srgbClr val="C9BEB2"/>
-                </a:solidFill>
-                <a:latin typeface="Calibri"/>
-                <a:ea typeface="Calibri"/>
-                <a:cs typeface="Calibri"/>
-                <a:sym typeface="Calibri"/>
-              </a:rPr>
-              <a:t>Ciencia Ciudadana Ambiental · Saladillo</a:t>
-            </a:r>
-            <a:endParaRPr b="0" i="0" sz="1000" u="none" cap="none" strike="noStrike">
-              <a:solidFill>
-                <a:schemeClr val="dk1"/>
-              </a:solidFill>
-              <a:latin typeface="Calibri"/>
-              <a:ea typeface="Calibri"/>
-              <a:cs typeface="Calibri"/>
-              <a:sym typeface="Calibri"/>
-            </a:endParaRPr>
+        </p:spPr>
+        <p:txBody>
+          <a:bodyPr wrap="none">
+            <a:spAutoFit/>
+          </a:bodyPr>
+          <a:lstStyle/>
+          <a:p>
+            <a:pPr algn="r"/>
+            <a:r>
+              <a:rPr sz="1250">
+                <a:solidFill>
+                  <a:srgbClr val="8A7A6A"/>
+                </a:solidFill>
+                <a:latin typeface="Calibri"/>
+              </a:rPr>
+              <a:t>14</a:t>
+            </a:r>
           </a:p>
         </p:txBody>
       </p:sp>
@@ -9465,7 +9980,7 @@
                 </a:solidFill>
                 <a:latin typeface="Calibri"/>
               </a:rPr>
-              <a:t>Próxima etapa: 5 escuelas confirmadas</a:t>
+              <a:t>Un vacío de monitoreo en el centro de la provincia</a:t>
             </a:r>
           </a:p>
         </p:txBody>
@@ -9479,7 +9994,7 @@
         <p:spPr>
           <a:xfrm>
             <a:off x="914400" y="1417320"/>
-            <a:ext cx="10363200" cy="320040"/>
+            <a:ext cx="10363200" cy="411480"/>
           </a:xfrm>
           <a:prstGeom prst="rect">
             <a:avLst/>
@@ -9492,169 +10007,33 @@
           </a:bodyPr>
           <a:lstStyle/>
           <a:p>
-            <a:pPr algn="l"/>
-            <a:r>
-              <a:rPr sz="1500" b="0">
+            <a:pPr algn="l">
+              <a:lnSpc>
+                <a:spcPct val="110000"/>
+              </a:lnSpc>
+            </a:pPr>
+            <a:r>
+              <a:rPr sz="1450" b="0">
                 <a:solidFill>
                   <a:srgbClr val="8A7A6A"/>
                 </a:solidFill>
                 <a:latin typeface="Calibri"/>
               </a:rPr>
-              <a:t>Saladillo (3) y el partido de 25 de Mayo (2) — primera expansión de la red fuera de Saladillo.</a:t>
-            </a:r>
-          </a:p>
-        </p:txBody>
-      </p:sp>
-      <p:sp>
-        <p:nvSpPr>
-          <p:cNvPr id="6" name="TextBox 5"/>
-          <p:cNvSpPr txBox="1"/>
-          <p:nvPr/>
-        </p:nvSpPr>
-        <p:spPr>
-          <a:xfrm>
-            <a:off x="914400" y="2011680"/>
-            <a:ext cx="4800600" cy="320040"/>
-          </a:xfrm>
-          <a:prstGeom prst="rect">
-            <a:avLst/>
-          </a:prstGeom>
-          <a:noFill/>
-        </p:spPr>
-        <p:txBody>
-          <a:bodyPr wrap="square">
-            <a:spAutoFit/>
-          </a:bodyPr>
-          <a:lstStyle/>
-          <a:p>
-            <a:pPr algn="l"/>
-            <a:r>
-              <a:rPr sz="1250" b="1">
-                <a:solidFill>
-                  <a:srgbClr val="9B3D00"/>
-                </a:solidFill>
-                <a:latin typeface="Calibri"/>
-              </a:rPr>
-              <a:t>INSTITUCIÓN</a:t>
-            </a:r>
-          </a:p>
-        </p:txBody>
-      </p:sp>
-      <p:sp>
-        <p:nvSpPr>
-          <p:cNvPr id="7" name="TextBox 6"/>
-          <p:cNvSpPr txBox="1"/>
-          <p:nvPr/>
-        </p:nvSpPr>
-        <p:spPr>
-          <a:xfrm>
-            <a:off x="5715000" y="2011680"/>
-            <a:ext cx="1600200" cy="320040"/>
-          </a:xfrm>
-          <a:prstGeom prst="rect">
-            <a:avLst/>
-          </a:prstGeom>
-          <a:noFill/>
-        </p:spPr>
-        <p:txBody>
-          <a:bodyPr wrap="square">
-            <a:spAutoFit/>
-          </a:bodyPr>
-          <a:lstStyle/>
-          <a:p>
-            <a:pPr algn="l"/>
-            <a:r>
-              <a:rPr sz="1250" b="1">
-                <a:solidFill>
-                  <a:srgbClr val="9B3D00"/>
-                </a:solidFill>
-                <a:latin typeface="Calibri"/>
-              </a:rPr>
-              <a:t>DISTRITO</a:t>
-            </a:r>
-          </a:p>
-        </p:txBody>
-      </p:sp>
-      <p:sp>
-        <p:nvSpPr>
-          <p:cNvPr id="8" name="TextBox 7"/>
-          <p:cNvSpPr txBox="1"/>
-          <p:nvPr/>
-        </p:nvSpPr>
-        <p:spPr>
-          <a:xfrm>
-            <a:off x="7315200" y="2011680"/>
-            <a:ext cx="1280160" cy="320040"/>
-          </a:xfrm>
-          <a:prstGeom prst="rect">
-            <a:avLst/>
-          </a:prstGeom>
-          <a:noFill/>
-        </p:spPr>
-        <p:txBody>
-          <a:bodyPr wrap="square">
-            <a:spAutoFit/>
-          </a:bodyPr>
-          <a:lstStyle/>
-          <a:p>
-            <a:pPr algn="l"/>
-            <a:r>
-              <a:rPr sz="1250" b="1">
-                <a:solidFill>
-                  <a:srgbClr val="9B3D00"/>
-                </a:solidFill>
-                <a:latin typeface="Calibri"/>
-              </a:rPr>
-              <a:t>ZONA</a:t>
-            </a:r>
-          </a:p>
-        </p:txBody>
-      </p:sp>
-      <p:sp>
-        <p:nvSpPr>
-          <p:cNvPr id="9" name="TextBox 8"/>
-          <p:cNvSpPr txBox="1"/>
-          <p:nvPr/>
-        </p:nvSpPr>
-        <p:spPr>
-          <a:xfrm>
-            <a:off x="8595360" y="2011680"/>
-            <a:ext cx="2865120" cy="320040"/>
-          </a:xfrm>
-          <a:prstGeom prst="rect">
-            <a:avLst/>
-          </a:prstGeom>
-          <a:noFill/>
-        </p:spPr>
-        <p:txBody>
-          <a:bodyPr wrap="square">
-            <a:spAutoFit/>
-          </a:bodyPr>
-          <a:lstStyle/>
-          <a:p>
-            <a:pPr algn="l"/>
-            <a:r>
-              <a:rPr sz="1250" b="1">
-                <a:solidFill>
-                  <a:srgbClr val="9B3D00"/>
-                </a:solidFill>
-                <a:latin typeface="Calibri"/>
-              </a:rPr>
-              <a:t>DIRECCIÓN</a:t>
-            </a:r>
-          </a:p>
-        </p:txBody>
-      </p:sp>
-      <p:sp>
-        <p:nvSpPr>
-          <p:cNvPr id="10" name="Rounded Rectangle 9"/>
+              <a:t>Organizaciones como OpenAQ y EPIC (Universidad de Chicago) señalan que buena parte del mundo no produce datos públicos de calidad del aire — y el centro de la provincia de Buenos Aires es un caso de manual.</a:t>
+            </a:r>
+          </a:p>
+        </p:txBody>
+      </p:sp>
+      <p:sp>
+        <p:nvSpPr>
+          <p:cNvPr id="6" name="Rounded Rectangle 5"/>
           <p:cNvSpPr/>
           <p:nvPr/>
         </p:nvSpPr>
         <p:spPr>
           <a:xfrm>
-            <a:off x="914400" y="2423160"/>
-            <a:ext cx="10546080" cy="640080"/>
+            <a:off x="914400" y="1966280"/>
+            <a:ext cx="3332480" cy="2236194"/>
           </a:xfrm>
           <a:prstGeom prst="roundRect">
             <a:avLst>
@@ -9697,152 +10076,79 @@
           </a:p>
         </p:txBody>
       </p:sp>
-      <p:sp>
-        <p:nvSpPr>
-          <p:cNvPr id="11" name="TextBox 10"/>
-          <p:cNvSpPr txBox="1"/>
-          <p:nvPr/>
-        </p:nvSpPr>
-        <p:spPr>
-          <a:xfrm>
-            <a:off x="1051560" y="2423160"/>
-            <a:ext cx="4617720" cy="640080"/>
-          </a:xfrm>
-          <a:prstGeom prst="rect">
-            <a:avLst/>
-          </a:prstGeom>
-          <a:noFill/>
-        </p:spPr>
-        <p:txBody>
-          <a:bodyPr wrap="square" anchor="ctr">
+      <p:pic>
+        <p:nvPicPr>
+          <p:cNvPr id="7" name="Picture 6" descr="purpleair_final.png"/>
+          <p:cNvPicPr>
+            <a:picLocks noChangeAspect="1"/>
+          </p:cNvPicPr>
+          <p:nvPr/>
+        </p:nvPicPr>
+        <p:blipFill>
+          <a:blip r:embed="rId3"/>
+          <a:stretch>
+            <a:fillRect/>
+          </a:stretch>
+        </p:blipFill>
+        <p:spPr>
+          <a:xfrm>
+            <a:off x="1005840" y="2057720"/>
+            <a:ext cx="3149600" cy="1458954"/>
+          </a:xfrm>
+          <a:prstGeom prst="rect">
+            <a:avLst/>
+          </a:prstGeom>
+        </p:spPr>
+      </p:pic>
+      <p:sp>
+        <p:nvSpPr>
+          <p:cNvPr id="8" name="TextBox 7"/>
+          <p:cNvSpPr txBox="1"/>
+          <p:nvPr/>
+        </p:nvSpPr>
+        <p:spPr>
+          <a:xfrm>
+            <a:off x="1005840" y="3608114"/>
+            <a:ext cx="3149600" cy="594360"/>
+          </a:xfrm>
+          <a:prstGeom prst="rect">
+            <a:avLst/>
+          </a:prstGeom>
+          <a:noFill/>
+        </p:spPr>
+        <p:txBody>
+          <a:bodyPr wrap="square">
             <a:spAutoFit/>
           </a:bodyPr>
           <a:lstStyle/>
           <a:p>
-            <a:r>
-              <a:rPr sz="1400" b="1">
+            <a:pPr algn="l">
+              <a:lnSpc>
+                <a:spcPct val="110000"/>
+              </a:lnSpc>
+            </a:pPr>
+            <a:r>
+              <a:rPr sz="1300" b="1">
                 <a:solidFill>
                   <a:srgbClr val="2A1D12"/>
                 </a:solidFill>
                 <a:latin typeface="Calibri"/>
               </a:rPr>
-              <a:t>EES N°2 "Manuel Pardal"</a:t>
-            </a:r>
-          </a:p>
-        </p:txBody>
-      </p:sp>
-      <p:sp>
-        <p:nvSpPr>
-          <p:cNvPr id="12" name="TextBox 11"/>
-          <p:cNvSpPr txBox="1"/>
-          <p:nvPr/>
-        </p:nvSpPr>
-        <p:spPr>
-          <a:xfrm>
-            <a:off x="5852160" y="2423160"/>
-            <a:ext cx="1417320" cy="640080"/>
-          </a:xfrm>
-          <a:prstGeom prst="rect">
-            <a:avLst/>
-          </a:prstGeom>
-          <a:noFill/>
-        </p:spPr>
-        <p:txBody>
-          <a:bodyPr wrap="square" anchor="ctr">
-            <a:spAutoFit/>
-          </a:bodyPr>
-          <a:lstStyle/>
-          <a:p>
-            <a:r>
-              <a:rPr sz="1400" b="0">
-                <a:solidFill>
-                  <a:srgbClr val="2A1D12"/>
-                </a:solidFill>
-                <a:latin typeface="Calibri"/>
-              </a:rPr>
-              <a:t>Saladillo</a:t>
-            </a:r>
-          </a:p>
-        </p:txBody>
-      </p:sp>
-      <p:sp>
-        <p:nvSpPr>
-          <p:cNvPr id="13" name="TextBox 12"/>
-          <p:cNvSpPr txBox="1"/>
-          <p:nvPr/>
-        </p:nvSpPr>
-        <p:spPr>
-          <a:xfrm>
-            <a:off x="7452360" y="2423160"/>
-            <a:ext cx="1097280" cy="640080"/>
-          </a:xfrm>
-          <a:prstGeom prst="rect">
-            <a:avLst/>
-          </a:prstGeom>
-          <a:noFill/>
-        </p:spPr>
-        <p:txBody>
-          <a:bodyPr wrap="square" anchor="ctr">
-            <a:spAutoFit/>
-          </a:bodyPr>
-          <a:lstStyle/>
-          <a:p>
-            <a:r>
-              <a:rPr sz="1400" b="1">
-                <a:solidFill>
-                  <a:srgbClr val="9B3D00"/>
-                </a:solidFill>
-                <a:latin typeface="Calibri"/>
-              </a:rPr>
-              <a:t>Urbana</a:t>
-            </a:r>
-          </a:p>
-        </p:txBody>
-      </p:sp>
-      <p:sp>
-        <p:nvSpPr>
-          <p:cNvPr id="14" name="TextBox 13"/>
-          <p:cNvSpPr txBox="1"/>
-          <p:nvPr/>
-        </p:nvSpPr>
-        <p:spPr>
-          <a:xfrm>
-            <a:off x="8732520" y="2423160"/>
-            <a:ext cx="2682240" cy="640080"/>
-          </a:xfrm>
-          <a:prstGeom prst="rect">
-            <a:avLst/>
-          </a:prstGeom>
-          <a:noFill/>
-        </p:spPr>
-        <p:txBody>
-          <a:bodyPr wrap="square" anchor="ctr">
-            <a:spAutoFit/>
-          </a:bodyPr>
-          <a:lstStyle/>
-          <a:p>
-            <a:r>
-              <a:rPr sz="1400" b="0">
-                <a:solidFill>
-                  <a:srgbClr val="8A7A6A"/>
-                </a:solidFill>
-                <a:latin typeface="Calibri"/>
-              </a:rPr>
-              <a:t>Calle Pereyra 3046</a:t>
-            </a:r>
-          </a:p>
-        </p:txBody>
-      </p:sp>
-      <p:sp>
-        <p:nvSpPr>
-          <p:cNvPr id="15" name="Rounded Rectangle 14"/>
+              <a:t>PurpleAir (red ciudadana): cientos de sensores en Brasil, Paraguay y Chile — casi nada en Argentina</a:t>
+            </a:r>
+          </a:p>
+        </p:txBody>
+      </p:sp>
+      <p:sp>
+        <p:nvSpPr>
+          <p:cNvPr id="9" name="Rounded Rectangle 8"/>
           <p:cNvSpPr/>
           <p:nvPr/>
         </p:nvSpPr>
         <p:spPr>
           <a:xfrm>
-            <a:off x="914400" y="3154680"/>
-            <a:ext cx="10546080" cy="640080"/>
+            <a:off x="4429760" y="1966280"/>
+            <a:ext cx="3332480" cy="2253339"/>
           </a:xfrm>
           <a:prstGeom prst="roundRect">
             <a:avLst>
@@ -9885,152 +10191,79 @@
           </a:p>
         </p:txBody>
       </p:sp>
-      <p:sp>
-        <p:nvSpPr>
-          <p:cNvPr id="16" name="TextBox 15"/>
-          <p:cNvSpPr txBox="1"/>
-          <p:nvPr/>
-        </p:nvSpPr>
-        <p:spPr>
-          <a:xfrm>
-            <a:off x="1051560" y="3154680"/>
-            <a:ext cx="4617720" cy="640080"/>
-          </a:xfrm>
-          <a:prstGeom prst="rect">
-            <a:avLst/>
-          </a:prstGeom>
-          <a:noFill/>
-        </p:spPr>
-        <p:txBody>
-          <a:bodyPr wrap="square" anchor="ctr">
+      <p:pic>
+        <p:nvPicPr>
+          <p:cNvPr id="10" name="Picture 9" descr="openaq_country_final.png"/>
+          <p:cNvPicPr>
+            <a:picLocks noChangeAspect="1"/>
+          </p:cNvPicPr>
+          <p:nvPr/>
+        </p:nvPicPr>
+        <p:blipFill>
+          <a:blip r:embed="rId4"/>
+          <a:stretch>
+            <a:fillRect/>
+          </a:stretch>
+        </p:blipFill>
+        <p:spPr>
+          <a:xfrm>
+            <a:off x="4521200" y="2057720"/>
+            <a:ext cx="3149600" cy="1476099"/>
+          </a:xfrm>
+          <a:prstGeom prst="rect">
+            <a:avLst/>
+          </a:prstGeom>
+        </p:spPr>
+      </p:pic>
+      <p:sp>
+        <p:nvSpPr>
+          <p:cNvPr id="11" name="TextBox 10"/>
+          <p:cNvSpPr txBox="1"/>
+          <p:nvPr/>
+        </p:nvSpPr>
+        <p:spPr>
+          <a:xfrm>
+            <a:off x="4521200" y="3625259"/>
+            <a:ext cx="3149600" cy="594360"/>
+          </a:xfrm>
+          <a:prstGeom prst="rect">
+            <a:avLst/>
+          </a:prstGeom>
+          <a:noFill/>
+        </p:spPr>
+        <p:txBody>
+          <a:bodyPr wrap="square">
             <a:spAutoFit/>
           </a:bodyPr>
           <a:lstStyle/>
           <a:p>
-            <a:r>
-              <a:rPr sz="1400" b="1">
+            <a:pPr algn="l">
+              <a:lnSpc>
+                <a:spcPct val="110000"/>
+              </a:lnSpc>
+            </a:pPr>
+            <a:r>
+              <a:rPr sz="1300" b="1">
                 <a:solidFill>
                   <a:srgbClr val="2A1D12"/>
                 </a:solidFill>
                 <a:latin typeface="Calibri"/>
               </a:rPr>
-              <a:t>Instituto Niño Jesús</a:t>
-            </a:r>
-          </a:p>
-        </p:txBody>
-      </p:sp>
-      <p:sp>
-        <p:nvSpPr>
-          <p:cNvPr id="17" name="TextBox 16"/>
-          <p:cNvSpPr txBox="1"/>
-          <p:nvPr/>
-        </p:nvSpPr>
-        <p:spPr>
-          <a:xfrm>
-            <a:off x="5852160" y="3154680"/>
-            <a:ext cx="1417320" cy="640080"/>
-          </a:xfrm>
-          <a:prstGeom prst="rect">
-            <a:avLst/>
-          </a:prstGeom>
-          <a:noFill/>
-        </p:spPr>
-        <p:txBody>
-          <a:bodyPr wrap="square" anchor="ctr">
-            <a:spAutoFit/>
-          </a:bodyPr>
-          <a:lstStyle/>
-          <a:p>
-            <a:r>
-              <a:rPr sz="1400" b="0">
-                <a:solidFill>
-                  <a:srgbClr val="2A1D12"/>
-                </a:solidFill>
-                <a:latin typeface="Calibri"/>
-              </a:rPr>
-              <a:t>Saladillo</a:t>
-            </a:r>
-          </a:p>
-        </p:txBody>
-      </p:sp>
-      <p:sp>
-        <p:nvSpPr>
-          <p:cNvPr id="18" name="TextBox 17"/>
-          <p:cNvSpPr txBox="1"/>
-          <p:nvPr/>
-        </p:nvSpPr>
-        <p:spPr>
-          <a:xfrm>
-            <a:off x="7452360" y="3154680"/>
-            <a:ext cx="1097280" cy="640080"/>
-          </a:xfrm>
-          <a:prstGeom prst="rect">
-            <a:avLst/>
-          </a:prstGeom>
-          <a:noFill/>
-        </p:spPr>
-        <p:txBody>
-          <a:bodyPr wrap="square" anchor="ctr">
-            <a:spAutoFit/>
-          </a:bodyPr>
-          <a:lstStyle/>
-          <a:p>
-            <a:r>
-              <a:rPr sz="1400" b="1">
-                <a:solidFill>
-                  <a:srgbClr val="9B3D00"/>
-                </a:solidFill>
-                <a:latin typeface="Calibri"/>
-              </a:rPr>
-              <a:t>Urbana</a:t>
-            </a:r>
-          </a:p>
-        </p:txBody>
-      </p:sp>
-      <p:sp>
-        <p:nvSpPr>
-          <p:cNvPr id="19" name="TextBox 18"/>
-          <p:cNvSpPr txBox="1"/>
-          <p:nvPr/>
-        </p:nvSpPr>
-        <p:spPr>
-          <a:xfrm>
-            <a:off x="8732520" y="3154680"/>
-            <a:ext cx="2682240" cy="640080"/>
-          </a:xfrm>
-          <a:prstGeom prst="rect">
-            <a:avLst/>
-          </a:prstGeom>
-          <a:noFill/>
-        </p:spPr>
-        <p:txBody>
-          <a:bodyPr wrap="square" anchor="ctr">
-            <a:spAutoFit/>
-          </a:bodyPr>
-          <a:lstStyle/>
-          <a:p>
-            <a:r>
-              <a:rPr sz="1400" b="0">
-                <a:solidFill>
-                  <a:srgbClr val="8A7A6A"/>
-                </a:solidFill>
-                <a:latin typeface="Calibri"/>
-              </a:rPr>
-              <a:t>Av. Belgrano 2999</a:t>
-            </a:r>
-          </a:p>
-        </p:txBody>
-      </p:sp>
-      <p:sp>
-        <p:nvSpPr>
-          <p:cNvPr id="20" name="Rounded Rectangle 19"/>
+              <a:t>OpenAQ (red oficial agregada): mismo patrón — Chile con estaciones, Argentina casi vacía</a:t>
+            </a:r>
+          </a:p>
+        </p:txBody>
+      </p:sp>
+      <p:sp>
+        <p:nvSpPr>
+          <p:cNvPr id="12" name="Rounded Rectangle 11"/>
           <p:cNvSpPr/>
           <p:nvPr/>
         </p:nvSpPr>
         <p:spPr>
           <a:xfrm>
-            <a:off x="914400" y="3886200"/>
-            <a:ext cx="10546080" cy="640080"/>
+            <a:off x="7945120" y="1966280"/>
+            <a:ext cx="3332480" cy="2253339"/>
           </a:xfrm>
           <a:prstGeom prst="roundRect">
             <a:avLst>
@@ -10073,152 +10306,79 @@
           </a:p>
         </p:txBody>
       </p:sp>
-      <p:sp>
-        <p:nvSpPr>
-          <p:cNvPr id="21" name="TextBox 20"/>
-          <p:cNvSpPr txBox="1"/>
-          <p:nvPr/>
-        </p:nvSpPr>
-        <p:spPr>
-          <a:xfrm>
-            <a:off x="1051560" y="3886200"/>
-            <a:ext cx="4617720" cy="640080"/>
-          </a:xfrm>
-          <a:prstGeom prst="rect">
-            <a:avLst/>
-          </a:prstGeom>
-          <a:noFill/>
-        </p:spPr>
-        <p:txBody>
-          <a:bodyPr wrap="square" anchor="ctr">
+      <p:pic>
+        <p:nvPicPr>
+          <p:cNvPr id="13" name="Picture 12" descr="openaq_local_final.png"/>
+          <p:cNvPicPr>
+            <a:picLocks noChangeAspect="1"/>
+          </p:cNvPicPr>
+          <p:nvPr/>
+        </p:nvPicPr>
+        <p:blipFill>
+          <a:blip r:embed="rId5"/>
+          <a:stretch>
+            <a:fillRect/>
+          </a:stretch>
+        </p:blipFill>
+        <p:spPr>
+          <a:xfrm>
+            <a:off x="8036560" y="2057720"/>
+            <a:ext cx="3149600" cy="1476099"/>
+          </a:xfrm>
+          <a:prstGeom prst="rect">
+            <a:avLst/>
+          </a:prstGeom>
+        </p:spPr>
+      </p:pic>
+      <p:sp>
+        <p:nvSpPr>
+          <p:cNvPr id="14" name="TextBox 13"/>
+          <p:cNvSpPr txBox="1"/>
+          <p:nvPr/>
+        </p:nvSpPr>
+        <p:spPr>
+          <a:xfrm>
+            <a:off x="8036560" y="3625259"/>
+            <a:ext cx="3149600" cy="594360"/>
+          </a:xfrm>
+          <a:prstGeom prst="rect">
+            <a:avLst/>
+          </a:prstGeom>
+          <a:noFill/>
+        </p:spPr>
+        <p:txBody>
+          <a:bodyPr wrap="square">
             <a:spAutoFit/>
           </a:bodyPr>
           <a:lstStyle/>
           <a:p>
-            <a:r>
-              <a:rPr sz="1400" b="1">
+            <a:pPr algn="l">
+              <a:lnSpc>
+                <a:spcPct val="110000"/>
+              </a:lnSpc>
+            </a:pPr>
+            <a:r>
+              <a:rPr sz="1300" b="1">
                 <a:solidFill>
                   <a:srgbClr val="2A1D12"/>
                 </a:solidFill>
                 <a:latin typeface="Calibri"/>
               </a:rPr>
-              <a:t>Colegio Secundario Madre Teresa</a:t>
-            </a:r>
-          </a:p>
-        </p:txBody>
-      </p:sp>
-      <p:sp>
-        <p:nvSpPr>
-          <p:cNvPr id="22" name="TextBox 21"/>
-          <p:cNvSpPr txBox="1"/>
-          <p:nvPr/>
-        </p:nvSpPr>
-        <p:spPr>
-          <a:xfrm>
-            <a:off x="5852160" y="3886200"/>
-            <a:ext cx="1417320" cy="640080"/>
-          </a:xfrm>
-          <a:prstGeom prst="rect">
-            <a:avLst/>
-          </a:prstGeom>
-          <a:noFill/>
-        </p:spPr>
-        <p:txBody>
-          <a:bodyPr wrap="square" anchor="ctr">
-            <a:spAutoFit/>
-          </a:bodyPr>
-          <a:lstStyle/>
-          <a:p>
-            <a:r>
-              <a:rPr sz="1400" b="0">
-                <a:solidFill>
-                  <a:srgbClr val="2A1D12"/>
-                </a:solidFill>
-                <a:latin typeface="Calibri"/>
-              </a:rPr>
-              <a:t>Saladillo</a:t>
-            </a:r>
-          </a:p>
-        </p:txBody>
-      </p:sp>
-      <p:sp>
-        <p:nvSpPr>
-          <p:cNvPr id="23" name="TextBox 22"/>
-          <p:cNvSpPr txBox="1"/>
-          <p:nvPr/>
-        </p:nvSpPr>
-        <p:spPr>
-          <a:xfrm>
-            <a:off x="7452360" y="3886200"/>
-            <a:ext cx="1097280" cy="640080"/>
-          </a:xfrm>
-          <a:prstGeom prst="rect">
-            <a:avLst/>
-          </a:prstGeom>
-          <a:noFill/>
-        </p:spPr>
-        <p:txBody>
-          <a:bodyPr wrap="square" anchor="ctr">
-            <a:spAutoFit/>
-          </a:bodyPr>
-          <a:lstStyle/>
-          <a:p>
-            <a:r>
-              <a:rPr sz="1400" b="1">
-                <a:solidFill>
-                  <a:srgbClr val="D9691F"/>
-                </a:solidFill>
-                <a:latin typeface="Calibri"/>
-              </a:rPr>
-              <a:t>Rural</a:t>
-            </a:r>
-          </a:p>
-        </p:txBody>
-      </p:sp>
-      <p:sp>
-        <p:nvSpPr>
-          <p:cNvPr id="24" name="TextBox 23"/>
-          <p:cNvSpPr txBox="1"/>
-          <p:nvPr/>
-        </p:nvSpPr>
-        <p:spPr>
-          <a:xfrm>
-            <a:off x="8732520" y="3886200"/>
-            <a:ext cx="2682240" cy="640080"/>
-          </a:xfrm>
-          <a:prstGeom prst="rect">
-            <a:avLst/>
-          </a:prstGeom>
-          <a:noFill/>
-        </p:spPr>
-        <p:txBody>
-          <a:bodyPr wrap="square" anchor="ctr">
-            <a:spAutoFit/>
-          </a:bodyPr>
-          <a:lstStyle/>
-          <a:p>
-            <a:r>
-              <a:rPr sz="1400" b="0">
-                <a:solidFill>
-                  <a:srgbClr val="8A7A6A"/>
-                </a:solidFill>
-                <a:latin typeface="Calibri"/>
-              </a:rPr>
-              <a:t>Calle Jauretche e Yrigoyen</a:t>
-            </a:r>
-          </a:p>
-        </p:txBody>
-      </p:sp>
-      <p:sp>
-        <p:nvSpPr>
-          <p:cNvPr id="25" name="Rounded Rectangle 24"/>
+              <a:t>Alrededor de Saladillo y 25 de Mayo: un solo punto en el mapa — el nuestro</a:t>
+            </a:r>
+          </a:p>
+        </p:txBody>
+      </p:sp>
+      <p:sp>
+        <p:nvSpPr>
+          <p:cNvPr id="15" name="Rounded Rectangle 14"/>
           <p:cNvSpPr/>
           <p:nvPr/>
         </p:nvSpPr>
         <p:spPr>
           <a:xfrm>
-            <a:off x="914400" y="4617720"/>
-            <a:ext cx="10546080" cy="640080"/>
+            <a:off x="914400" y="4402499"/>
+            <a:ext cx="10363200" cy="868680"/>
           </a:xfrm>
           <a:prstGeom prst="roundRect">
             <a:avLst>
@@ -10263,331 +10423,81 @@
       </p:sp>
       <p:sp>
         <p:nvSpPr>
-          <p:cNvPr id="26" name="TextBox 25"/>
-          <p:cNvSpPr txBox="1"/>
-          <p:nvPr/>
-        </p:nvSpPr>
-        <p:spPr>
-          <a:xfrm>
-            <a:off x="1051560" y="4617720"/>
-            <a:ext cx="4617720" cy="640080"/>
-          </a:xfrm>
-          <a:prstGeom prst="rect">
-            <a:avLst/>
-          </a:prstGeom>
-          <a:noFill/>
-        </p:spPr>
-        <p:txBody>
-          <a:bodyPr wrap="square" anchor="ctr">
+          <p:cNvPr id="16" name="TextBox 15"/>
+          <p:cNvSpPr txBox="1"/>
+          <p:nvPr/>
+        </p:nvSpPr>
+        <p:spPr>
+          <a:xfrm>
+            <a:off x="1188720" y="4539659"/>
+            <a:ext cx="9814560" cy="594360"/>
+          </a:xfrm>
+          <a:prstGeom prst="rect">
+            <a:avLst/>
+          </a:prstGeom>
+          <a:noFill/>
+        </p:spPr>
+        <p:txBody>
+          <a:bodyPr wrap="square">
             <a:spAutoFit/>
           </a:bodyPr>
           <a:lstStyle/>
           <a:p>
-            <a:r>
-              <a:rPr sz="1400" b="1">
+            <a:pPr algn="l">
+              <a:lnSpc>
+                <a:spcPct val="115000"/>
+              </a:lnSpc>
+            </a:pPr>
+            <a:r>
+              <a:rPr sz="1350" b="0">
                 <a:solidFill>
                   <a:srgbClr val="2A1D12"/>
                 </a:solidFill>
                 <a:latin typeface="Calibri"/>
               </a:rPr>
-              <a:t>Esc. de Educación Artística N°1 "Lola Mora"</a:t>
-            </a:r>
-          </a:p>
-        </p:txBody>
-      </p:sp>
-      <p:sp>
-        <p:nvSpPr>
-          <p:cNvPr id="27" name="TextBox 26"/>
-          <p:cNvSpPr txBox="1"/>
-          <p:nvPr/>
-        </p:nvSpPr>
-        <p:spPr>
-          <a:xfrm>
-            <a:off x="5852160" y="4617720"/>
-            <a:ext cx="1417320" cy="640080"/>
-          </a:xfrm>
-          <a:prstGeom prst="rect">
-            <a:avLst/>
-          </a:prstGeom>
-          <a:noFill/>
-        </p:spPr>
-        <p:txBody>
-          <a:bodyPr wrap="square" anchor="ctr">
+              <a:t>“La contaminación por material particulado fino (PM2.5) es uno de los mayores riesgos externos para la salud humana — y sin embargo sigue gravemente sub-monitoreada, sobre todo en las regiones con más contaminación y menos datos.”</a:t>
+            </a:r>
+          </a:p>
+        </p:txBody>
+      </p:sp>
+      <p:sp>
+        <p:nvSpPr>
+          <p:cNvPr id="17" name="TextBox 16"/>
+          <p:cNvSpPr txBox="1"/>
+          <p:nvPr/>
+        </p:nvSpPr>
+        <p:spPr>
+          <a:xfrm>
+            <a:off x="1188720" y="4978571"/>
+            <a:ext cx="9814560" cy="228600"/>
+          </a:xfrm>
+          <a:prstGeom prst="rect">
+            <a:avLst/>
+          </a:prstGeom>
+          <a:noFill/>
+        </p:spPr>
+        <p:txBody>
+          <a:bodyPr wrap="square">
             <a:spAutoFit/>
           </a:bodyPr>
           <a:lstStyle/>
           <a:p>
-            <a:r>
-              <a:rPr sz="1400" b="0">
-                <a:solidFill>
-                  <a:srgbClr val="2A1D12"/>
-                </a:solidFill>
-                <a:latin typeface="Calibri"/>
-              </a:rPr>
-              <a:t>25 de Mayo</a:t>
-            </a:r>
-          </a:p>
-        </p:txBody>
-      </p:sp>
-      <p:sp>
-        <p:nvSpPr>
-          <p:cNvPr id="28" name="TextBox 27"/>
-          <p:cNvSpPr txBox="1"/>
-          <p:nvPr/>
-        </p:nvSpPr>
-        <p:spPr>
-          <a:xfrm>
-            <a:off x="7452360" y="4617720"/>
-            <a:ext cx="1097280" cy="640080"/>
-          </a:xfrm>
-          <a:prstGeom prst="rect">
-            <a:avLst/>
-          </a:prstGeom>
-          <a:noFill/>
-        </p:spPr>
-        <p:txBody>
-          <a:bodyPr wrap="square" anchor="ctr">
-            <a:spAutoFit/>
-          </a:bodyPr>
-          <a:lstStyle/>
-          <a:p>
-            <a:r>
-              <a:rPr sz="1400" b="1">
-                <a:solidFill>
-                  <a:srgbClr val="9B3D00"/>
-                </a:solidFill>
-                <a:latin typeface="Calibri"/>
-              </a:rPr>
-              <a:t>Urbana</a:t>
-            </a:r>
-          </a:p>
-        </p:txBody>
-      </p:sp>
-      <p:sp>
-        <p:nvSpPr>
-          <p:cNvPr id="29" name="TextBox 28"/>
-          <p:cNvSpPr txBox="1"/>
-          <p:nvPr/>
-        </p:nvSpPr>
-        <p:spPr>
-          <a:xfrm>
-            <a:off x="8732520" y="4617720"/>
-            <a:ext cx="2682240" cy="640080"/>
-          </a:xfrm>
-          <a:prstGeom prst="rect">
-            <a:avLst/>
-          </a:prstGeom>
-          <a:noFill/>
-        </p:spPr>
-        <p:txBody>
-          <a:bodyPr wrap="square" anchor="ctr">
-            <a:spAutoFit/>
-          </a:bodyPr>
-          <a:lstStyle/>
-          <a:p>
-            <a:r>
-              <a:rPr sz="1400" b="0">
+            <a:pPr algn="l"/>
+            <a:r>
+              <a:rPr sz="1250" b="0">
                 <a:solidFill>
                   <a:srgbClr val="8A7A6A"/>
                 </a:solidFill>
                 <a:latin typeface="Calibri"/>
               </a:rPr>
-              <a:t>Calle 7 entre 23 y 24</a:t>
-            </a:r>
-          </a:p>
-        </p:txBody>
-      </p:sp>
-      <p:sp>
-        <p:nvSpPr>
-          <p:cNvPr id="30" name="Rounded Rectangle 29"/>
-          <p:cNvSpPr/>
-          <p:nvPr/>
-        </p:nvSpPr>
-        <p:spPr>
-          <a:xfrm>
-            <a:off x="914400" y="5349240"/>
-            <a:ext cx="10546080" cy="640080"/>
-          </a:xfrm>
-          <a:prstGeom prst="roundRect">
-            <a:avLst>
-              <a:gd name="adj" fmla="val 4500"/>
-            </a:avLst>
-          </a:prstGeom>
-          <a:solidFill>
-            <a:srgbClr val="F0EBE2"/>
-          </a:solidFill>
-          <a:ln>
-            <a:noFill/>
-          </a:ln>
-          <a:effectLst>
-            <a:outerShdw blurRad="127000" dist="38100" dir="5400000" algn="bl" rotWithShape="0">
-              <a:srgbClr val="2A1D12">
-                <a:alpha val="18039"/>
-              </a:srgbClr>
-            </a:outerShdw>
-          </a:effectLst>
-        </p:spPr>
-        <p:style>
-          <a:lnRef idx="1">
-            <a:schemeClr val="accent1"/>
-          </a:lnRef>
-          <a:fillRef idx="3">
-            <a:schemeClr val="accent1"/>
-          </a:fillRef>
-          <a:effectRef idx="2">
-            <a:schemeClr val="accent1"/>
-          </a:effectRef>
-          <a:fontRef idx="minor">
-            <a:schemeClr val="lt1"/>
-          </a:fontRef>
-        </p:style>
-        <p:txBody>
-          <a:bodyPr rtlCol="0" anchor="ctr"/>
-          <a:lstStyle/>
-          <a:p>
-            <a:pPr algn="ctr"/>
-          </a:p>
-        </p:txBody>
-      </p:sp>
-      <p:sp>
-        <p:nvSpPr>
-          <p:cNvPr id="31" name="TextBox 30"/>
-          <p:cNvSpPr txBox="1"/>
-          <p:nvPr/>
-        </p:nvSpPr>
-        <p:spPr>
-          <a:xfrm>
-            <a:off x="1051560" y="5349240"/>
-            <a:ext cx="4617720" cy="640080"/>
-          </a:xfrm>
-          <a:prstGeom prst="rect">
-            <a:avLst/>
-          </a:prstGeom>
-          <a:noFill/>
-        </p:spPr>
-        <p:txBody>
-          <a:bodyPr wrap="square" anchor="ctr">
-            <a:spAutoFit/>
-          </a:bodyPr>
-          <a:lstStyle/>
-          <a:p>
-            <a:r>
-              <a:rPr sz="1400" b="1">
-                <a:solidFill>
-                  <a:srgbClr val="2A1D12"/>
-                </a:solidFill>
-                <a:latin typeface="Calibri"/>
-              </a:rPr>
-              <a:t>Esc. Agraria C.M. Casares (EAS Del Valle)</a:t>
-            </a:r>
-          </a:p>
-        </p:txBody>
-      </p:sp>
-      <p:sp>
-        <p:nvSpPr>
-          <p:cNvPr id="32" name="TextBox 31"/>
-          <p:cNvSpPr txBox="1"/>
-          <p:nvPr/>
-        </p:nvSpPr>
-        <p:spPr>
-          <a:xfrm>
-            <a:off x="5852160" y="5349240"/>
-            <a:ext cx="1417320" cy="640080"/>
-          </a:xfrm>
-          <a:prstGeom prst="rect">
-            <a:avLst/>
-          </a:prstGeom>
-          <a:noFill/>
-        </p:spPr>
-        <p:txBody>
-          <a:bodyPr wrap="square" anchor="ctr">
-            <a:spAutoFit/>
-          </a:bodyPr>
-          <a:lstStyle/>
-          <a:p>
-            <a:r>
-              <a:rPr sz="1400" b="0">
-                <a:solidFill>
-                  <a:srgbClr val="2A1D12"/>
-                </a:solidFill>
-                <a:latin typeface="Calibri"/>
-              </a:rPr>
-              <a:t>25 de Mayo</a:t>
-            </a:r>
-          </a:p>
-        </p:txBody>
-      </p:sp>
-      <p:sp>
-        <p:nvSpPr>
-          <p:cNvPr id="33" name="TextBox 32"/>
-          <p:cNvSpPr txBox="1"/>
-          <p:nvPr/>
-        </p:nvSpPr>
-        <p:spPr>
-          <a:xfrm>
-            <a:off x="7452360" y="5349240"/>
-            <a:ext cx="1097280" cy="640080"/>
-          </a:xfrm>
-          <a:prstGeom prst="rect">
-            <a:avLst/>
-          </a:prstGeom>
-          <a:noFill/>
-        </p:spPr>
-        <p:txBody>
-          <a:bodyPr wrap="square" anchor="ctr">
-            <a:spAutoFit/>
-          </a:bodyPr>
-          <a:lstStyle/>
-          <a:p>
-            <a:r>
-              <a:rPr sz="1400" b="1">
-                <a:solidFill>
-                  <a:srgbClr val="D9691F"/>
-                </a:solidFill>
-                <a:latin typeface="Calibri"/>
-              </a:rPr>
-              <a:t>Rural</a:t>
-            </a:r>
-          </a:p>
-        </p:txBody>
-      </p:sp>
-      <p:sp>
-        <p:nvSpPr>
-          <p:cNvPr id="34" name="TextBox 33"/>
-          <p:cNvSpPr txBox="1"/>
-          <p:nvPr/>
-        </p:nvSpPr>
-        <p:spPr>
-          <a:xfrm>
-            <a:off x="8732520" y="5349240"/>
-            <a:ext cx="2682240" cy="640080"/>
-          </a:xfrm>
-          <a:prstGeom prst="rect">
-            <a:avLst/>
-          </a:prstGeom>
-          <a:noFill/>
-        </p:spPr>
-        <p:txBody>
-          <a:bodyPr wrap="square" anchor="ctr">
-            <a:spAutoFit/>
-          </a:bodyPr>
-          <a:lstStyle/>
-          <a:p>
-            <a:r>
-              <a:rPr sz="1400" b="0">
-                <a:solidFill>
-                  <a:srgbClr val="8A7A6A"/>
-                </a:solidFill>
-                <a:latin typeface="Calibri"/>
-              </a:rPr>
-              <a:t>Zona rural, Del Valle</a:t>
-            </a:r>
-          </a:p>
-        </p:txBody>
-      </p:sp>
-      <p:sp>
-        <p:nvSpPr>
-          <p:cNvPr id="35" name="TextBox 34"/>
+              <a:t>— C. Hasenkopf et al., Energy Policy Institute at the University of Chicago (EPIC), 2023</a:t>
+            </a:r>
+          </a:p>
+        </p:txBody>
+      </p:sp>
+      <p:sp>
+        <p:nvSpPr>
+          <p:cNvPr id="18" name="TextBox 17"/>
           <p:cNvSpPr txBox="1"/>
           <p:nvPr/>
         </p:nvSpPr>
@@ -10621,7 +10531,7 @@
       </p:sp>
       <p:sp>
         <p:nvSpPr>
-          <p:cNvPr id="36" name="TextBox 35"/>
+          <p:cNvPr id="19" name="TextBox 18"/>
           <p:cNvSpPr txBox="1"/>
           <p:nvPr/>
         </p:nvSpPr>
@@ -10649,7 +10559,7 @@
                 </a:solidFill>
                 <a:latin typeface="Calibri"/>
               </a:rPr>
-              <a:t>14</a:t>
+              <a:t>15</a:t>
             </a:r>
           </a:p>
         </p:txBody>
@@ -10777,105 +10687,14 @@
                 </a:solidFill>
                 <a:latin typeface="Calibri"/>
               </a:rPr>
-              <a:t>Un vacío de monitoreo en el centro de la provincia</a:t>
-            </a:r>
-          </a:p>
-        </p:txBody>
-      </p:sp>
-      <p:sp>
-        <p:nvSpPr>
-          <p:cNvPr id="5" name="TextBox 4"/>
-          <p:cNvSpPr txBox="1"/>
-          <p:nvPr/>
-        </p:nvSpPr>
-        <p:spPr>
-          <a:xfrm>
-            <a:off x="914400" y="1417320"/>
-            <a:ext cx="10363200" cy="411480"/>
-          </a:xfrm>
-          <a:prstGeom prst="rect">
-            <a:avLst/>
-          </a:prstGeom>
-          <a:noFill/>
-        </p:spPr>
-        <p:txBody>
-          <a:bodyPr wrap="square">
-            <a:spAutoFit/>
-          </a:bodyPr>
-          <a:lstStyle/>
-          <a:p>
-            <a:pPr algn="l">
-              <a:lnSpc>
-                <a:spcPct val="110000"/>
-              </a:lnSpc>
-            </a:pPr>
-            <a:r>
-              <a:rPr sz="1450" b="0">
-                <a:solidFill>
-                  <a:srgbClr val="8A7A6A"/>
-                </a:solidFill>
-                <a:latin typeface="Calibri"/>
-              </a:rPr>
-              <a:t>Organizaciones como OpenAQ y EPIC (Universidad de Chicago) señalan que buena parte del mundo no produce datos públicos de calidad del aire — y el centro de la provincia de Buenos Aires es un caso de manual.</a:t>
-            </a:r>
-          </a:p>
-        </p:txBody>
-      </p:sp>
-      <p:sp>
-        <p:nvSpPr>
-          <p:cNvPr id="6" name="Rounded Rectangle 5"/>
-          <p:cNvSpPr/>
-          <p:nvPr/>
-        </p:nvSpPr>
-        <p:spPr>
-          <a:xfrm>
-            <a:off x="914400" y="1966280"/>
-            <a:ext cx="3332480" cy="2236194"/>
-          </a:xfrm>
-          <a:prstGeom prst="roundRect">
-            <a:avLst>
-              <a:gd name="adj" fmla="val 4500"/>
-            </a:avLst>
-          </a:prstGeom>
-          <a:solidFill>
-            <a:srgbClr val="F0EBE2"/>
-          </a:solidFill>
-          <a:ln>
-            <a:noFill/>
-          </a:ln>
-          <a:effectLst>
-            <a:outerShdw blurRad="127000" dist="38100" dir="5400000" algn="bl" rotWithShape="0">
-              <a:srgbClr val="2A1D12">
-                <a:alpha val="18039"/>
-              </a:srgbClr>
-            </a:outerShdw>
-          </a:effectLst>
-        </p:spPr>
-        <p:style>
-          <a:lnRef idx="1">
-            <a:schemeClr val="accent1"/>
-          </a:lnRef>
-          <a:fillRef idx="3">
-            <a:schemeClr val="accent1"/>
-          </a:fillRef>
-          <a:effectRef idx="2">
-            <a:schemeClr val="accent1"/>
-          </a:effectRef>
-          <a:fontRef idx="minor">
-            <a:schemeClr val="lt1"/>
-          </a:fontRef>
-        </p:style>
-        <p:txBody>
-          <a:bodyPr rtlCol="0" anchor="ctr"/>
-          <a:lstStyle/>
-          <a:p>
-            <a:pPr algn="ctr"/>
+              <a:t>Dónde están las 5 escuelas</a:t>
+            </a:r>
           </a:p>
         </p:txBody>
       </p:sp>
       <p:pic>
         <p:nvPicPr>
-          <p:cNvPr id="7" name="Picture 6" descr="purpleair_final.png"/>
+          <p:cNvPr id="5" name="Picture 4" descr="mapa_escuelas.png"/>
           <p:cNvPicPr>
             <a:picLocks noChangeAspect="1"/>
           </p:cNvPicPr>
@@ -10889,8 +10708,8 @@
         </p:blipFill>
         <p:spPr>
           <a:xfrm>
-            <a:off x="1005840" y="2057720"/>
-            <a:ext cx="3149600" cy="1458954"/>
+            <a:off x="2617796" y="1508760"/>
+            <a:ext cx="6956408" cy="4525680"/>
           </a:xfrm>
           <a:prstGeom prst="rect">
             <a:avLst/>
@@ -10899,402 +10718,7 @@
       </p:pic>
       <p:sp>
         <p:nvSpPr>
-          <p:cNvPr id="8" name="TextBox 7"/>
-          <p:cNvSpPr txBox="1"/>
-          <p:nvPr/>
-        </p:nvSpPr>
-        <p:spPr>
-          <a:xfrm>
-            <a:off x="1005840" y="3608114"/>
-            <a:ext cx="3149600" cy="594360"/>
-          </a:xfrm>
-          <a:prstGeom prst="rect">
-            <a:avLst/>
-          </a:prstGeom>
-          <a:noFill/>
-        </p:spPr>
-        <p:txBody>
-          <a:bodyPr wrap="square">
-            <a:spAutoFit/>
-          </a:bodyPr>
-          <a:lstStyle/>
-          <a:p>
-            <a:pPr algn="l">
-              <a:lnSpc>
-                <a:spcPct val="110000"/>
-              </a:lnSpc>
-            </a:pPr>
-            <a:r>
-              <a:rPr sz="1300" b="1">
-                <a:solidFill>
-                  <a:srgbClr val="2A1D12"/>
-                </a:solidFill>
-                <a:latin typeface="Calibri"/>
-              </a:rPr>
-              <a:t>PurpleAir (red ciudadana): cientos de sensores en Brasil, Paraguay y Chile — casi nada en Argentina</a:t>
-            </a:r>
-          </a:p>
-        </p:txBody>
-      </p:sp>
-      <p:sp>
-        <p:nvSpPr>
-          <p:cNvPr id="9" name="Rounded Rectangle 8"/>
-          <p:cNvSpPr/>
-          <p:nvPr/>
-        </p:nvSpPr>
-        <p:spPr>
-          <a:xfrm>
-            <a:off x="4429760" y="1966280"/>
-            <a:ext cx="3332480" cy="2253339"/>
-          </a:xfrm>
-          <a:prstGeom prst="roundRect">
-            <a:avLst>
-              <a:gd name="adj" fmla="val 4500"/>
-            </a:avLst>
-          </a:prstGeom>
-          <a:solidFill>
-            <a:srgbClr val="F0EBE2"/>
-          </a:solidFill>
-          <a:ln>
-            <a:noFill/>
-          </a:ln>
-          <a:effectLst>
-            <a:outerShdw blurRad="127000" dist="38100" dir="5400000" algn="bl" rotWithShape="0">
-              <a:srgbClr val="2A1D12">
-                <a:alpha val="18039"/>
-              </a:srgbClr>
-            </a:outerShdw>
-          </a:effectLst>
-        </p:spPr>
-        <p:style>
-          <a:lnRef idx="1">
-            <a:schemeClr val="accent1"/>
-          </a:lnRef>
-          <a:fillRef idx="3">
-            <a:schemeClr val="accent1"/>
-          </a:fillRef>
-          <a:effectRef idx="2">
-            <a:schemeClr val="accent1"/>
-          </a:effectRef>
-          <a:fontRef idx="minor">
-            <a:schemeClr val="lt1"/>
-          </a:fontRef>
-        </p:style>
-        <p:txBody>
-          <a:bodyPr rtlCol="0" anchor="ctr"/>
-          <a:lstStyle/>
-          <a:p>
-            <a:pPr algn="ctr"/>
-          </a:p>
-        </p:txBody>
-      </p:sp>
-      <p:pic>
-        <p:nvPicPr>
-          <p:cNvPr id="10" name="Picture 9" descr="openaq_country_final.png"/>
-          <p:cNvPicPr>
-            <a:picLocks noChangeAspect="1"/>
-          </p:cNvPicPr>
-          <p:nvPr/>
-        </p:nvPicPr>
-        <p:blipFill>
-          <a:blip r:embed="rId4"/>
-          <a:stretch>
-            <a:fillRect/>
-          </a:stretch>
-        </p:blipFill>
-        <p:spPr>
-          <a:xfrm>
-            <a:off x="4521200" y="2057720"/>
-            <a:ext cx="3149600" cy="1476099"/>
-          </a:xfrm>
-          <a:prstGeom prst="rect">
-            <a:avLst/>
-          </a:prstGeom>
-        </p:spPr>
-      </p:pic>
-      <p:sp>
-        <p:nvSpPr>
-          <p:cNvPr id="11" name="TextBox 10"/>
-          <p:cNvSpPr txBox="1"/>
-          <p:nvPr/>
-        </p:nvSpPr>
-        <p:spPr>
-          <a:xfrm>
-            <a:off x="4521200" y="3625259"/>
-            <a:ext cx="3149600" cy="594360"/>
-          </a:xfrm>
-          <a:prstGeom prst="rect">
-            <a:avLst/>
-          </a:prstGeom>
-          <a:noFill/>
-        </p:spPr>
-        <p:txBody>
-          <a:bodyPr wrap="square">
-            <a:spAutoFit/>
-          </a:bodyPr>
-          <a:lstStyle/>
-          <a:p>
-            <a:pPr algn="l">
-              <a:lnSpc>
-                <a:spcPct val="110000"/>
-              </a:lnSpc>
-            </a:pPr>
-            <a:r>
-              <a:rPr sz="1300" b="1">
-                <a:solidFill>
-                  <a:srgbClr val="2A1D12"/>
-                </a:solidFill>
-                <a:latin typeface="Calibri"/>
-              </a:rPr>
-              <a:t>OpenAQ (red oficial agregada): mismo patrón — Chile con estaciones, Argentina casi vacía</a:t>
-            </a:r>
-          </a:p>
-        </p:txBody>
-      </p:sp>
-      <p:sp>
-        <p:nvSpPr>
-          <p:cNvPr id="12" name="Rounded Rectangle 11"/>
-          <p:cNvSpPr/>
-          <p:nvPr/>
-        </p:nvSpPr>
-        <p:spPr>
-          <a:xfrm>
-            <a:off x="7945120" y="1966280"/>
-            <a:ext cx="3332480" cy="2253339"/>
-          </a:xfrm>
-          <a:prstGeom prst="roundRect">
-            <a:avLst>
-              <a:gd name="adj" fmla="val 4500"/>
-            </a:avLst>
-          </a:prstGeom>
-          <a:solidFill>
-            <a:srgbClr val="F0EBE2"/>
-          </a:solidFill>
-          <a:ln>
-            <a:noFill/>
-          </a:ln>
-          <a:effectLst>
-            <a:outerShdw blurRad="127000" dist="38100" dir="5400000" algn="bl" rotWithShape="0">
-              <a:srgbClr val="2A1D12">
-                <a:alpha val="18039"/>
-              </a:srgbClr>
-            </a:outerShdw>
-          </a:effectLst>
-        </p:spPr>
-        <p:style>
-          <a:lnRef idx="1">
-            <a:schemeClr val="accent1"/>
-          </a:lnRef>
-          <a:fillRef idx="3">
-            <a:schemeClr val="accent1"/>
-          </a:fillRef>
-          <a:effectRef idx="2">
-            <a:schemeClr val="accent1"/>
-          </a:effectRef>
-          <a:fontRef idx="minor">
-            <a:schemeClr val="lt1"/>
-          </a:fontRef>
-        </p:style>
-        <p:txBody>
-          <a:bodyPr rtlCol="0" anchor="ctr"/>
-          <a:lstStyle/>
-          <a:p>
-            <a:pPr algn="ctr"/>
-          </a:p>
-        </p:txBody>
-      </p:sp>
-      <p:pic>
-        <p:nvPicPr>
-          <p:cNvPr id="13" name="Picture 12" descr="openaq_local_final.png"/>
-          <p:cNvPicPr>
-            <a:picLocks noChangeAspect="1"/>
-          </p:cNvPicPr>
-          <p:nvPr/>
-        </p:nvPicPr>
-        <p:blipFill>
-          <a:blip r:embed="rId5"/>
-          <a:stretch>
-            <a:fillRect/>
-          </a:stretch>
-        </p:blipFill>
-        <p:spPr>
-          <a:xfrm>
-            <a:off x="8036560" y="2057720"/>
-            <a:ext cx="3149600" cy="1476099"/>
-          </a:xfrm>
-          <a:prstGeom prst="rect">
-            <a:avLst/>
-          </a:prstGeom>
-        </p:spPr>
-      </p:pic>
-      <p:sp>
-        <p:nvSpPr>
-          <p:cNvPr id="14" name="TextBox 13"/>
-          <p:cNvSpPr txBox="1"/>
-          <p:nvPr/>
-        </p:nvSpPr>
-        <p:spPr>
-          <a:xfrm>
-            <a:off x="8036560" y="3625259"/>
-            <a:ext cx="3149600" cy="594360"/>
-          </a:xfrm>
-          <a:prstGeom prst="rect">
-            <a:avLst/>
-          </a:prstGeom>
-          <a:noFill/>
-        </p:spPr>
-        <p:txBody>
-          <a:bodyPr wrap="square">
-            <a:spAutoFit/>
-          </a:bodyPr>
-          <a:lstStyle/>
-          <a:p>
-            <a:pPr algn="l">
-              <a:lnSpc>
-                <a:spcPct val="110000"/>
-              </a:lnSpc>
-            </a:pPr>
-            <a:r>
-              <a:rPr sz="1300" b="1">
-                <a:solidFill>
-                  <a:srgbClr val="2A1D12"/>
-                </a:solidFill>
-                <a:latin typeface="Calibri"/>
-              </a:rPr>
-              <a:t>Alrededor de Saladillo y 25 de Mayo: un solo punto en el mapa — el nuestro</a:t>
-            </a:r>
-          </a:p>
-        </p:txBody>
-      </p:sp>
-      <p:sp>
-        <p:nvSpPr>
-          <p:cNvPr id="15" name="Rounded Rectangle 14"/>
-          <p:cNvSpPr/>
-          <p:nvPr/>
-        </p:nvSpPr>
-        <p:spPr>
-          <a:xfrm>
-            <a:off x="914400" y="4402499"/>
-            <a:ext cx="10363200" cy="868680"/>
-          </a:xfrm>
-          <a:prstGeom prst="roundRect">
-            <a:avLst>
-              <a:gd name="adj" fmla="val 4500"/>
-            </a:avLst>
-          </a:prstGeom>
-          <a:solidFill>
-            <a:srgbClr val="F0EBE2"/>
-          </a:solidFill>
-          <a:ln>
-            <a:noFill/>
-          </a:ln>
-          <a:effectLst>
-            <a:outerShdw blurRad="127000" dist="38100" dir="5400000" algn="bl" rotWithShape="0">
-              <a:srgbClr val="2A1D12">
-                <a:alpha val="18039"/>
-              </a:srgbClr>
-            </a:outerShdw>
-          </a:effectLst>
-        </p:spPr>
-        <p:style>
-          <a:lnRef idx="1">
-            <a:schemeClr val="accent1"/>
-          </a:lnRef>
-          <a:fillRef idx="3">
-            <a:schemeClr val="accent1"/>
-          </a:fillRef>
-          <a:effectRef idx="2">
-            <a:schemeClr val="accent1"/>
-          </a:effectRef>
-          <a:fontRef idx="minor">
-            <a:schemeClr val="lt1"/>
-          </a:fontRef>
-        </p:style>
-        <p:txBody>
-          <a:bodyPr rtlCol="0" anchor="ctr"/>
-          <a:lstStyle/>
-          <a:p>
-            <a:pPr algn="ctr"/>
-          </a:p>
-        </p:txBody>
-      </p:sp>
-      <p:sp>
-        <p:nvSpPr>
-          <p:cNvPr id="16" name="TextBox 15"/>
-          <p:cNvSpPr txBox="1"/>
-          <p:nvPr/>
-        </p:nvSpPr>
-        <p:spPr>
-          <a:xfrm>
-            <a:off x="1188720" y="4539659"/>
-            <a:ext cx="9814560" cy="594360"/>
-          </a:xfrm>
-          <a:prstGeom prst="rect">
-            <a:avLst/>
-          </a:prstGeom>
-          <a:noFill/>
-        </p:spPr>
-        <p:txBody>
-          <a:bodyPr wrap="square">
-            <a:spAutoFit/>
-          </a:bodyPr>
-          <a:lstStyle/>
-          <a:p>
-            <a:pPr algn="l">
-              <a:lnSpc>
-                <a:spcPct val="115000"/>
-              </a:lnSpc>
-            </a:pPr>
-            <a:r>
-              <a:rPr sz="1350" b="0">
-                <a:solidFill>
-                  <a:srgbClr val="2A1D12"/>
-                </a:solidFill>
-                <a:latin typeface="Calibri"/>
-              </a:rPr>
-              <a:t>“La contaminación por material particulado fino (PM2.5) es uno de los mayores riesgos externos para la salud humana — y sin embargo sigue gravemente sub-monitoreada, sobre todo en las regiones con más contaminación y menos datos.”</a:t>
-            </a:r>
-          </a:p>
-        </p:txBody>
-      </p:sp>
-      <p:sp>
-        <p:nvSpPr>
-          <p:cNvPr id="17" name="TextBox 16"/>
-          <p:cNvSpPr txBox="1"/>
-          <p:nvPr/>
-        </p:nvSpPr>
-        <p:spPr>
-          <a:xfrm>
-            <a:off x="1188720" y="4978571"/>
-            <a:ext cx="9814560" cy="228600"/>
-          </a:xfrm>
-          <a:prstGeom prst="rect">
-            <a:avLst/>
-          </a:prstGeom>
-          <a:noFill/>
-        </p:spPr>
-        <p:txBody>
-          <a:bodyPr wrap="square">
-            <a:spAutoFit/>
-          </a:bodyPr>
-          <a:lstStyle/>
-          <a:p>
-            <a:pPr algn="l"/>
-            <a:r>
-              <a:rPr sz="1250" b="0">
-                <a:solidFill>
-                  <a:srgbClr val="8A7A6A"/>
-                </a:solidFill>
-                <a:latin typeface="Calibri"/>
-              </a:rPr>
-              <a:t>— C. Hasenkopf et al., Energy Policy Institute at the University of Chicago (EPIC), 2023</a:t>
-            </a:r>
-          </a:p>
-        </p:txBody>
-      </p:sp>
-      <p:sp>
-        <p:nvSpPr>
-          <p:cNvPr id="18" name="TextBox 17"/>
+          <p:cNvPr id="6" name="TextBox 5"/>
           <p:cNvSpPr txBox="1"/>
           <p:nvPr/>
         </p:nvSpPr>
@@ -11328,7 +10752,7 @@
       </p:sp>
       <p:sp>
         <p:nvSpPr>
-          <p:cNvPr id="19" name="TextBox 18"/>
+          <p:cNvPr id="7" name="TextBox 6"/>
           <p:cNvSpPr txBox="1"/>
           <p:nvPr/>
         </p:nvSpPr>
@@ -11356,7 +10780,7 @@
                 </a:solidFill>
                 <a:latin typeface="Calibri"/>
               </a:rPr>
-              <a:t>15</a:t>
+              <a:t>16</a:t>
             </a:r>
           </a:p>
         </p:txBody>
@@ -11484,38 +10908,518 @@
                 </a:solidFill>
                 <a:latin typeface="Calibri"/>
               </a:rPr>
-              <a:t>Dónde están las 5 escuelas</a:t>
-            </a:r>
-          </a:p>
-        </p:txBody>
-      </p:sp>
-      <p:pic>
-        <p:nvPicPr>
-          <p:cNvPr id="5" name="Picture 4" descr="mapa_escuelas.png"/>
-          <p:cNvPicPr>
-            <a:picLocks noChangeAspect="1"/>
-          </p:cNvPicPr>
-          <p:nvPr/>
-        </p:nvPicPr>
-        <p:blipFill>
-          <a:blip r:embed="rId3"/>
-          <a:stretch>
-            <a:fillRect/>
-          </a:stretch>
-        </p:blipFill>
-        <p:spPr>
-          <a:xfrm>
-            <a:off x="2617796" y="1508760"/>
-            <a:ext cx="6956408" cy="4525680"/>
-          </a:xfrm>
-          <a:prstGeom prst="rect">
-            <a:avLst/>
-          </a:prstGeom>
-        </p:spPr>
-      </p:pic>
+              <a:t>Qué necesitamos de cada institución</a:t>
+            </a:r>
+          </a:p>
+        </p:txBody>
+      </p:sp>
+      <p:sp>
+        <p:nvSpPr>
+          <p:cNvPr id="5" name="Rounded Rectangle 4"/>
+          <p:cNvSpPr/>
+          <p:nvPr/>
+        </p:nvSpPr>
+        <p:spPr>
+          <a:xfrm>
+            <a:off x="914400" y="1874520"/>
+            <a:ext cx="4724400" cy="2011680"/>
+          </a:xfrm>
+          <a:prstGeom prst="roundRect">
+            <a:avLst>
+              <a:gd name="adj" fmla="val 4500"/>
+            </a:avLst>
+          </a:prstGeom>
+          <a:solidFill>
+            <a:srgbClr val="F0EBE2"/>
+          </a:solidFill>
+          <a:ln>
+            <a:noFill/>
+          </a:ln>
+          <a:effectLst>
+            <a:outerShdw blurRad="127000" dist="38100" dir="5400000" algn="bl" rotWithShape="0">
+              <a:srgbClr val="2A1D12">
+                <a:alpha val="18039"/>
+              </a:srgbClr>
+            </a:outerShdw>
+          </a:effectLst>
+        </p:spPr>
+        <p:style>
+          <a:lnRef idx="1">
+            <a:schemeClr val="accent1"/>
+          </a:lnRef>
+          <a:fillRef idx="3">
+            <a:schemeClr val="accent1"/>
+          </a:fillRef>
+          <a:effectRef idx="2">
+            <a:schemeClr val="accent1"/>
+          </a:effectRef>
+          <a:fontRef idx="minor">
+            <a:schemeClr val="lt1"/>
+          </a:fontRef>
+        </p:style>
+        <p:txBody>
+          <a:bodyPr rtlCol="0" anchor="ctr"/>
+          <a:lstStyle/>
+          <a:p>
+            <a:pPr algn="ctr"/>
+          </a:p>
+        </p:txBody>
+      </p:sp>
       <p:sp>
         <p:nvSpPr>
           <p:cNvPr id="6" name="TextBox 5"/>
+          <p:cNvSpPr txBox="1"/>
+          <p:nvPr/>
+        </p:nvSpPr>
+        <p:spPr>
+          <a:xfrm>
+            <a:off x="1143000" y="2103120"/>
+            <a:ext cx="4267200" cy="411480"/>
+          </a:xfrm>
+          <a:prstGeom prst="rect">
+            <a:avLst/>
+          </a:prstGeom>
+          <a:noFill/>
+        </p:spPr>
+        <p:txBody>
+          <a:bodyPr wrap="square">
+            <a:spAutoFit/>
+          </a:bodyPr>
+          <a:lstStyle/>
+          <a:p>
+            <a:pPr algn="l"/>
+            <a:r>
+              <a:rPr sz="1600" b="1">
+                <a:solidFill>
+                  <a:srgbClr val="2A1D12"/>
+                </a:solidFill>
+                <a:latin typeface="Calibri"/>
+              </a:rPr>
+              <a:t>Un lugar para el sensor</a:t>
+            </a:r>
+          </a:p>
+        </p:txBody>
+      </p:sp>
+      <p:sp>
+        <p:nvSpPr>
+          <p:cNvPr id="7" name="TextBox 6"/>
+          <p:cNvSpPr txBox="1"/>
+          <p:nvPr/>
+        </p:nvSpPr>
+        <p:spPr>
+          <a:xfrm>
+            <a:off x="1143000" y="2560320"/>
+            <a:ext cx="4267200" cy="1097280"/>
+          </a:xfrm>
+          <a:prstGeom prst="rect">
+            <a:avLst/>
+          </a:prstGeom>
+          <a:noFill/>
+        </p:spPr>
+        <p:txBody>
+          <a:bodyPr wrap="square">
+            <a:spAutoFit/>
+          </a:bodyPr>
+          <a:lstStyle/>
+          <a:p>
+            <a:pPr algn="l">
+              <a:lnSpc>
+                <a:spcPct val="115000"/>
+              </a:lnSpc>
+            </a:pPr>
+            <a:r>
+              <a:rPr sz="1350" b="0">
+                <a:solidFill>
+                  <a:srgbClr val="8A7A6A"/>
+                </a:solidFill>
+                <a:latin typeface="Calibri"/>
+              </a:rPr>
+              <a:t>Un punto exterior, con buena exposición al aire y protegido de lluvia directa — sobre un muro o baranda, a 2-4 m de altura. Lo definimos juntos en la visita.</a:t>
+            </a:r>
+          </a:p>
+        </p:txBody>
+      </p:sp>
+      <p:sp>
+        <p:nvSpPr>
+          <p:cNvPr id="8" name="Rounded Rectangle 7"/>
+          <p:cNvSpPr/>
+          <p:nvPr/>
+        </p:nvSpPr>
+        <p:spPr>
+          <a:xfrm>
+            <a:off x="6553200" y="1874520"/>
+            <a:ext cx="4724400" cy="2011680"/>
+          </a:xfrm>
+          <a:prstGeom prst="roundRect">
+            <a:avLst>
+              <a:gd name="adj" fmla="val 4500"/>
+            </a:avLst>
+          </a:prstGeom>
+          <a:solidFill>
+            <a:srgbClr val="F0EBE2"/>
+          </a:solidFill>
+          <a:ln>
+            <a:noFill/>
+          </a:ln>
+          <a:effectLst>
+            <a:outerShdw blurRad="127000" dist="38100" dir="5400000" algn="bl" rotWithShape="0">
+              <a:srgbClr val="2A1D12">
+                <a:alpha val="18039"/>
+              </a:srgbClr>
+            </a:outerShdw>
+          </a:effectLst>
+        </p:spPr>
+        <p:style>
+          <a:lnRef idx="1">
+            <a:schemeClr val="accent1"/>
+          </a:lnRef>
+          <a:fillRef idx="3">
+            <a:schemeClr val="accent1"/>
+          </a:fillRef>
+          <a:effectRef idx="2">
+            <a:schemeClr val="accent1"/>
+          </a:effectRef>
+          <a:fontRef idx="minor">
+            <a:schemeClr val="lt1"/>
+          </a:fontRef>
+        </p:style>
+        <p:txBody>
+          <a:bodyPr rtlCol="0" anchor="ctr"/>
+          <a:lstStyle/>
+          <a:p>
+            <a:pPr algn="ctr"/>
+          </a:p>
+        </p:txBody>
+      </p:sp>
+      <p:sp>
+        <p:nvSpPr>
+          <p:cNvPr id="9" name="TextBox 8"/>
+          <p:cNvSpPr txBox="1"/>
+          <p:nvPr/>
+        </p:nvSpPr>
+        <p:spPr>
+          <a:xfrm>
+            <a:off x="6781800" y="2103120"/>
+            <a:ext cx="4267200" cy="411480"/>
+          </a:xfrm>
+          <a:prstGeom prst="rect">
+            <a:avLst/>
+          </a:prstGeom>
+          <a:noFill/>
+        </p:spPr>
+        <p:txBody>
+          <a:bodyPr wrap="square">
+            <a:spAutoFit/>
+          </a:bodyPr>
+          <a:lstStyle/>
+          <a:p>
+            <a:pPr algn="l"/>
+            <a:r>
+              <a:rPr sz="1600" b="1">
+                <a:solidFill>
+                  <a:srgbClr val="2A1D12"/>
+                </a:solidFill>
+                <a:latin typeface="Calibri"/>
+              </a:rPr>
+              <a:t>Energía cerca del punto</a:t>
+            </a:r>
+          </a:p>
+        </p:txBody>
+      </p:sp>
+      <p:sp>
+        <p:nvSpPr>
+          <p:cNvPr id="10" name="TextBox 9"/>
+          <p:cNvSpPr txBox="1"/>
+          <p:nvPr/>
+        </p:nvSpPr>
+        <p:spPr>
+          <a:xfrm>
+            <a:off x="6781800" y="2560320"/>
+            <a:ext cx="4267200" cy="1097280"/>
+          </a:xfrm>
+          <a:prstGeom prst="rect">
+            <a:avLst/>
+          </a:prstGeom>
+          <a:noFill/>
+        </p:spPr>
+        <p:txBody>
+          <a:bodyPr wrap="square">
+            <a:spAutoFit/>
+          </a:bodyPr>
+          <a:lstStyle/>
+          <a:p>
+            <a:pPr algn="l">
+              <a:lnSpc>
+                <a:spcPct val="115000"/>
+              </a:lnSpc>
+            </a:pPr>
+            <a:r>
+              <a:rPr sz="1350" b="0">
+                <a:solidFill>
+                  <a:srgbClr val="8A7A6A"/>
+                </a:solidFill>
+                <a:latin typeface="Calibri"/>
+              </a:rPr>
+              <a:t>Un toma corriente a alcance del cable (o cerca, para extender). El sensor consume muy poco — similar a un router hogareño.</a:t>
+            </a:r>
+          </a:p>
+        </p:txBody>
+      </p:sp>
+      <p:sp>
+        <p:nvSpPr>
+          <p:cNvPr id="11" name="Rounded Rectangle 10"/>
+          <p:cNvSpPr/>
+          <p:nvPr/>
+        </p:nvSpPr>
+        <p:spPr>
+          <a:xfrm>
+            <a:off x="914400" y="4114800"/>
+            <a:ext cx="4724400" cy="2011680"/>
+          </a:xfrm>
+          <a:prstGeom prst="roundRect">
+            <a:avLst>
+              <a:gd name="adj" fmla="val 4500"/>
+            </a:avLst>
+          </a:prstGeom>
+          <a:solidFill>
+            <a:srgbClr val="F0EBE2"/>
+          </a:solidFill>
+          <a:ln>
+            <a:noFill/>
+          </a:ln>
+          <a:effectLst>
+            <a:outerShdw blurRad="127000" dist="38100" dir="5400000" algn="bl" rotWithShape="0">
+              <a:srgbClr val="2A1D12">
+                <a:alpha val="18039"/>
+              </a:srgbClr>
+            </a:outerShdw>
+          </a:effectLst>
+        </p:spPr>
+        <p:style>
+          <a:lnRef idx="1">
+            <a:schemeClr val="accent1"/>
+          </a:lnRef>
+          <a:fillRef idx="3">
+            <a:schemeClr val="accent1"/>
+          </a:fillRef>
+          <a:effectRef idx="2">
+            <a:schemeClr val="accent1"/>
+          </a:effectRef>
+          <a:fontRef idx="minor">
+            <a:schemeClr val="lt1"/>
+          </a:fontRef>
+        </p:style>
+        <p:txBody>
+          <a:bodyPr rtlCol="0" anchor="ctr"/>
+          <a:lstStyle/>
+          <a:p>
+            <a:pPr algn="ctr"/>
+          </a:p>
+        </p:txBody>
+      </p:sp>
+      <p:sp>
+        <p:nvSpPr>
+          <p:cNvPr id="12" name="TextBox 11"/>
+          <p:cNvSpPr txBox="1"/>
+          <p:nvPr/>
+        </p:nvSpPr>
+        <p:spPr>
+          <a:xfrm>
+            <a:off x="1143000" y="4343400"/>
+            <a:ext cx="4267200" cy="411480"/>
+          </a:xfrm>
+          <a:prstGeom prst="rect">
+            <a:avLst/>
+          </a:prstGeom>
+          <a:noFill/>
+        </p:spPr>
+        <p:txBody>
+          <a:bodyPr wrap="square">
+            <a:spAutoFit/>
+          </a:bodyPr>
+          <a:lstStyle/>
+          <a:p>
+            <a:pPr algn="l"/>
+            <a:r>
+              <a:rPr sz="1600" b="1">
+                <a:solidFill>
+                  <a:srgbClr val="2A1D12"/>
+                </a:solidFill>
+                <a:latin typeface="Calibri"/>
+              </a:rPr>
+              <a:t>WiFi o alternativa</a:t>
+            </a:r>
+          </a:p>
+        </p:txBody>
+      </p:sp>
+      <p:sp>
+        <p:nvSpPr>
+          <p:cNvPr id="13" name="TextBox 12"/>
+          <p:cNvSpPr txBox="1"/>
+          <p:nvPr/>
+        </p:nvSpPr>
+        <p:spPr>
+          <a:xfrm>
+            <a:off x="1143000" y="4800600"/>
+            <a:ext cx="4267200" cy="1097280"/>
+          </a:xfrm>
+          <a:prstGeom prst="rect">
+            <a:avLst/>
+          </a:prstGeom>
+          <a:noFill/>
+        </p:spPr>
+        <p:txBody>
+          <a:bodyPr wrap="square">
+            <a:spAutoFit/>
+          </a:bodyPr>
+          <a:lstStyle/>
+          <a:p>
+            <a:pPr algn="l">
+              <a:lnSpc>
+                <a:spcPct val="115000"/>
+              </a:lnSpc>
+            </a:pPr>
+            <a:r>
+              <a:rPr sz="1350" b="0">
+                <a:solidFill>
+                  <a:srgbClr val="8A7A6A"/>
+                </a:solidFill>
+                <a:latin typeface="Calibri"/>
+              </a:rPr>
+              <a:t>Acceso a la red WiFi de la institución. Si no es posible, se evalúa conectividad por datos móviles caso por caso.</a:t>
+            </a:r>
+          </a:p>
+        </p:txBody>
+      </p:sp>
+      <p:sp>
+        <p:nvSpPr>
+          <p:cNvPr id="14" name="Rounded Rectangle 13"/>
+          <p:cNvSpPr/>
+          <p:nvPr/>
+        </p:nvSpPr>
+        <p:spPr>
+          <a:xfrm>
+            <a:off x="6553200" y="4114800"/>
+            <a:ext cx="4724400" cy="2011680"/>
+          </a:xfrm>
+          <a:prstGeom prst="roundRect">
+            <a:avLst>
+              <a:gd name="adj" fmla="val 4500"/>
+            </a:avLst>
+          </a:prstGeom>
+          <a:solidFill>
+            <a:srgbClr val="F0EBE2"/>
+          </a:solidFill>
+          <a:ln>
+            <a:noFill/>
+          </a:ln>
+          <a:effectLst>
+            <a:outerShdw blurRad="127000" dist="38100" dir="5400000" algn="bl" rotWithShape="0">
+              <a:srgbClr val="2A1D12">
+                <a:alpha val="18039"/>
+              </a:srgbClr>
+            </a:outerShdw>
+          </a:effectLst>
+        </p:spPr>
+        <p:style>
+          <a:lnRef idx="1">
+            <a:schemeClr val="accent1"/>
+          </a:lnRef>
+          <a:fillRef idx="3">
+            <a:schemeClr val="accent1"/>
+          </a:fillRef>
+          <a:effectRef idx="2">
+            <a:schemeClr val="accent1"/>
+          </a:effectRef>
+          <a:fontRef idx="minor">
+            <a:schemeClr val="lt1"/>
+          </a:fontRef>
+        </p:style>
+        <p:txBody>
+          <a:bodyPr rtlCol="0" anchor="ctr"/>
+          <a:lstStyle/>
+          <a:p>
+            <a:pPr algn="ctr"/>
+          </a:p>
+        </p:txBody>
+      </p:sp>
+      <p:sp>
+        <p:nvSpPr>
+          <p:cNvPr id="15" name="TextBox 14"/>
+          <p:cNvSpPr txBox="1"/>
+          <p:nvPr/>
+        </p:nvSpPr>
+        <p:spPr>
+          <a:xfrm>
+            <a:off x="6781800" y="4343400"/>
+            <a:ext cx="4267200" cy="411480"/>
+          </a:xfrm>
+          <a:prstGeom prst="rect">
+            <a:avLst/>
+          </a:prstGeom>
+          <a:noFill/>
+        </p:spPr>
+        <p:txBody>
+          <a:bodyPr wrap="square">
+            <a:spAutoFit/>
+          </a:bodyPr>
+          <a:lstStyle/>
+          <a:p>
+            <a:pPr algn="l"/>
+            <a:r>
+              <a:rPr sz="1600" b="1">
+                <a:solidFill>
+                  <a:srgbClr val="2A1D12"/>
+                </a:solidFill>
+                <a:latin typeface="Calibri"/>
+              </a:rPr>
+              <a:t>Un referente de contacto</a:t>
+            </a:r>
+          </a:p>
+        </p:txBody>
+      </p:sp>
+      <p:sp>
+        <p:nvSpPr>
+          <p:cNvPr id="16" name="TextBox 15"/>
+          <p:cNvSpPr txBox="1"/>
+          <p:nvPr/>
+        </p:nvSpPr>
+        <p:spPr>
+          <a:xfrm>
+            <a:off x="6781800" y="4800600"/>
+            <a:ext cx="4267200" cy="1097280"/>
+          </a:xfrm>
+          <a:prstGeom prst="rect">
+            <a:avLst/>
+          </a:prstGeom>
+          <a:noFill/>
+        </p:spPr>
+        <p:txBody>
+          <a:bodyPr wrap="square">
+            <a:spAutoFit/>
+          </a:bodyPr>
+          <a:lstStyle/>
+          <a:p>
+            <a:pPr algn="l">
+              <a:lnSpc>
+                <a:spcPct val="115000"/>
+              </a:lnSpc>
+            </a:pPr>
+            <a:r>
+              <a:rPr sz="1350" b="0">
+                <a:solidFill>
+                  <a:srgbClr val="8A7A6A"/>
+                </a:solidFill>
+                <a:latin typeface="Calibri"/>
+              </a:rPr>
+              <a:t>Alguien del equipo directivo o docente que autorice el acceso el día de instalación y sea el enlace del proyecto en la escuela.</a:t>
+            </a:r>
+          </a:p>
+        </p:txBody>
+      </p:sp>
+      <p:sp>
+        <p:nvSpPr>
+          <p:cNvPr id="17" name="TextBox 16"/>
           <p:cNvSpPr txBox="1"/>
           <p:nvPr/>
         </p:nvSpPr>
@@ -11549,7 +11453,7 @@
       </p:sp>
       <p:sp>
         <p:nvSpPr>
-          <p:cNvPr id="7" name="TextBox 6"/>
+          <p:cNvPr id="18" name="TextBox 17"/>
           <p:cNvSpPr txBox="1"/>
           <p:nvPr/>
         </p:nvSpPr>
@@ -11577,7 +11481,7 @@
                 </a:solidFill>
                 <a:latin typeface="Calibri"/>
               </a:rPr>
-              <a:t>16</a:t>
+              <a:t>17</a:t>
             </a:r>
           </a:p>
         </p:txBody>
@@ -11705,40 +11609,32 @@
                 </a:solidFill>
                 <a:latin typeface="Calibri"/>
               </a:rPr>
-              <a:t>Qué necesitamos de cada institución</a:t>
-            </a:r>
-          </a:p>
-        </p:txBody>
-      </p:sp>
-      <p:sp>
-        <p:nvSpPr>
-          <p:cNvPr id="5" name="Rounded Rectangle 4"/>
+              <a:t>Cronograma — próximos pasos</a:t>
+            </a:r>
+          </a:p>
+        </p:txBody>
+      </p:sp>
+      <p:sp>
+        <p:nvSpPr>
+          <p:cNvPr id="5" name="Oval 4"/>
           <p:cNvSpPr/>
           <p:nvPr/>
         </p:nvSpPr>
         <p:spPr>
           <a:xfrm>
-            <a:off x="914400" y="1874520"/>
-            <a:ext cx="4724400" cy="2011680"/>
-          </a:xfrm>
-          <a:prstGeom prst="roundRect">
-            <a:avLst>
-              <a:gd name="adj" fmla="val 4500"/>
-            </a:avLst>
+            <a:off x="640080" y="2377440"/>
+            <a:ext cx="640080" cy="640080"/>
+          </a:xfrm>
+          <a:prstGeom prst="ellipse">
+            <a:avLst/>
           </a:prstGeom>
           <a:solidFill>
-            <a:srgbClr val="F0EBE2"/>
+            <a:srgbClr val="B84800"/>
           </a:solidFill>
           <a:ln>
             <a:noFill/>
           </a:ln>
-          <a:effectLst>
-            <a:outerShdw blurRad="127000" dist="38100" dir="5400000" algn="bl" rotWithShape="0">
-              <a:srgbClr val="2A1D12">
-                <a:alpha val="18039"/>
-              </a:srgbClr>
-            </a:outerShdw>
-          </a:effectLst>
+          <a:effectLst/>
         </p:spPr>
         <p:style>
           <a:lnRef idx="1">
@@ -11755,10 +11651,19 @@
           </a:fontRef>
         </p:style>
         <p:txBody>
-          <a:bodyPr rtlCol="0" anchor="ctr"/>
+          <a:bodyPr rtlCol="0" anchor="ctr" wrap="none"/>
           <a:lstStyle/>
           <a:p>
             <a:pPr algn="ctr"/>
+            <a:r>
+              <a:rPr sz="2200" b="1">
+                <a:solidFill>
+                  <a:srgbClr val="FFFFFF"/>
+                </a:solidFill>
+                <a:latin typeface="Calibri"/>
+              </a:rPr>
+              <a:t>1</a:t>
+            </a:r>
           </a:p>
         </p:txBody>
       </p:sp>
@@ -11770,8 +11675,8 @@
         </p:nvSpPr>
         <p:spPr>
           <a:xfrm>
-            <a:off x="1143000" y="2103120"/>
-            <a:ext cx="4267200" cy="411480"/>
+            <a:off x="640080" y="3108960"/>
+            <a:ext cx="2625090" cy="274320"/>
           </a:xfrm>
           <a:prstGeom prst="rect">
             <a:avLst/>
@@ -11786,27 +11691,62 @@
           <a:p>
             <a:pPr algn="l"/>
             <a:r>
-              <a:rPr sz="1600" b="1">
+              <a:rPr sz="1250" b="1">
+                <a:solidFill>
+                  <a:srgbClr val="9B3D00"/>
+                </a:solidFill>
+                <a:latin typeface="Calibri"/>
+              </a:rPr>
+              <a:t>16 SEP</a:t>
+            </a:r>
+          </a:p>
+        </p:txBody>
+      </p:sp>
+      <p:sp>
+        <p:nvSpPr>
+          <p:cNvPr id="7" name="TextBox 6"/>
+          <p:cNvSpPr txBox="1"/>
+          <p:nvPr/>
+        </p:nvSpPr>
+        <p:spPr>
+          <a:xfrm>
+            <a:off x="640080" y="3410712"/>
+            <a:ext cx="2625090" cy="457200"/>
+          </a:xfrm>
+          <a:prstGeom prst="rect">
+            <a:avLst/>
+          </a:prstGeom>
+          <a:noFill/>
+        </p:spPr>
+        <p:txBody>
+          <a:bodyPr wrap="square">
+            <a:spAutoFit/>
+          </a:bodyPr>
+          <a:lstStyle/>
+          <a:p>
+            <a:pPr algn="l"/>
+            <a:r>
+              <a:rPr sz="1700" b="1">
                 <a:solidFill>
                   <a:srgbClr val="2A1D12"/>
                 </a:solidFill>
                 <a:latin typeface="Calibri"/>
               </a:rPr>
-              <a:t>Un lugar para el sensor</a:t>
-            </a:r>
-          </a:p>
-        </p:txBody>
-      </p:sp>
-      <p:sp>
-        <p:nvSpPr>
-          <p:cNvPr id="7" name="TextBox 6"/>
-          <p:cNvSpPr txBox="1"/>
-          <p:nvPr/>
-        </p:nvSpPr>
-        <p:spPr>
-          <a:xfrm>
-            <a:off x="1143000" y="2560320"/>
-            <a:ext cx="4267200" cy="1097280"/>
+              <a:t>Reunión con equipos directivos</a:t>
+            </a:r>
+          </a:p>
+        </p:txBody>
+      </p:sp>
+      <p:sp>
+        <p:nvSpPr>
+          <p:cNvPr id="8" name="TextBox 7"/>
+          <p:cNvSpPr txBox="1"/>
+          <p:nvPr/>
+        </p:nvSpPr>
+        <p:spPr>
+          <a:xfrm>
+            <a:off x="640080" y="3886200"/>
+            <a:ext cx="2625090" cy="1188720"/>
           </a:xfrm>
           <a:prstGeom prst="rect">
             <a:avLst/>
@@ -11825,46 +11765,38 @@
               </a:lnSpc>
             </a:pPr>
             <a:r>
-              <a:rPr sz="1350" b="0">
+              <a:rPr sz="1400" b="0">
                 <a:solidFill>
                   <a:srgbClr val="8A7A6A"/>
                 </a:solidFill>
                 <a:latin typeface="Calibri"/>
               </a:rPr>
-              <a:t>Un punto exterior, con buena exposición al aire y protegido de lluvia directa — sobre un muro o baranda, a 2-4 m de altura. Lo definimos juntos en la visita.</a:t>
-            </a:r>
-          </a:p>
-        </p:txBody>
-      </p:sp>
-      <p:sp>
-        <p:nvSpPr>
-          <p:cNvPr id="8" name="Rounded Rectangle 7"/>
+              <a:t>Coordinación institucional: presentación del proyecto y definición de un referente por escuela.</a:t>
+            </a:r>
+          </a:p>
+        </p:txBody>
+      </p:sp>
+      <p:sp>
+        <p:nvSpPr>
+          <p:cNvPr id="9" name="Oval 8"/>
           <p:cNvSpPr/>
           <p:nvPr/>
         </p:nvSpPr>
         <p:spPr>
           <a:xfrm>
-            <a:off x="6553200" y="1874520"/>
-            <a:ext cx="4724400" cy="2011680"/>
-          </a:xfrm>
-          <a:prstGeom prst="roundRect">
-            <a:avLst>
-              <a:gd name="adj" fmla="val 4500"/>
-            </a:avLst>
+            <a:off x="3402330" y="2377440"/>
+            <a:ext cx="640080" cy="640080"/>
+          </a:xfrm>
+          <a:prstGeom prst="ellipse">
+            <a:avLst/>
           </a:prstGeom>
           <a:solidFill>
-            <a:srgbClr val="F0EBE2"/>
+            <a:srgbClr val="B84800"/>
           </a:solidFill>
           <a:ln>
             <a:noFill/>
           </a:ln>
-          <a:effectLst>
-            <a:outerShdw blurRad="127000" dist="38100" dir="5400000" algn="bl" rotWithShape="0">
-              <a:srgbClr val="2A1D12">
-                <a:alpha val="18039"/>
-              </a:srgbClr>
-            </a:outerShdw>
-          </a:effectLst>
+          <a:effectLst/>
         </p:spPr>
         <p:style>
           <a:lnRef idx="1">
@@ -11881,23 +11813,32 @@
           </a:fontRef>
         </p:style>
         <p:txBody>
-          <a:bodyPr rtlCol="0" anchor="ctr"/>
+          <a:bodyPr rtlCol="0" anchor="ctr" wrap="none"/>
           <a:lstStyle/>
           <a:p>
             <a:pPr algn="ctr"/>
-          </a:p>
-        </p:txBody>
-      </p:sp>
-      <p:sp>
-        <p:nvSpPr>
-          <p:cNvPr id="9" name="TextBox 8"/>
-          <p:cNvSpPr txBox="1"/>
-          <p:nvPr/>
-        </p:nvSpPr>
-        <p:spPr>
-          <a:xfrm>
-            <a:off x="6781800" y="2103120"/>
-            <a:ext cx="4267200" cy="411480"/>
+            <a:r>
+              <a:rPr sz="2200" b="1">
+                <a:solidFill>
+                  <a:srgbClr val="FFFFFF"/>
+                </a:solidFill>
+                <a:latin typeface="Calibri"/>
+              </a:rPr>
+              <a:t>2</a:t>
+            </a:r>
+          </a:p>
+        </p:txBody>
+      </p:sp>
+      <p:sp>
+        <p:nvSpPr>
+          <p:cNvPr id="10" name="TextBox 9"/>
+          <p:cNvSpPr txBox="1"/>
+          <p:nvPr/>
+        </p:nvSpPr>
+        <p:spPr>
+          <a:xfrm>
+            <a:off x="3402330" y="3108960"/>
+            <a:ext cx="2625090" cy="274320"/>
           </a:xfrm>
           <a:prstGeom prst="rect">
             <a:avLst/>
@@ -11912,27 +11853,62 @@
           <a:p>
             <a:pPr algn="l"/>
             <a:r>
-              <a:rPr sz="1600" b="1">
+              <a:rPr sz="1250" b="1">
+                <a:solidFill>
+                  <a:srgbClr val="9B3D00"/>
+                </a:solidFill>
+                <a:latin typeface="Calibri"/>
+              </a:rPr>
+              <a:t>PRÓXIMAS SEMANAS</a:t>
+            </a:r>
+          </a:p>
+        </p:txBody>
+      </p:sp>
+      <p:sp>
+        <p:nvSpPr>
+          <p:cNvPr id="11" name="TextBox 10"/>
+          <p:cNvSpPr txBox="1"/>
+          <p:nvPr/>
+        </p:nvSpPr>
+        <p:spPr>
+          <a:xfrm>
+            <a:off x="3402330" y="3410712"/>
+            <a:ext cx="2625090" cy="457200"/>
+          </a:xfrm>
+          <a:prstGeom prst="rect">
+            <a:avLst/>
+          </a:prstGeom>
+          <a:noFill/>
+        </p:spPr>
+        <p:txBody>
+          <a:bodyPr wrap="square">
+            <a:spAutoFit/>
+          </a:bodyPr>
+          <a:lstStyle/>
+          <a:p>
+            <a:pPr algn="l"/>
+            <a:r>
+              <a:rPr sz="1700" b="1">
                 <a:solidFill>
                   <a:srgbClr val="2A1D12"/>
                 </a:solidFill>
                 <a:latin typeface="Calibri"/>
               </a:rPr>
-              <a:t>Energía cerca del punto</a:t>
-            </a:r>
-          </a:p>
-        </p:txBody>
-      </p:sp>
-      <p:sp>
-        <p:nvSpPr>
-          <p:cNvPr id="10" name="TextBox 9"/>
-          <p:cNvSpPr txBox="1"/>
-          <p:nvPr/>
-        </p:nvSpPr>
-        <p:spPr>
-          <a:xfrm>
-            <a:off x="6781800" y="2560320"/>
-            <a:ext cx="4267200" cy="1097280"/>
+              <a:t>Relevamiento en sitio</a:t>
+            </a:r>
+          </a:p>
+        </p:txBody>
+      </p:sp>
+      <p:sp>
+        <p:nvSpPr>
+          <p:cNvPr id="12" name="TextBox 11"/>
+          <p:cNvSpPr txBox="1"/>
+          <p:nvPr/>
+        </p:nvSpPr>
+        <p:spPr>
+          <a:xfrm>
+            <a:off x="3402330" y="3886200"/>
+            <a:ext cx="2625090" cy="1188720"/>
           </a:xfrm>
           <a:prstGeom prst="rect">
             <a:avLst/>
@@ -11951,46 +11927,38 @@
               </a:lnSpc>
             </a:pPr>
             <a:r>
-              <a:rPr sz="1350" b="0">
+              <a:rPr sz="1400" b="0">
                 <a:solidFill>
                   <a:srgbClr val="8A7A6A"/>
                 </a:solidFill>
                 <a:latin typeface="Calibri"/>
               </a:rPr>
-              <a:t>Un toma corriente a alcance del cable (o cerca, para extender). El sensor consume muy poco — similar a un router hogareño.</a:t>
-            </a:r>
-          </a:p>
-        </p:txBody>
-      </p:sp>
-      <p:sp>
-        <p:nvSpPr>
-          <p:cNvPr id="11" name="Rounded Rectangle 10"/>
+              <a:t>Visita a cada institución para definir junto al referente el punto exacto de instalación.</a:t>
+            </a:r>
+          </a:p>
+        </p:txBody>
+      </p:sp>
+      <p:sp>
+        <p:nvSpPr>
+          <p:cNvPr id="13" name="Oval 12"/>
           <p:cNvSpPr/>
           <p:nvPr/>
         </p:nvSpPr>
         <p:spPr>
           <a:xfrm>
-            <a:off x="914400" y="4114800"/>
-            <a:ext cx="4724400" cy="2011680"/>
-          </a:xfrm>
-          <a:prstGeom prst="roundRect">
-            <a:avLst>
-              <a:gd name="adj" fmla="val 4500"/>
-            </a:avLst>
+            <a:off x="6164580" y="2377440"/>
+            <a:ext cx="640080" cy="640080"/>
+          </a:xfrm>
+          <a:prstGeom prst="ellipse">
+            <a:avLst/>
           </a:prstGeom>
           <a:solidFill>
-            <a:srgbClr val="F0EBE2"/>
+            <a:srgbClr val="B84800"/>
           </a:solidFill>
           <a:ln>
             <a:noFill/>
           </a:ln>
-          <a:effectLst>
-            <a:outerShdw blurRad="127000" dist="38100" dir="5400000" algn="bl" rotWithShape="0">
-              <a:srgbClr val="2A1D12">
-                <a:alpha val="18039"/>
-              </a:srgbClr>
-            </a:outerShdw>
-          </a:effectLst>
+          <a:effectLst/>
         </p:spPr>
         <p:style>
           <a:lnRef idx="1">
@@ -12007,23 +11975,32 @@
           </a:fontRef>
         </p:style>
         <p:txBody>
-          <a:bodyPr rtlCol="0" anchor="ctr"/>
+          <a:bodyPr rtlCol="0" anchor="ctr" wrap="none"/>
           <a:lstStyle/>
           <a:p>
             <a:pPr algn="ctr"/>
-          </a:p>
-        </p:txBody>
-      </p:sp>
-      <p:sp>
-        <p:nvSpPr>
-          <p:cNvPr id="12" name="TextBox 11"/>
-          <p:cNvSpPr txBox="1"/>
-          <p:nvPr/>
-        </p:nvSpPr>
-        <p:spPr>
-          <a:xfrm>
-            <a:off x="1143000" y="4343400"/>
-            <a:ext cx="4267200" cy="411480"/>
+            <a:r>
+              <a:rPr sz="2200" b="1">
+                <a:solidFill>
+                  <a:srgbClr val="FFFFFF"/>
+                </a:solidFill>
+                <a:latin typeface="Calibri"/>
+              </a:rPr>
+              <a:t>3</a:t>
+            </a:r>
+          </a:p>
+        </p:txBody>
+      </p:sp>
+      <p:sp>
+        <p:nvSpPr>
+          <p:cNvPr id="14" name="TextBox 13"/>
+          <p:cNvSpPr txBox="1"/>
+          <p:nvPr/>
+        </p:nvSpPr>
+        <p:spPr>
+          <a:xfrm>
+            <a:off x="6164580" y="3108960"/>
+            <a:ext cx="2625090" cy="274320"/>
           </a:xfrm>
           <a:prstGeom prst="rect">
             <a:avLst/>
@@ -12038,27 +12015,62 @@
           <a:p>
             <a:pPr algn="l"/>
             <a:r>
-              <a:rPr sz="1600" b="1">
+              <a:rPr sz="1250" b="1">
+                <a:solidFill>
+                  <a:srgbClr val="9B3D00"/>
+                </a:solidFill>
+                <a:latin typeface="Calibri"/>
+              </a:rPr>
+              <a:t>TRAS EL RELEVAMIENTO</a:t>
+            </a:r>
+          </a:p>
+        </p:txBody>
+      </p:sp>
+      <p:sp>
+        <p:nvSpPr>
+          <p:cNvPr id="15" name="TextBox 14"/>
+          <p:cNvSpPr txBox="1"/>
+          <p:nvPr/>
+        </p:nvSpPr>
+        <p:spPr>
+          <a:xfrm>
+            <a:off x="6164580" y="3410712"/>
+            <a:ext cx="2625090" cy="457200"/>
+          </a:xfrm>
+          <a:prstGeom prst="rect">
+            <a:avLst/>
+          </a:prstGeom>
+          <a:noFill/>
+        </p:spPr>
+        <p:txBody>
+          <a:bodyPr wrap="square">
+            <a:spAutoFit/>
+          </a:bodyPr>
+          <a:lstStyle/>
+          <a:p>
+            <a:pPr algn="l"/>
+            <a:r>
+              <a:rPr sz="1700" b="1">
                 <a:solidFill>
                   <a:srgbClr val="2A1D12"/>
                 </a:solidFill>
                 <a:latin typeface="Calibri"/>
               </a:rPr>
-              <a:t>WiFi o alternativa</a:t>
-            </a:r>
-          </a:p>
-        </p:txBody>
-      </p:sp>
-      <p:sp>
-        <p:nvSpPr>
-          <p:cNvPr id="13" name="TextBox 12"/>
-          <p:cNvSpPr txBox="1"/>
-          <p:nvPr/>
-        </p:nvSpPr>
-        <p:spPr>
-          <a:xfrm>
-            <a:off x="1143000" y="4800600"/>
-            <a:ext cx="4267200" cy="1097280"/>
+              <a:t>Instalación y calibración</a:t>
+            </a:r>
+          </a:p>
+        </p:txBody>
+      </p:sp>
+      <p:sp>
+        <p:nvSpPr>
+          <p:cNvPr id="16" name="TextBox 15"/>
+          <p:cNvSpPr txBox="1"/>
+          <p:nvPr/>
+        </p:nvSpPr>
+        <p:spPr>
+          <a:xfrm>
+            <a:off x="6164580" y="3886200"/>
+            <a:ext cx="2625090" cy="1188720"/>
           </a:xfrm>
           <a:prstGeom prst="rect">
             <a:avLst/>
@@ -12077,46 +12089,38 @@
               </a:lnSpc>
             </a:pPr>
             <a:r>
-              <a:rPr sz="1350" b="0">
+              <a:rPr sz="1400" b="0">
                 <a:solidFill>
                   <a:srgbClr val="8A7A6A"/>
                 </a:solidFill>
                 <a:latin typeface="Calibri"/>
               </a:rPr>
-              <a:t>Acceso a la red WiFi de la institución. Si no es posible, se evalúa conectividad por datos móviles caso por caso.</a:t>
-            </a:r>
-          </a:p>
-        </p:txBody>
-      </p:sp>
-      <p:sp>
-        <p:nvSpPr>
-          <p:cNvPr id="14" name="Rounded Rectangle 13"/>
+              <a:t>Montaje del sensor, conexión a energía/WiFi y verificación de la primera lectura.</a:t>
+            </a:r>
+          </a:p>
+        </p:txBody>
+      </p:sp>
+      <p:sp>
+        <p:nvSpPr>
+          <p:cNvPr id="17" name="Oval 16"/>
           <p:cNvSpPr/>
           <p:nvPr/>
         </p:nvSpPr>
         <p:spPr>
           <a:xfrm>
-            <a:off x="6553200" y="4114800"/>
-            <a:ext cx="4724400" cy="2011680"/>
-          </a:xfrm>
-          <a:prstGeom prst="roundRect">
-            <a:avLst>
-              <a:gd name="adj" fmla="val 4500"/>
-            </a:avLst>
+            <a:off x="8926830" y="2377440"/>
+            <a:ext cx="640080" cy="640080"/>
+          </a:xfrm>
+          <a:prstGeom prst="ellipse">
+            <a:avLst/>
           </a:prstGeom>
           <a:solidFill>
-            <a:srgbClr val="F0EBE2"/>
+            <a:srgbClr val="B84800"/>
           </a:solidFill>
           <a:ln>
             <a:noFill/>
           </a:ln>
-          <a:effectLst>
-            <a:outerShdw blurRad="127000" dist="38100" dir="5400000" algn="bl" rotWithShape="0">
-              <a:srgbClr val="2A1D12">
-                <a:alpha val="18039"/>
-              </a:srgbClr>
-            </a:outerShdw>
-          </a:effectLst>
+          <a:effectLst/>
         </p:spPr>
         <p:style>
           <a:lnRef idx="1">
@@ -12133,23 +12137,32 @@
           </a:fontRef>
         </p:style>
         <p:txBody>
-          <a:bodyPr rtlCol="0" anchor="ctr"/>
+          <a:bodyPr rtlCol="0" anchor="ctr" wrap="none"/>
           <a:lstStyle/>
           <a:p>
             <a:pPr algn="ctr"/>
-          </a:p>
-        </p:txBody>
-      </p:sp>
-      <p:sp>
-        <p:nvSpPr>
-          <p:cNvPr id="15" name="TextBox 14"/>
-          <p:cNvSpPr txBox="1"/>
-          <p:nvPr/>
-        </p:nvSpPr>
-        <p:spPr>
-          <a:xfrm>
-            <a:off x="6781800" y="4343400"/>
-            <a:ext cx="4267200" cy="411480"/>
+            <a:r>
+              <a:rPr sz="2200" b="1">
+                <a:solidFill>
+                  <a:srgbClr val="FFFFFF"/>
+                </a:solidFill>
+                <a:latin typeface="Calibri"/>
+              </a:rPr>
+              <a:t>4</a:t>
+            </a:r>
+          </a:p>
+        </p:txBody>
+      </p:sp>
+      <p:sp>
+        <p:nvSpPr>
+          <p:cNvPr id="18" name="TextBox 17"/>
+          <p:cNvSpPr txBox="1"/>
+          <p:nvPr/>
+        </p:nvSpPr>
+        <p:spPr>
+          <a:xfrm>
+            <a:off x="8926830" y="3108960"/>
+            <a:ext cx="2625090" cy="274320"/>
           </a:xfrm>
           <a:prstGeom prst="rect">
             <a:avLst/>
@@ -12164,27 +12177,62 @@
           <a:p>
             <a:pPr algn="l"/>
             <a:r>
-              <a:rPr sz="1600" b="1">
+              <a:rPr sz="1250" b="1">
+                <a:solidFill>
+                  <a:srgbClr val="9B3D00"/>
+                </a:solidFill>
+                <a:latin typeface="Calibri"/>
+              </a:rPr>
+              <a:t>META</a:t>
+            </a:r>
+          </a:p>
+        </p:txBody>
+      </p:sp>
+      <p:sp>
+        <p:nvSpPr>
+          <p:cNvPr id="19" name="TextBox 18"/>
+          <p:cNvSpPr txBox="1"/>
+          <p:nvPr/>
+        </p:nvSpPr>
+        <p:spPr>
+          <a:xfrm>
+            <a:off x="8926830" y="3410712"/>
+            <a:ext cx="2625090" cy="457200"/>
+          </a:xfrm>
+          <a:prstGeom prst="rect">
+            <a:avLst/>
+          </a:prstGeom>
+          <a:noFill/>
+        </p:spPr>
+        <p:txBody>
+          <a:bodyPr wrap="square">
+            <a:spAutoFit/>
+          </a:bodyPr>
+          <a:lstStyle/>
+          <a:p>
+            <a:pPr algn="l"/>
+            <a:r>
+              <a:rPr sz="1700" b="1">
                 <a:solidFill>
                   <a:srgbClr val="2A1D12"/>
                 </a:solidFill>
                 <a:latin typeface="Calibri"/>
               </a:rPr>
-              <a:t>Un referente de contacto</a:t>
-            </a:r>
-          </a:p>
-        </p:txBody>
-      </p:sp>
-      <p:sp>
-        <p:nvSpPr>
-          <p:cNvPr id="16" name="TextBox 15"/>
-          <p:cNvSpPr txBox="1"/>
-          <p:nvPr/>
-        </p:nvSpPr>
-        <p:spPr>
-          <a:xfrm>
-            <a:off x="6781800" y="4800600"/>
-            <a:ext cx="4267200" cy="1097280"/>
+              <a:t>Datos en vivo</a:t>
+            </a:r>
+          </a:p>
+        </p:txBody>
+      </p:sp>
+      <p:sp>
+        <p:nvSpPr>
+          <p:cNvPr id="20" name="TextBox 19"/>
+          <p:cNvSpPr txBox="1"/>
+          <p:nvPr/>
+        </p:nvSpPr>
+        <p:spPr>
+          <a:xfrm>
+            <a:off x="8926830" y="3886200"/>
+            <a:ext cx="2625090" cy="1188720"/>
           </a:xfrm>
           <a:prstGeom prst="rect">
             <a:avLst/>
@@ -12203,20 +12251,20 @@
               </a:lnSpc>
             </a:pPr>
             <a:r>
-              <a:rPr sz="1350" b="0">
+              <a:rPr sz="1400" b="0">
                 <a:solidFill>
                   <a:srgbClr val="8A7A6A"/>
                 </a:solidFill>
                 <a:latin typeface="Calibri"/>
               </a:rPr>
-              <a:t>Alguien del equipo directivo o docente que autorice el acceso el día de instalación y sea el enlace del proyecto en la escuela.</a:t>
-            </a:r>
-          </a:p>
-        </p:txBody>
-      </p:sp>
-      <p:sp>
-        <p:nvSpPr>
-          <p:cNvPr id="17" name="TextBox 16"/>
+              <a:t>Cada escuela visible en aq.lemeit.ar, con acceso público a su propio historial.</a:t>
+            </a:r>
+          </a:p>
+        </p:txBody>
+      </p:sp>
+      <p:sp>
+        <p:nvSpPr>
+          <p:cNvPr id="21" name="TextBox 20"/>
           <p:cNvSpPr txBox="1"/>
           <p:nvPr/>
         </p:nvSpPr>
@@ -12250,7 +12298,7 @@
       </p:sp>
       <p:sp>
         <p:nvSpPr>
-          <p:cNvPr id="18" name="TextBox 17"/>
+          <p:cNvPr id="22" name="TextBox 21"/>
           <p:cNvSpPr txBox="1"/>
           <p:nvPr/>
         </p:nvSpPr>
@@ -12278,7 +12326,7 @@
                 </a:solidFill>
                 <a:latin typeface="Calibri"/>
               </a:rPr>
-              <a:t>17</a:t>
+              <a:t>18</a:t>
             </a:r>
           </a:p>
         </p:txBody>
@@ -12292,134 +12340,38 @@
 </file>
 
 <file path=ppt/slides/slide19.xml><?xml version="1.0" encoding="utf-8"?>
-<p:sld xmlns:a="http://schemas.openxmlformats.org/drawingml/2006/main" xmlns:p="http://schemas.openxmlformats.org/presentationml/2006/main" xmlns:r="http://schemas.openxmlformats.org/officeDocument/2006/relationships">
+<p:sld xmlns:a="http://schemas.openxmlformats.org/drawingml/2006/main" xmlns:r="http://schemas.openxmlformats.org/officeDocument/2006/relationships" xmlns:mc="http://schemas.openxmlformats.org/markup-compatibility/2006" xmlns:mv="urn:schemas-microsoft-com:mac:vml" xmlns:p="http://schemas.openxmlformats.org/presentationml/2006/main" xmlns:c="http://schemas.openxmlformats.org/drawingml/2006/chart" xmlns:dgm="http://schemas.openxmlformats.org/drawingml/2006/diagram" xmlns:o="urn:schemas-microsoft-com:office:office" xmlns:v="urn:schemas-microsoft-com:vml" xmlns:pvml="urn:schemas-microsoft-com:office:powerpoint" xmlns:com="http://schemas.openxmlformats.org/drawingml/2006/compatibility" xmlns:p14="http://schemas.microsoft.com/office/powerpoint/2010/main" xmlns:p15="http://schemas.microsoft.com/office/powerpoint/2012/main" xmlns:ahyp="http://schemas.microsoft.com/office/drawing/2018/hyperlinkcolor">
   <p:cSld>
     <p:bg>
       <p:bgPr>
         <a:solidFill>
-          <a:srgbClr val="FAF7F2"/>
+          <a:srgbClr val="2E2822"/>
         </a:solidFill>
-        <a:effectLst/>
       </p:bgPr>
     </p:bg>
     <p:spTree>
       <p:nvGrpSpPr>
-        <p:cNvPr id="1" name=""/>
+        <p:cNvPr id="290" name="Shape 290"/>
         <p:cNvGrpSpPr/>
         <p:nvPr/>
       </p:nvGrpSpPr>
-      <p:grpSpPr/>
-      <p:sp>
-        <p:nvSpPr>
-          <p:cNvPr id="2" name="Oval 1"/>
+      <p:grpSpPr>
+        <a:xfrm>
+          <a:off x="0" y="0"/>
+          <a:ext cx="0" cy="0"/>
+          <a:chOff x="0" y="0"/>
+          <a:chExt cx="0" cy="0"/>
+        </a:xfrm>
+      </p:grpSpPr>
+      <p:sp>
+        <p:nvSpPr>
+          <p:cNvPr id="291" name="Google Shape;291;p16"/>
           <p:cNvSpPr/>
           <p:nvPr/>
         </p:nvSpPr>
         <p:spPr>
           <a:xfrm>
-            <a:off x="548640" y="502920"/>
-            <a:ext cx="566928" cy="566928"/>
-          </a:xfrm>
-          <a:prstGeom prst="ellipse">
-            <a:avLst/>
-          </a:prstGeom>
-          <a:solidFill>
-            <a:srgbClr val="9B3D00"/>
-          </a:solidFill>
-          <a:ln>
-            <a:noFill/>
-          </a:ln>
-          <a:effectLst/>
-        </p:spPr>
-        <p:style>
-          <a:lnRef idx="1">
-            <a:schemeClr val="accent1"/>
-          </a:lnRef>
-          <a:fillRef idx="3">
-            <a:schemeClr val="accent1"/>
-          </a:fillRef>
-          <a:effectRef idx="2">
-            <a:schemeClr val="accent1"/>
-          </a:effectRef>
-          <a:fontRef idx="minor">
-            <a:schemeClr val="lt1"/>
-          </a:fontRef>
-        </p:style>
-        <p:txBody>
-          <a:bodyPr rtlCol="0" anchor="ctr"/>
-          <a:lstStyle/>
-          <a:p>
-            <a:pPr algn="ctr"/>
-          </a:p>
-        </p:txBody>
-      </p:sp>
-      <p:pic>
-        <p:nvPicPr>
-          <p:cNvPr id="3" name="Picture 2" descr="image.png"/>
-          <p:cNvPicPr>
-            <a:picLocks noChangeAspect="1"/>
-          </p:cNvPicPr>
-          <p:nvPr/>
-        </p:nvPicPr>
-        <p:blipFill>
-          <a:blip r:embed="rId2"/>
-          <a:stretch>
-            <a:fillRect/>
-          </a:stretch>
-        </p:blipFill>
-        <p:spPr>
-          <a:xfrm>
-            <a:off x="685800" y="640080"/>
-            <a:ext cx="292608" cy="292608"/>
-          </a:xfrm>
-          <a:prstGeom prst="rect">
-            <a:avLst/>
-          </a:prstGeom>
-        </p:spPr>
-      </p:pic>
-      <p:sp>
-        <p:nvSpPr>
-          <p:cNvPr id="4" name="TextBox 3"/>
-          <p:cNvSpPr txBox="1"/>
-          <p:nvPr/>
-        </p:nvSpPr>
-        <p:spPr>
-          <a:xfrm>
-            <a:off x="1325880" y="457200"/>
-            <a:ext cx="10241280" cy="822960"/>
-          </a:xfrm>
-          <a:prstGeom prst="rect">
-            <a:avLst/>
-          </a:prstGeom>
-          <a:noFill/>
-        </p:spPr>
-        <p:txBody>
-          <a:bodyPr wrap="square" anchor="ctr">
-            <a:spAutoFit/>
-          </a:bodyPr>
-          <a:lstStyle/>
-          <a:p>
-            <a:r>
-              <a:rPr sz="2600" b="1">
-                <a:solidFill>
-                  <a:srgbClr val="2A1D12"/>
-                </a:solidFill>
-                <a:latin typeface="Calibri"/>
-              </a:rPr>
-              <a:t>Cronograma — próximos pasos</a:t>
-            </a:r>
-          </a:p>
-        </p:txBody>
-      </p:sp>
-      <p:sp>
-        <p:nvSpPr>
-          <p:cNvPr id="5" name="Oval 4"/>
-          <p:cNvSpPr/>
-          <p:nvPr/>
-        </p:nvSpPr>
-        <p:spPr>
-          <a:xfrm>
-            <a:off x="640080" y="2377440"/>
+            <a:off x="822960" y="640080"/>
             <a:ext cx="640080" cy="640080"/>
           </a:xfrm>
           <a:prstGeom prst="ellipse">
@@ -12431,637 +12383,691 @@
           <a:ln>
             <a:noFill/>
           </a:ln>
-          <a:effectLst/>
-        </p:spPr>
-        <p:style>
-          <a:lnRef idx="1">
-            <a:schemeClr val="accent1"/>
-          </a:lnRef>
-          <a:fillRef idx="3">
-            <a:schemeClr val="accent1"/>
-          </a:fillRef>
-          <a:effectRef idx="2">
-            <a:schemeClr val="accent1"/>
-          </a:effectRef>
-          <a:fontRef idx="minor">
-            <a:schemeClr val="lt1"/>
-          </a:fontRef>
-        </p:style>
-        <p:txBody>
-          <a:bodyPr rtlCol="0" anchor="ctr" wrap="none"/>
-          <a:lstStyle/>
-          <a:p>
-            <a:pPr algn="ctr"/>
-            <a:r>
-              <a:rPr sz="2200" b="1">
+        </p:spPr>
+        <p:txBody>
+          <a:bodyPr anchorCtr="0" anchor="ctr" bIns="91425" lIns="91425" spcFirstLastPara="1" rIns="91425" wrap="square" tIns="91425">
+            <a:noAutofit/>
+          </a:bodyPr>
+          <a:lstStyle/>
+          <a:p>
+            <a:pPr indent="0" lvl="0" marL="0" rtl="0" algn="l">
+              <a:spcBef>
+                <a:spcPts val="0"/>
+              </a:spcBef>
+              <a:spcAft>
+                <a:spcPts val="0"/>
+              </a:spcAft>
+              <a:buNone/>
+            </a:pPr>
+            <a:r>
+              <a:rPr/>
+              <a:t/>
+            </a:r>
+            <a:endParaRPr/>
+          </a:p>
+        </p:txBody>
+      </p:sp>
+      <p:pic>
+        <p:nvPicPr>
+          <p:cNvPr descr="/home/claude/pptx_build/icons/cierre.png" id="292" name="Google Shape;292;p16"/>
+          <p:cNvPicPr preferRelativeResize="0"/>
+          <p:nvPr/>
+        </p:nvPicPr>
+        <p:blipFill rotWithShape="1">
+          <a:blip r:embed="rId3">
+            <a:alphaModFix/>
+          </a:blip>
+          <a:srcRect b="0" l="0" r="0" t="0"/>
+          <a:stretch/>
+        </p:blipFill>
+        <p:spPr>
+          <a:xfrm>
+            <a:off x="960120" y="777240"/>
+            <a:ext cx="365760" cy="365760"/>
+          </a:xfrm>
+          <a:prstGeom prst="rect">
+            <a:avLst/>
+          </a:prstGeom>
+          <a:noFill/>
+          <a:ln>
+            <a:noFill/>
+          </a:ln>
+        </p:spPr>
+      </p:pic>
+      <p:sp>
+        <p:nvSpPr>
+          <p:cNvPr id="293" name="Google Shape;293;p16"/>
+          <p:cNvSpPr txBox="1"/>
+          <p:nvPr/>
+        </p:nvSpPr>
+        <p:spPr>
+          <a:xfrm>
+            <a:off x="822960" y="1508760"/>
+            <a:ext cx="9601200" cy="822960"/>
+          </a:xfrm>
+          <a:prstGeom prst="rect">
+            <a:avLst/>
+          </a:prstGeom>
+          <a:noFill/>
+          <a:ln>
+            <a:noFill/>
+          </a:ln>
+        </p:spPr>
+        <p:txBody>
+          <a:bodyPr anchorCtr="0" anchor="ctr" bIns="0" lIns="0" spcFirstLastPara="1" rIns="0" wrap="square" tIns="0">
+            <a:noAutofit/>
+          </a:bodyPr>
+          <a:lstStyle/>
+          <a:p>
+            <a:pPr indent="0" lvl="0" marL="0" marR="0" rtl="0" algn="l">
+              <a:spcBef>
+                <a:spcPts val="0"/>
+              </a:spcBef>
+              <a:spcAft>
+                <a:spcPts val="0"/>
+              </a:spcAft>
+              <a:buClr>
+                <a:srgbClr val="FFFFFF"/>
+              </a:buClr>
+              <a:buSzPts val="3000"/>
+              <a:buFont typeface="Calibri"/>
+              <a:buNone/>
+            </a:pPr>
+            <a:r>
+              <a:rPr b="1" i="0" lang="en-US" sz="3000" u="none" cap="none" strike="noStrike">
                 <a:solidFill>
                   <a:srgbClr val="FFFFFF"/>
                 </a:solidFill>
                 <a:latin typeface="Calibri"/>
-              </a:rPr>
-              <a:t>1</a:t>
-            </a:r>
-          </a:p>
-        </p:txBody>
-      </p:sp>
-      <p:sp>
-        <p:nvSpPr>
-          <p:cNvPr id="6" name="TextBox 5"/>
-          <p:cNvSpPr txBox="1"/>
-          <p:nvPr/>
-        </p:nvSpPr>
-        <p:spPr>
-          <a:xfrm>
-            <a:off x="640080" y="3108960"/>
-            <a:ext cx="2625090" cy="274320"/>
-          </a:xfrm>
-          <a:prstGeom prst="rect">
-            <a:avLst/>
-          </a:prstGeom>
-          <a:noFill/>
-        </p:spPr>
-        <p:txBody>
-          <a:bodyPr wrap="square">
-            <a:spAutoFit/>
-          </a:bodyPr>
-          <a:lstStyle/>
-          <a:p>
-            <a:pPr algn="l"/>
-            <a:r>
-              <a:rPr sz="1250" b="1">
-                <a:solidFill>
-                  <a:srgbClr val="9B3D00"/>
-                </a:solidFill>
-                <a:latin typeface="Calibri"/>
-              </a:rPr>
-              <a:t>16 SEP</a:t>
-            </a:r>
-          </a:p>
-        </p:txBody>
-      </p:sp>
-      <p:sp>
-        <p:nvSpPr>
-          <p:cNvPr id="7" name="TextBox 6"/>
-          <p:cNvSpPr txBox="1"/>
-          <p:nvPr/>
-        </p:nvSpPr>
-        <p:spPr>
-          <a:xfrm>
-            <a:off x="640080" y="3410712"/>
-            <a:ext cx="2625090" cy="457200"/>
-          </a:xfrm>
-          <a:prstGeom prst="rect">
-            <a:avLst/>
-          </a:prstGeom>
-          <a:noFill/>
-        </p:spPr>
-        <p:txBody>
-          <a:bodyPr wrap="square">
-            <a:spAutoFit/>
-          </a:bodyPr>
-          <a:lstStyle/>
-          <a:p>
-            <a:pPr algn="l"/>
-            <a:r>
-              <a:rPr sz="1700" b="1">
-                <a:solidFill>
-                  <a:srgbClr val="2A1D12"/>
-                </a:solidFill>
-                <a:latin typeface="Calibri"/>
-              </a:rPr>
-              <a:t>Reunión con equipos directivos</a:t>
-            </a:r>
-          </a:p>
-        </p:txBody>
-      </p:sp>
-      <p:sp>
-        <p:nvSpPr>
-          <p:cNvPr id="8" name="TextBox 7"/>
-          <p:cNvSpPr txBox="1"/>
-          <p:nvPr/>
-        </p:nvSpPr>
-        <p:spPr>
-          <a:xfrm>
-            <a:off x="640080" y="3886200"/>
-            <a:ext cx="2625090" cy="1188720"/>
-          </a:xfrm>
-          <a:prstGeom prst="rect">
-            <a:avLst/>
-          </a:prstGeom>
-          <a:noFill/>
-        </p:spPr>
-        <p:txBody>
-          <a:bodyPr wrap="square">
-            <a:spAutoFit/>
-          </a:bodyPr>
-          <a:lstStyle/>
-          <a:p>
-            <a:pPr algn="l">
+                <a:ea typeface="Calibri"/>
+                <a:cs typeface="Calibri"/>
+                <a:sym typeface="Calibri"/>
+              </a:rPr>
+              <a:t>Lo que proponemos a la comunidad educativa</a:t>
+            </a:r>
+            <a:endParaRPr b="0" i="0" sz="3000" u="none" cap="none" strike="noStrike">
+              <a:solidFill>
+                <a:schemeClr val="dk1"/>
+              </a:solidFill>
+              <a:latin typeface="Calibri"/>
+              <a:ea typeface="Calibri"/>
+              <a:cs typeface="Calibri"/>
+              <a:sym typeface="Calibri"/>
+            </a:endParaRPr>
+          </a:p>
+        </p:txBody>
+      </p:sp>
+      <p:sp>
+        <p:nvSpPr>
+          <p:cNvPr id="294" name="Google Shape;294;p16"/>
+          <p:cNvSpPr txBox="1"/>
+          <p:nvPr/>
+        </p:nvSpPr>
+        <p:spPr>
+          <a:xfrm>
+            <a:off x="822960" y="2514600"/>
+            <a:ext cx="9784080" cy="2011680"/>
+          </a:xfrm>
+          <a:prstGeom prst="rect">
+            <a:avLst/>
+          </a:prstGeom>
+          <a:noFill/>
+          <a:ln>
+            <a:noFill/>
+          </a:ln>
+        </p:spPr>
+        <p:txBody>
+          <a:bodyPr anchorCtr="0" anchor="ctr" bIns="0" lIns="0" spcFirstLastPara="1" rIns="0" wrap="square" tIns="0">
+            <a:noAutofit/>
+          </a:bodyPr>
+          <a:lstStyle/>
+          <a:p>
+            <a:pPr indent="-228600" lvl="0" marL="228600" marR="0" rtl="0" algn="l">
               <a:lnSpc>
-                <a:spcPct val="115000"/>
+                <a:spcPct val="125000"/>
               </a:lnSpc>
-            </a:pPr>
-            <a:r>
-              <a:rPr sz="1400" b="0">
-                <a:solidFill>
-                  <a:srgbClr val="8A7A6A"/>
-                </a:solidFill>
-                <a:latin typeface="Calibri"/>
-              </a:rPr>
-              <a:t>Coordinación institucional: presentación del proyecto y definición de un referente por escuela.</a:t>
-            </a:r>
-          </a:p>
-        </p:txBody>
-      </p:sp>
-      <p:sp>
-        <p:nvSpPr>
-          <p:cNvPr id="9" name="Oval 8"/>
-          <p:cNvSpPr/>
-          <p:nvPr/>
-        </p:nvSpPr>
-        <p:spPr>
-          <a:xfrm>
-            <a:off x="3402330" y="2377440"/>
-            <a:ext cx="640080" cy="640080"/>
-          </a:xfrm>
-          <a:prstGeom prst="ellipse">
-            <a:avLst/>
-          </a:prstGeom>
-          <a:solidFill>
-            <a:srgbClr val="B84800"/>
-          </a:solidFill>
-          <a:ln>
-            <a:noFill/>
-          </a:ln>
-          <a:effectLst/>
-        </p:spPr>
-        <p:style>
-          <a:lnRef idx="1">
-            <a:schemeClr val="accent1"/>
-          </a:lnRef>
-          <a:fillRef idx="3">
-            <a:schemeClr val="accent1"/>
-          </a:fillRef>
-          <a:effectRef idx="2">
-            <a:schemeClr val="accent1"/>
-          </a:effectRef>
-          <a:fontRef idx="minor">
-            <a:schemeClr val="lt1"/>
-          </a:fontRef>
-        </p:style>
-        <p:txBody>
-          <a:bodyPr rtlCol="0" anchor="ctr" wrap="none"/>
-          <a:lstStyle/>
-          <a:p>
-            <a:pPr algn="ctr"/>
-            <a:r>
-              <a:rPr sz="2200" b="1">
+              <a:spcBef>
+                <a:spcPts val="0"/>
+              </a:spcBef>
+              <a:spcAft>
+                <a:spcPts val="0"/>
+              </a:spcAft>
+              <a:buClr>
+                <a:srgbClr val="E8DFD6"/>
+              </a:buClr>
+              <a:buSzPts val="1700"/>
+              <a:buFont typeface="Calibri"/>
+              <a:buChar char="•"/>
+            </a:pPr>
+            <a:r>
+              <a:rPr b="0" i="0" lang="en-US" sz="1800" u="none" cap="none" strike="noStrike">
+                <a:solidFill>
+                  <a:srgbClr val="E8DFD6"/>
+                </a:solidFill>
+                <a:latin typeface="Calibri"/>
+                <a:ea typeface="Calibri"/>
+                <a:cs typeface="Calibri"/>
+                <a:sym typeface="Calibri"/>
+              </a:rPr>
+              <a:t>Acompañar y difundir el proyecto entre las escuelas del distrito.</a:t>
+            </a:r>
+            <a:endParaRPr b="0" i="0" sz="1700" u="none" cap="none" strike="noStrike">
+              <a:solidFill>
+                <a:schemeClr val="dk1"/>
+              </a:solidFill>
+              <a:latin typeface="Calibri"/>
+              <a:ea typeface="Calibri"/>
+              <a:cs typeface="Calibri"/>
+              <a:sym typeface="Calibri"/>
+            </a:endParaRPr>
+          </a:p>
+          <a:p>
+            <a:pPr indent="-228600" lvl="0" marL="228600" marR="0" rtl="0" algn="l">
+              <a:lnSpc>
+                <a:spcPct val="125000"/>
+              </a:lnSpc>
+              <a:spcBef>
+                <a:spcPts val="1400"/>
+              </a:spcBef>
+              <a:spcAft>
+                <a:spcPts val="0"/>
+              </a:spcAft>
+              <a:buClr>
+                <a:srgbClr val="E8DFD6"/>
+              </a:buClr>
+              <a:buSzPts val="1700"/>
+              <a:buFont typeface="Calibri"/>
+              <a:buChar char="•"/>
+            </a:pPr>
+            <a:r>
+              <a:rPr b="0" i="0" lang="en-US" sz="1800" u="none" cap="none" strike="noStrike">
+                <a:solidFill>
+                  <a:srgbClr val="E8DFD6"/>
+                </a:solidFill>
+                <a:latin typeface="Calibri"/>
+                <a:ea typeface="Calibri"/>
+                <a:cs typeface="Calibri"/>
+                <a:sym typeface="Calibri"/>
+              </a:rPr>
+              <a:t>Articular con la implementación de la EAI: contenidos y capacitación docente, en conjunto con el equipo de educación.</a:t>
+            </a:r>
+            <a:endParaRPr b="0" i="0" sz="1700" u="none" cap="none" strike="noStrike">
+              <a:solidFill>
+                <a:schemeClr val="dk1"/>
+              </a:solidFill>
+              <a:latin typeface="Calibri"/>
+              <a:ea typeface="Calibri"/>
+              <a:cs typeface="Calibri"/>
+              <a:sym typeface="Calibri"/>
+            </a:endParaRPr>
+          </a:p>
+          <a:p>
+            <a:pPr indent="-228600" lvl="0" marL="228600" marR="0" rtl="0" algn="l">
+              <a:lnSpc>
+                <a:spcPct val="125000"/>
+              </a:lnSpc>
+              <a:spcBef>
+                <a:spcPts val="1400"/>
+              </a:spcBef>
+              <a:spcAft>
+                <a:spcPts val="0"/>
+              </a:spcAft>
+              <a:buClr>
+                <a:srgbClr val="E8DFD6"/>
+              </a:buClr>
+              <a:buSzPts val="1700"/>
+              <a:buFont typeface="Calibri"/>
+              <a:buChar char="•"/>
+            </a:pPr>
+            <a:r>
+              <a:rPr b="0" i="0" lang="en-US" sz="1800" u="none" cap="none" strike="noStrike">
+                <a:solidFill>
+                  <a:srgbClr val="E8DFD6"/>
+                </a:solidFill>
+                <a:latin typeface="Calibri"/>
+                <a:ea typeface="Calibri"/>
+                <a:cs typeface="Calibri"/>
+                <a:sym typeface="Calibri"/>
+              </a:rPr>
+              <a:t>Sumar nuevas escuelas como sedes de sensores y usar el portal como recurso de aula.</a:t>
+            </a:r>
+            <a:endParaRPr b="0" i="0" sz="1700" u="none" cap="none" strike="noStrike">
+              <a:solidFill>
+                <a:schemeClr val="dk1"/>
+              </a:solidFill>
+              <a:latin typeface="Calibri"/>
+              <a:ea typeface="Calibri"/>
+              <a:cs typeface="Calibri"/>
+              <a:sym typeface="Calibri"/>
+            </a:endParaRPr>
+          </a:p>
+        </p:txBody>
+      </p:sp>
+      <p:cxnSp>
+        <p:nvCxnSpPr>
+          <p:cNvPr id="295" name="Google Shape;295;p16"/>
+          <p:cNvCxnSpPr/>
+          <p:nvPr/>
+        </p:nvCxnSpPr>
+        <p:spPr>
+          <a:xfrm>
+            <a:off x="822960" y="5029200"/>
+            <a:ext cx="9784080" cy="0"/>
+          </a:xfrm>
+          <a:prstGeom prst="straightConnector1">
+            <a:avLst/>
+          </a:prstGeom>
+          <a:noFill/>
+          <a:ln cap="flat" cmpd="sng" w="12700">
+            <a:solidFill>
+              <a:srgbClr val="534A3D"/>
+            </a:solidFill>
+            <a:prstDash val="solid"/>
+            <a:round/>
+            <a:headEnd len="sm" w="sm" type="none"/>
+            <a:tailEnd len="sm" w="sm" type="none"/>
+          </a:ln>
+        </p:spPr>
+      </p:cxnSp>
+      <p:pic>
+        <p:nvPicPr>
+          <p:cNvPr descr="/home/claude/pptx_build/icons/email.png" id="296" name="Google Shape;296;p16"/>
+          <p:cNvPicPr preferRelativeResize="0"/>
+          <p:nvPr/>
+        </p:nvPicPr>
+        <p:blipFill rotWithShape="1">
+          <a:blip r:embed="rId4">
+            <a:alphaModFix/>
+          </a:blip>
+          <a:srcRect b="0" l="0" r="0" t="0"/>
+          <a:stretch/>
+        </p:blipFill>
+        <p:spPr>
+          <a:xfrm>
+            <a:off x="822960" y="5349240"/>
+            <a:ext cx="274320" cy="274320"/>
+          </a:xfrm>
+          <a:prstGeom prst="rect">
+            <a:avLst/>
+          </a:prstGeom>
+          <a:noFill/>
+          <a:ln>
+            <a:noFill/>
+          </a:ln>
+        </p:spPr>
+      </p:pic>
+      <p:sp>
+        <p:nvSpPr>
+          <p:cNvPr id="297" name="Google Shape;297;p16"/>
+          <p:cNvSpPr txBox="1"/>
+          <p:nvPr/>
+        </p:nvSpPr>
+        <p:spPr>
+          <a:xfrm>
+            <a:off x="1207008" y="5330952"/>
+            <a:ext cx="3200400" cy="320040"/>
+          </a:xfrm>
+          <a:prstGeom prst="rect">
+            <a:avLst/>
+          </a:prstGeom>
+          <a:noFill/>
+          <a:ln>
+            <a:noFill/>
+          </a:ln>
+        </p:spPr>
+        <p:txBody>
+          <a:bodyPr anchorCtr="0" anchor="ctr" bIns="0" lIns="0" spcFirstLastPara="1" rIns="0" wrap="square" tIns="0">
+            <a:noAutofit/>
+          </a:bodyPr>
+          <a:lstStyle/>
+          <a:p>
+            <a:pPr indent="0" lvl="0" marL="0" marR="0" rtl="0" algn="l">
+              <a:spcBef>
+                <a:spcPts val="0"/>
+              </a:spcBef>
+              <a:spcAft>
+                <a:spcPts val="0"/>
+              </a:spcAft>
+              <a:buClr>
+                <a:srgbClr val="FFFFFF"/>
+              </a:buClr>
+              <a:buSzPts val="1250"/>
+              <a:buFont typeface="JetBrains Mono"/>
+              <a:buNone/>
+            </a:pPr>
+            <a:r>
+              <a:rPr b="0" i="0" lang="en-US" sz="1400" u="none" cap="none" strike="noStrike">
                 <a:solidFill>
                   <a:srgbClr val="FFFFFF"/>
                 </a:solidFill>
-                <a:latin typeface="Calibri"/>
-              </a:rPr>
-              <a:t>2</a:t>
-            </a:r>
-          </a:p>
-        </p:txBody>
-      </p:sp>
-      <p:sp>
-        <p:nvSpPr>
-          <p:cNvPr id="10" name="TextBox 9"/>
-          <p:cNvSpPr txBox="1"/>
-          <p:nvPr/>
-        </p:nvSpPr>
-        <p:spPr>
-          <a:xfrm>
-            <a:off x="3402330" y="3108960"/>
-            <a:ext cx="2625090" cy="274320"/>
-          </a:xfrm>
-          <a:prstGeom prst="rect">
-            <a:avLst/>
-          </a:prstGeom>
-          <a:noFill/>
-        </p:spPr>
-        <p:txBody>
-          <a:bodyPr wrap="square">
-            <a:spAutoFit/>
-          </a:bodyPr>
-          <a:lstStyle/>
-          <a:p>
-            <a:pPr algn="l"/>
-            <a:r>
-              <a:rPr sz="1250" b="1">
-                <a:solidFill>
-                  <a:srgbClr val="9B3D00"/>
-                </a:solidFill>
-                <a:latin typeface="Calibri"/>
-              </a:rPr>
-              <a:t>PRÓXIMAS SEMANAS</a:t>
-            </a:r>
-          </a:p>
-        </p:txBody>
-      </p:sp>
-      <p:sp>
-        <p:nvSpPr>
-          <p:cNvPr id="11" name="TextBox 10"/>
-          <p:cNvSpPr txBox="1"/>
-          <p:nvPr/>
-        </p:nvSpPr>
-        <p:spPr>
-          <a:xfrm>
-            <a:off x="3402330" y="3410712"/>
-            <a:ext cx="2625090" cy="457200"/>
-          </a:xfrm>
-          <a:prstGeom prst="rect">
-            <a:avLst/>
-          </a:prstGeom>
-          <a:noFill/>
-        </p:spPr>
-        <p:txBody>
-          <a:bodyPr wrap="square">
-            <a:spAutoFit/>
-          </a:bodyPr>
-          <a:lstStyle/>
-          <a:p>
-            <a:pPr algn="l"/>
-            <a:r>
-              <a:rPr sz="1700" b="1">
-                <a:solidFill>
-                  <a:srgbClr val="2A1D12"/>
-                </a:solidFill>
-                <a:latin typeface="Calibri"/>
-              </a:rPr>
-              <a:t>Relevamiento en sitio</a:t>
-            </a:r>
-          </a:p>
-        </p:txBody>
-      </p:sp>
-      <p:sp>
-        <p:nvSpPr>
-          <p:cNvPr id="12" name="TextBox 11"/>
-          <p:cNvSpPr txBox="1"/>
-          <p:nvPr/>
-        </p:nvSpPr>
-        <p:spPr>
-          <a:xfrm>
-            <a:off x="3402330" y="3886200"/>
-            <a:ext cx="2625090" cy="1188720"/>
-          </a:xfrm>
-          <a:prstGeom prst="rect">
-            <a:avLst/>
-          </a:prstGeom>
-          <a:noFill/>
-        </p:spPr>
-        <p:txBody>
-          <a:bodyPr wrap="square">
-            <a:spAutoFit/>
-          </a:bodyPr>
-          <a:lstStyle/>
-          <a:p>
-            <a:pPr algn="l">
-              <a:lnSpc>
-                <a:spcPct val="115000"/>
-              </a:lnSpc>
-            </a:pPr>
-            <a:r>
-              <a:rPr sz="1400" b="0">
-                <a:solidFill>
-                  <a:srgbClr val="8A7A6A"/>
-                </a:solidFill>
-                <a:latin typeface="Calibri"/>
-              </a:rPr>
-              <a:t>Visita a cada institución para definir junto al referente el punto exacto de instalación.</a:t>
-            </a:r>
-          </a:p>
-        </p:txBody>
-      </p:sp>
-      <p:sp>
-        <p:nvSpPr>
-          <p:cNvPr id="13" name="Oval 12"/>
-          <p:cNvSpPr/>
-          <p:nvPr/>
-        </p:nvSpPr>
-        <p:spPr>
-          <a:xfrm>
-            <a:off x="6164580" y="2377440"/>
-            <a:ext cx="640080" cy="640080"/>
-          </a:xfrm>
-          <a:prstGeom prst="ellipse">
-            <a:avLst/>
-          </a:prstGeom>
-          <a:solidFill>
-            <a:srgbClr val="B84800"/>
-          </a:solidFill>
-          <a:ln>
-            <a:noFill/>
-          </a:ln>
-          <a:effectLst/>
-        </p:spPr>
-        <p:style>
-          <a:lnRef idx="1">
-            <a:schemeClr val="accent1"/>
-          </a:lnRef>
-          <a:fillRef idx="3">
-            <a:schemeClr val="accent1"/>
-          </a:fillRef>
-          <a:effectRef idx="2">
-            <a:schemeClr val="accent1"/>
-          </a:effectRef>
-          <a:fontRef idx="minor">
-            <a:schemeClr val="lt1"/>
-          </a:fontRef>
-        </p:style>
-        <p:txBody>
-          <a:bodyPr rtlCol="0" anchor="ctr" wrap="none"/>
-          <a:lstStyle/>
-          <a:p>
-            <a:pPr algn="ctr"/>
-            <a:r>
-              <a:rPr sz="2200" b="1">
+                <a:latin typeface="JetBrains Mono"/>
+                <a:ea typeface="JetBrains Mono"/>
+                <a:cs typeface="JetBrains Mono"/>
+                <a:sym typeface="JetBrains Mono"/>
+              </a:rPr>
+              <a:t>lucianolamaita@gmail.com</a:t>
+            </a:r>
+            <a:endParaRPr b="0" i="0" sz="1250" u="none" cap="none" strike="noStrike">
+              <a:solidFill>
+                <a:schemeClr val="dk1"/>
+              </a:solidFill>
+              <a:latin typeface="Calibri"/>
+              <a:ea typeface="Calibri"/>
+              <a:cs typeface="Calibri"/>
+              <a:sym typeface="Calibri"/>
+            </a:endParaRPr>
+          </a:p>
+        </p:txBody>
+      </p:sp>
+      <p:pic>
+        <p:nvPicPr>
+          <p:cNvPr descr="/home/claude/pptx_build/icons/globe.png" id="298" name="Google Shape;298;p16"/>
+          <p:cNvPicPr preferRelativeResize="0"/>
+          <p:nvPr/>
+        </p:nvPicPr>
+        <p:blipFill rotWithShape="1">
+          <a:blip r:embed="rId5">
+            <a:alphaModFix/>
+          </a:blip>
+          <a:srcRect b="0" l="0" r="0" t="0"/>
+          <a:stretch/>
+        </p:blipFill>
+        <p:spPr>
+          <a:xfrm>
+            <a:off x="4480560" y="5349240"/>
+            <a:ext cx="274320" cy="274320"/>
+          </a:xfrm>
+          <a:prstGeom prst="rect">
+            <a:avLst/>
+          </a:prstGeom>
+          <a:noFill/>
+          <a:ln>
+            <a:noFill/>
+          </a:ln>
+        </p:spPr>
+      </p:pic>
+      <p:sp>
+        <p:nvSpPr>
+          <p:cNvPr id="299" name="Google Shape;299;p16"/>
+          <p:cNvSpPr txBox="1"/>
+          <p:nvPr/>
+        </p:nvSpPr>
+        <p:spPr>
+          <a:xfrm>
+            <a:off x="4864608" y="5330952"/>
+            <a:ext cx="2011680" cy="320040"/>
+          </a:xfrm>
+          <a:prstGeom prst="rect">
+            <a:avLst/>
+          </a:prstGeom>
+          <a:noFill/>
+          <a:ln>
+            <a:noFill/>
+          </a:ln>
+        </p:spPr>
+        <p:txBody>
+          <a:bodyPr anchorCtr="0" anchor="ctr" bIns="0" lIns="0" spcFirstLastPara="1" rIns="0" wrap="square" tIns="0">
+            <a:noAutofit/>
+          </a:bodyPr>
+          <a:lstStyle/>
+          <a:p>
+            <a:pPr indent="0" lvl="0" marL="0" marR="0" rtl="0" algn="l">
+              <a:spcBef>
+                <a:spcPts val="0"/>
+              </a:spcBef>
+              <a:spcAft>
+                <a:spcPts val="0"/>
+              </a:spcAft>
+              <a:buClr>
+                <a:srgbClr val="FFFFFF"/>
+              </a:buClr>
+              <a:buSzPts val="1250"/>
+              <a:buFont typeface="JetBrains Mono"/>
+              <a:buNone/>
+            </a:pPr>
+            <a:r>
+              <a:rPr b="0" i="0" lang="en-US" sz="1400" u="none" cap="none" strike="noStrike">
                 <a:solidFill>
                   <a:srgbClr val="FFFFFF"/>
                 </a:solidFill>
-                <a:latin typeface="Calibri"/>
-              </a:rPr>
-              <a:t>3</a:t>
-            </a:r>
-          </a:p>
-        </p:txBody>
-      </p:sp>
-      <p:sp>
-        <p:nvSpPr>
-          <p:cNvPr id="14" name="TextBox 13"/>
-          <p:cNvSpPr txBox="1"/>
-          <p:nvPr/>
-        </p:nvSpPr>
-        <p:spPr>
-          <a:xfrm>
-            <a:off x="6164580" y="3108960"/>
-            <a:ext cx="2625090" cy="274320"/>
-          </a:xfrm>
-          <a:prstGeom prst="rect">
-            <a:avLst/>
-          </a:prstGeom>
-          <a:noFill/>
-        </p:spPr>
-        <p:txBody>
-          <a:bodyPr wrap="square">
-            <a:spAutoFit/>
-          </a:bodyPr>
-          <a:lstStyle/>
-          <a:p>
-            <a:pPr algn="l"/>
-            <a:r>
-              <a:rPr sz="1250" b="1">
-                <a:solidFill>
-                  <a:srgbClr val="9B3D00"/>
-                </a:solidFill>
-                <a:latin typeface="Calibri"/>
-              </a:rPr>
-              <a:t>TRAS EL RELEVAMIENTO</a:t>
-            </a:r>
-          </a:p>
-        </p:txBody>
-      </p:sp>
-      <p:sp>
-        <p:nvSpPr>
-          <p:cNvPr id="15" name="TextBox 14"/>
-          <p:cNvSpPr txBox="1"/>
-          <p:nvPr/>
-        </p:nvSpPr>
-        <p:spPr>
-          <a:xfrm>
-            <a:off x="6164580" y="3410712"/>
-            <a:ext cx="2625090" cy="457200"/>
-          </a:xfrm>
-          <a:prstGeom prst="rect">
-            <a:avLst/>
-          </a:prstGeom>
-          <a:noFill/>
-        </p:spPr>
-        <p:txBody>
-          <a:bodyPr wrap="square">
-            <a:spAutoFit/>
-          </a:bodyPr>
-          <a:lstStyle/>
-          <a:p>
-            <a:pPr algn="l"/>
-            <a:r>
-              <a:rPr sz="1700" b="1">
-                <a:solidFill>
-                  <a:srgbClr val="2A1D12"/>
-                </a:solidFill>
-                <a:latin typeface="Calibri"/>
-              </a:rPr>
-              <a:t>Instalación y calibración</a:t>
-            </a:r>
-          </a:p>
-        </p:txBody>
-      </p:sp>
-      <p:sp>
-        <p:nvSpPr>
-          <p:cNvPr id="16" name="TextBox 15"/>
-          <p:cNvSpPr txBox="1"/>
-          <p:nvPr/>
-        </p:nvSpPr>
-        <p:spPr>
-          <a:xfrm>
-            <a:off x="6164580" y="3886200"/>
-            <a:ext cx="2625090" cy="1188720"/>
-          </a:xfrm>
-          <a:prstGeom prst="rect">
-            <a:avLst/>
-          </a:prstGeom>
-          <a:noFill/>
-        </p:spPr>
-        <p:txBody>
-          <a:bodyPr wrap="square">
-            <a:spAutoFit/>
-          </a:bodyPr>
-          <a:lstStyle/>
-          <a:p>
-            <a:pPr algn="l">
-              <a:lnSpc>
-                <a:spcPct val="115000"/>
-              </a:lnSpc>
-            </a:pPr>
-            <a:r>
-              <a:rPr sz="1400" b="0">
-                <a:solidFill>
-                  <a:srgbClr val="8A7A6A"/>
-                </a:solidFill>
-                <a:latin typeface="Calibri"/>
-              </a:rPr>
-              <a:t>Montaje del sensor, conexión a energía/WiFi y verificación de la primera lectura.</a:t>
-            </a:r>
-          </a:p>
-        </p:txBody>
-      </p:sp>
-      <p:sp>
-        <p:nvSpPr>
-          <p:cNvPr id="17" name="Oval 16"/>
-          <p:cNvSpPr/>
-          <p:nvPr/>
-        </p:nvSpPr>
-        <p:spPr>
-          <a:xfrm>
-            <a:off x="8926830" y="2377440"/>
-            <a:ext cx="640080" cy="640080"/>
-          </a:xfrm>
-          <a:prstGeom prst="ellipse">
-            <a:avLst/>
-          </a:prstGeom>
-          <a:solidFill>
-            <a:srgbClr val="B84800"/>
-          </a:solidFill>
-          <a:ln>
-            <a:noFill/>
-          </a:ln>
-          <a:effectLst/>
-        </p:spPr>
-        <p:style>
-          <a:lnRef idx="1">
-            <a:schemeClr val="accent1"/>
-          </a:lnRef>
-          <a:fillRef idx="3">
-            <a:schemeClr val="accent1"/>
-          </a:fillRef>
-          <a:effectRef idx="2">
-            <a:schemeClr val="accent1"/>
-          </a:effectRef>
-          <a:fontRef idx="minor">
-            <a:schemeClr val="lt1"/>
-          </a:fontRef>
-        </p:style>
-        <p:txBody>
-          <a:bodyPr rtlCol="0" anchor="ctr" wrap="none"/>
-          <a:lstStyle/>
-          <a:p>
-            <a:pPr algn="ctr"/>
-            <a:r>
-              <a:rPr sz="2200" b="1">
+                <a:latin typeface="JetBrains Mono"/>
+                <a:ea typeface="JetBrains Mono"/>
+                <a:cs typeface="JetBrains Mono"/>
+                <a:sym typeface="JetBrains Mono"/>
+              </a:rPr>
+              <a:t>profe.lemeit.ar</a:t>
+            </a:r>
+            <a:endParaRPr b="0" i="0" sz="1250" u="none" cap="none" strike="noStrike">
+              <a:solidFill>
+                <a:schemeClr val="dk1"/>
+              </a:solidFill>
+              <a:latin typeface="Calibri"/>
+              <a:ea typeface="Calibri"/>
+              <a:cs typeface="Calibri"/>
+              <a:sym typeface="Calibri"/>
+            </a:endParaRPr>
+          </a:p>
+        </p:txBody>
+      </p:sp>
+      <p:pic>
+        <p:nvPicPr>
+          <p:cNvPr descr="/home/claude/pptx_build/icons/portal.png" id="300" name="Google Shape;300;p16"/>
+          <p:cNvPicPr preferRelativeResize="0"/>
+          <p:nvPr/>
+        </p:nvPicPr>
+        <p:blipFill rotWithShape="1">
+          <a:blip r:embed="rId6">
+            <a:alphaModFix/>
+          </a:blip>
+          <a:srcRect b="0" l="0" r="0" t="0"/>
+          <a:stretch/>
+        </p:blipFill>
+        <p:spPr>
+          <a:xfrm>
+            <a:off x="6858000" y="5349240"/>
+            <a:ext cx="274320" cy="274320"/>
+          </a:xfrm>
+          <a:prstGeom prst="rect">
+            <a:avLst/>
+          </a:prstGeom>
+          <a:noFill/>
+          <a:ln>
+            <a:noFill/>
+          </a:ln>
+        </p:spPr>
+      </p:pic>
+      <p:sp>
+        <p:nvSpPr>
+          <p:cNvPr id="301" name="Google Shape;301;p16"/>
+          <p:cNvSpPr txBox="1"/>
+          <p:nvPr/>
+        </p:nvSpPr>
+        <p:spPr>
+          <a:xfrm>
+            <a:off x="7242048" y="5330952"/>
+            <a:ext cx="2011680" cy="320040"/>
+          </a:xfrm>
+          <a:prstGeom prst="rect">
+            <a:avLst/>
+          </a:prstGeom>
+          <a:noFill/>
+          <a:ln>
+            <a:noFill/>
+          </a:ln>
+        </p:spPr>
+        <p:txBody>
+          <a:bodyPr anchorCtr="0" anchor="ctr" bIns="0" lIns="0" spcFirstLastPara="1" rIns="0" wrap="square" tIns="0">
+            <a:noAutofit/>
+          </a:bodyPr>
+          <a:lstStyle/>
+          <a:p>
+            <a:pPr indent="0" lvl="0" marL="0" marR="0" rtl="0" algn="l">
+              <a:spcBef>
+                <a:spcPts val="0"/>
+              </a:spcBef>
+              <a:spcAft>
+                <a:spcPts val="0"/>
+              </a:spcAft>
+              <a:buClr>
+                <a:srgbClr val="FFFFFF"/>
+              </a:buClr>
+              <a:buSzPts val="1250"/>
+              <a:buFont typeface="JetBrains Mono"/>
+              <a:buNone/>
+            </a:pPr>
+            <a:r>
+              <a:rPr b="0" i="0" lang="en-US" sz="1400" u="none" cap="none" strike="noStrike">
                 <a:solidFill>
                   <a:srgbClr val="FFFFFF"/>
                 </a:solidFill>
-                <a:latin typeface="Calibri"/>
-              </a:rPr>
-              <a:t>4</a:t>
-            </a:r>
-          </a:p>
-        </p:txBody>
-      </p:sp>
-      <p:sp>
-        <p:nvSpPr>
-          <p:cNvPr id="18" name="TextBox 17"/>
-          <p:cNvSpPr txBox="1"/>
-          <p:nvPr/>
-        </p:nvSpPr>
-        <p:spPr>
-          <a:xfrm>
-            <a:off x="8926830" y="3108960"/>
-            <a:ext cx="2625090" cy="274320"/>
-          </a:xfrm>
-          <a:prstGeom prst="rect">
-            <a:avLst/>
-          </a:prstGeom>
-          <a:noFill/>
-        </p:spPr>
-        <p:txBody>
-          <a:bodyPr wrap="square">
-            <a:spAutoFit/>
-          </a:bodyPr>
-          <a:lstStyle/>
-          <a:p>
-            <a:pPr algn="l"/>
-            <a:r>
-              <a:rPr sz="1250" b="1">
-                <a:solidFill>
-                  <a:srgbClr val="9B3D00"/>
-                </a:solidFill>
-                <a:latin typeface="Calibri"/>
-              </a:rPr>
-              <a:t>META</a:t>
-            </a:r>
-          </a:p>
-        </p:txBody>
-      </p:sp>
-      <p:sp>
-        <p:nvSpPr>
-          <p:cNvPr id="19" name="TextBox 18"/>
-          <p:cNvSpPr txBox="1"/>
-          <p:nvPr/>
-        </p:nvSpPr>
-        <p:spPr>
-          <a:xfrm>
-            <a:off x="8926830" y="3410712"/>
-            <a:ext cx="2625090" cy="457200"/>
-          </a:xfrm>
-          <a:prstGeom prst="rect">
-            <a:avLst/>
-          </a:prstGeom>
-          <a:noFill/>
-        </p:spPr>
-        <p:txBody>
-          <a:bodyPr wrap="square">
-            <a:spAutoFit/>
-          </a:bodyPr>
-          <a:lstStyle/>
-          <a:p>
-            <a:pPr algn="l"/>
-            <a:r>
-              <a:rPr sz="1700" b="1">
-                <a:solidFill>
-                  <a:srgbClr val="2A1D12"/>
-                </a:solidFill>
-                <a:latin typeface="Calibri"/>
-              </a:rPr>
-              <a:t>Datos en vivo</a:t>
-            </a:r>
-          </a:p>
-        </p:txBody>
-      </p:sp>
-      <p:sp>
-        <p:nvSpPr>
-          <p:cNvPr id="20" name="TextBox 19"/>
-          <p:cNvSpPr txBox="1"/>
-          <p:nvPr/>
-        </p:nvSpPr>
-        <p:spPr>
-          <a:xfrm>
-            <a:off x="8926830" y="3886200"/>
-            <a:ext cx="2625090" cy="1188720"/>
-          </a:xfrm>
-          <a:prstGeom prst="rect">
-            <a:avLst/>
-          </a:prstGeom>
-          <a:noFill/>
-        </p:spPr>
-        <p:txBody>
-          <a:bodyPr wrap="square">
-            <a:spAutoFit/>
-          </a:bodyPr>
-          <a:lstStyle/>
-          <a:p>
-            <a:pPr algn="l">
-              <a:lnSpc>
-                <a:spcPct val="115000"/>
-              </a:lnSpc>
-            </a:pPr>
-            <a:r>
-              <a:rPr sz="1400" b="0">
-                <a:solidFill>
-                  <a:srgbClr val="8A7A6A"/>
-                </a:solidFill>
-                <a:latin typeface="Calibri"/>
-              </a:rPr>
-              <a:t>Cada escuela visible en aq.lemeit.ar, con acceso público a su propio historial.</a:t>
-            </a:r>
-          </a:p>
-        </p:txBody>
-      </p:sp>
-      <p:sp>
-        <p:nvSpPr>
-          <p:cNvPr id="21" name="TextBox 20"/>
+                <a:latin typeface="JetBrains Mono"/>
+                <a:ea typeface="JetBrains Mono"/>
+                <a:cs typeface="JetBrains Mono"/>
+                <a:sym typeface="JetBrains Mono"/>
+              </a:rPr>
+              <a:t>aq.lemeit.ar</a:t>
+            </a:r>
+            <a:endParaRPr b="0" i="0" sz="1250" u="none" cap="none" strike="noStrike">
+              <a:solidFill>
+                <a:schemeClr val="dk1"/>
+              </a:solidFill>
+              <a:latin typeface="Calibri"/>
+              <a:ea typeface="Calibri"/>
+              <a:cs typeface="Calibri"/>
+              <a:sym typeface="Calibri"/>
+            </a:endParaRPr>
+          </a:p>
+        </p:txBody>
+      </p:sp>
+      <p:sp>
+        <p:nvSpPr>
+          <p:cNvPr id="302" name="Google Shape;302;p16"/>
+          <p:cNvSpPr txBox="1"/>
+          <p:nvPr/>
+        </p:nvSpPr>
+        <p:spPr>
+          <a:xfrm>
+            <a:off x="822960" y="5989320"/>
+            <a:ext cx="4572000" cy="457200"/>
+          </a:xfrm>
+          <a:prstGeom prst="rect">
+            <a:avLst/>
+          </a:prstGeom>
+          <a:noFill/>
+          <a:ln>
+            <a:noFill/>
+          </a:ln>
+        </p:spPr>
+        <p:txBody>
+          <a:bodyPr anchorCtr="0" anchor="ctr" bIns="0" lIns="0" spcFirstLastPara="1" rIns="0" wrap="square" tIns="0">
+            <a:noAutofit/>
+          </a:bodyPr>
+          <a:lstStyle/>
+          <a:p>
+            <a:pPr indent="0" lvl="0" marL="0" marR="0" rtl="0" algn="l">
+              <a:spcBef>
+                <a:spcPts val="0"/>
+              </a:spcBef>
+              <a:spcAft>
+                <a:spcPts val="0"/>
+              </a:spcAft>
+              <a:buClr>
+                <a:srgbClr val="C9BEB2"/>
+              </a:buClr>
+              <a:buSzPts val="1800"/>
+              <a:buFont typeface="Calibri"/>
+              <a:buNone/>
+            </a:pPr>
+            <a:r>
+              <a:rPr b="0" i="1" lang="en-US" sz="1900" u="none" cap="none" strike="noStrike">
+                <a:solidFill>
+                  <a:srgbClr val="C9BEB2"/>
+                </a:solidFill>
+                <a:latin typeface="Calibri"/>
+                <a:ea typeface="Calibri"/>
+                <a:cs typeface="Calibri"/>
+                <a:sym typeface="Calibri"/>
+              </a:rPr>
+              <a:t>Gracias.</a:t>
+            </a:r>
+            <a:endParaRPr b="0" i="0" sz="1800" u="none" cap="none" strike="noStrike">
+              <a:solidFill>
+                <a:schemeClr val="dk1"/>
+              </a:solidFill>
+              <a:latin typeface="Calibri"/>
+              <a:ea typeface="Calibri"/>
+              <a:cs typeface="Calibri"/>
+              <a:sym typeface="Calibri"/>
+            </a:endParaRPr>
+          </a:p>
+        </p:txBody>
+      </p:sp>
+      <p:sp>
+        <p:nvSpPr>
+          <p:cNvPr id="303" name="Google Shape;303;p16"/>
+          <p:cNvSpPr txBox="1"/>
+          <p:nvPr/>
+        </p:nvSpPr>
+        <p:spPr>
+          <a:xfrm>
+            <a:off x="11457432" y="6400800"/>
+            <a:ext cx="457200" cy="274320"/>
+          </a:xfrm>
+          <a:prstGeom prst="rect">
+            <a:avLst/>
+          </a:prstGeom>
+          <a:noFill/>
+          <a:ln>
+            <a:noFill/>
+          </a:ln>
+        </p:spPr>
+        <p:txBody>
+          <a:bodyPr anchorCtr="0" anchor="ctr" bIns="0" lIns="0" spcFirstLastPara="1" rIns="0" wrap="square" tIns="0">
+            <a:noAutofit/>
+          </a:bodyPr>
+          <a:lstStyle/>
+          <a:p>
+            <a:pPr indent="0" lvl="0" marL="0" marR="0" rtl="0" algn="r">
+              <a:spcBef>
+                <a:spcPts val="0"/>
+              </a:spcBef>
+              <a:spcAft>
+                <a:spcPts val="0"/>
+              </a:spcAft>
+              <a:buClr>
+                <a:srgbClr val="C9BEB2"/>
+              </a:buClr>
+              <a:buSzPts val="1000"/>
+              <a:buFont typeface="Calibri"/>
+              <a:buNone/>
+            </a:pPr>
+            <a:r>
+              <a:rPr lang="en-US" sz="1250">
+                <a:solidFill>
+                  <a:srgbClr val="C9BEB2"/>
+                </a:solidFill>
+                <a:latin typeface="Calibri"/>
+                <a:ea typeface="Calibri"/>
+                <a:cs typeface="Calibri"/>
+                <a:sym typeface="Calibri"/>
+              </a:rPr>
+              <a:t>19</a:t>
+            </a:r>
+            <a:endParaRPr b="0" i="0" sz="1000" u="none" cap="none" strike="noStrike">
+              <a:solidFill>
+                <a:schemeClr val="dk1"/>
+              </a:solidFill>
+              <a:latin typeface="Calibri"/>
+              <a:ea typeface="Calibri"/>
+              <a:cs typeface="Calibri"/>
+              <a:sym typeface="Calibri"/>
+            </a:endParaRPr>
+          </a:p>
+        </p:txBody>
+      </p:sp>
+      <p:sp>
+        <p:nvSpPr>
+          <p:cNvPr id="304" name="Google Shape;304;p16"/>
           <p:cNvSpPr txBox="1"/>
           <p:nvPr/>
         </p:nvSpPr>
@@ -13074,57 +13080,51 @@
             <a:avLst/>
           </a:prstGeom>
           <a:noFill/>
-        </p:spPr>
-        <p:txBody>
-          <a:bodyPr wrap="none">
-            <a:spAutoFit/>
-          </a:bodyPr>
-          <a:lstStyle/>
-          <a:p>
-            <a:r>
-              <a:rPr sz="1250">
-                <a:solidFill>
-                  <a:srgbClr val="8A7A6A"/>
-                </a:solidFill>
-                <a:latin typeface="Calibri"/>
+          <a:ln>
+            <a:noFill/>
+          </a:ln>
+        </p:spPr>
+        <p:txBody>
+          <a:bodyPr anchorCtr="0" anchor="ctr" bIns="0" lIns="0" spcFirstLastPara="1" rIns="0" wrap="square" tIns="0">
+            <a:noAutofit/>
+          </a:bodyPr>
+          <a:lstStyle/>
+          <a:p>
+            <a:pPr indent="0" lvl="0" marL="0" marR="0" rtl="0" algn="l">
+              <a:spcBef>
+                <a:spcPts val="0"/>
+              </a:spcBef>
+              <a:spcAft>
+                <a:spcPts val="0"/>
+              </a:spcAft>
+              <a:buClr>
+                <a:srgbClr val="C9BEB2"/>
+              </a:buClr>
+              <a:buSzPts val="1000"/>
+              <a:buFont typeface="Calibri"/>
+              <a:buNone/>
+            </a:pPr>
+            <a:r>
+              <a:rPr b="0" i="0" lang="en-US" sz="1250" u="none" cap="none" strike="noStrike">
+                <a:solidFill>
+                  <a:srgbClr val="C9BEB2"/>
+                </a:solidFill>
+                <a:latin typeface="Calibri"/>
+                <a:ea typeface="Calibri"/>
+                <a:cs typeface="Calibri"/>
+                <a:sym typeface="Calibri"/>
               </a:rPr>
               <a:t>Ciencia Ciudadana Ambiental · Saladillo</a:t>
             </a:r>
-          </a:p>
-        </p:txBody>
-      </p:sp>
-      <p:sp>
-        <p:nvSpPr>
-          <p:cNvPr id="22" name="TextBox 21"/>
-          <p:cNvSpPr txBox="1"/>
-          <p:nvPr/>
-        </p:nvSpPr>
-        <p:spPr>
-          <a:xfrm>
-            <a:off x="11457432" y="6400800"/>
-            <a:ext cx="457200" cy="274320"/>
-          </a:xfrm>
-          <a:prstGeom prst="rect">
-            <a:avLst/>
-          </a:prstGeom>
-          <a:noFill/>
-        </p:spPr>
-        <p:txBody>
-          <a:bodyPr wrap="none">
-            <a:spAutoFit/>
-          </a:bodyPr>
-          <a:lstStyle/>
-          <a:p>
-            <a:pPr algn="r"/>
-            <a:r>
-              <a:rPr sz="1250">
-                <a:solidFill>
-                  <a:srgbClr val="8A7A6A"/>
-                </a:solidFill>
-                <a:latin typeface="Calibri"/>
-              </a:rPr>
-              <a:t>18</a:t>
-            </a:r>
+            <a:endParaRPr b="0" i="0" sz="1000" u="none" cap="none" strike="noStrike">
+              <a:solidFill>
+                <a:schemeClr val="dk1"/>
+              </a:solidFill>
+              <a:latin typeface="Calibri"/>
+              <a:ea typeface="Calibri"/>
+              <a:cs typeface="Calibri"/>
+              <a:sym typeface="Calibri"/>
+            </a:endParaRPr>
           </a:p>
         </p:txBody>
       </p:sp>
@@ -14288,7 +14288,7 @@
                 <a:cs typeface="Calibri"/>
                 <a:sym typeface="Calibri"/>
               </a:rPr>
-              <a:t>Ya hay monitores desplegados: Clarity Node-S (EP N°15, zona rural), AirGradient Open Air (Saladillo urbano) y Atmotube Pro (mediciones móviles), con datos públicos en OpenAQ Explorer desde 2023.</a:t>
+              <a:t>Ya hay monitores desplegados: PurpleAir Flex (4 unidades, donadas por PurpleAir Collective 2024), Clarity Node-S (EP N°15, zona rural), AirGradient Open Air (Saladillo urbano) y Atmotube Pro (mediciones móviles), con datos públicos en OpenAQ Explorer desde 2023.</a:t>
             </a:r>
             <a:endParaRPr b="0" i="0" sz="1800" u="none" cap="none" strike="noStrike">
               <a:solidFill>
